--- a/public/RasoiCapital_PitchDeck.pptx
+++ b/public/RasoiCapital_PitchDeck.pptx
@@ -9,6 +9,8 @@
     <p:sldId id="257" r:id="rId3"/>
     <p:sldId id="258" r:id="rId4"/>
     <p:sldId id="259" r:id="rId5"/>
+    <p:sldId id="2147483649" r:id="rId23"/>
+    <p:sldId id="2147483650" r:id="rId24"/>
     <p:sldId id="260" r:id="rId6"/>
     <p:sldId id="261" r:id="rId7"/>
     <p:sldId id="262" r:id="rId8"/>
@@ -13032,6 +13034,2691 @@
 </p:sld>
 </file>
 
+<file path=ppt/slides/slide17.xml><?xml version="1.0" encoding="utf-8"?>
+<p:sld xmlns:a="http://schemas.openxmlformats.org/drawingml/2006/main" xmlns:r="http://schemas.openxmlformats.org/officeDocument/2006/relationships" xmlns:p="http://schemas.openxmlformats.org/presentationml/2006/main">
+  <p:cSld name="Slide 1">
+    <p:bg>
+      <p:bgPr>
+        <a:solidFill>
+          <a:srgbClr val="FFFFFF"/>
+        </a:solidFill>
+      </p:bgPr>
+    </p:bg>
+    <p:spTree>
+      <p:nvGrpSpPr>
+        <p:cNvPr id="1" name=""/>
+        <p:cNvGrpSpPr/>
+        <p:nvPr/>
+      </p:nvGrpSpPr>
+      <p:grpSpPr>
+        <a:xfrm>
+          <a:off x="0" y="0"/>
+          <a:ext cx="0" cy="0"/>
+          <a:chOff x="0" y="0"/>
+          <a:chExt cx="0" cy="0"/>
+        </a:xfrm>
+      </p:grpSpPr>
+      <p:sp>
+        <p:nvSpPr>
+          <p:cNvPr id="2" name="Text 0"/>
+          <p:cNvSpPr/>
+          <p:nvPr/>
+        </p:nvSpPr>
+        <p:spPr>
+          <a:xfrm>
+            <a:off x="502920" y="292608"/>
+            <a:ext cx="8229600" cy="274320"/>
+          </a:xfrm>
+          <a:prstGeom prst="rect">
+            <a:avLst/>
+          </a:prstGeom>
+          <a:noFill/>
+          <a:ln/>
+        </p:spPr>
+        <p:txBody>
+          <a:bodyPr wrap="square" rtlCol="0" anchor="ctr"/>
+          <a:lstStyle/>
+          <a:p>
+            <a:pPr indent="0" marL="0">
+              <a:buNone/>
+            </a:pPr>
+            <a:r>
+              <a:rPr lang="en-US" sz="1100" b="1" spc="300" kern="0" dirty="0">
+                <a:solidFill>
+                  <a:srgbClr val="E8520A"/>
+                </a:solidFill>
+                <a:latin typeface="Calibri" pitchFamily="34" charset="0"/>
+                <a:ea typeface="Calibri" pitchFamily="34" charset="-122"/>
+                <a:cs typeface="Calibri" pitchFamily="34" charset="-120"/>
+              </a:rPr>
+              <a:t>DISTRIBUTION STRATEGY</a:t>
+            </a:r>
+            <a:endParaRPr lang="en-US" sz="1100" dirty="0"/>
+          </a:p>
+        </p:txBody>
+      </p:sp>
+      <p:sp>
+        <p:nvSpPr>
+          <p:cNvPr id="3" name="Text 1"/>
+          <p:cNvSpPr/>
+          <p:nvPr/>
+        </p:nvSpPr>
+        <p:spPr>
+          <a:xfrm>
+            <a:off x="502920" y="566928"/>
+            <a:ext cx="8321040" cy="548640"/>
+          </a:xfrm>
+          <a:prstGeom prst="rect">
+            <a:avLst/>
+          </a:prstGeom>
+          <a:noFill/>
+          <a:ln/>
+        </p:spPr>
+        <p:txBody>
+          <a:bodyPr wrap="square" rtlCol="0" anchor="ctr"/>
+          <a:lstStyle/>
+          <a:p>
+            <a:pPr indent="0" marL="0">
+              <a:buNone/>
+            </a:pPr>
+            <a:r>
+              <a:rPr lang="en-US" sz="2700" b="1" dirty="0">
+                <a:solidFill>
+                  <a:srgbClr val="10182B"/>
+                </a:solidFill>
+                <a:latin typeface="Calibri" pitchFamily="34" charset="0"/>
+                <a:ea typeface="Calibri" pitchFamily="34" charset="-122"/>
+                <a:cs typeface="Calibri" pitchFamily="34" charset="-120"/>
+              </a:rPr>
+              <a:t>7.5M outlets. We reach them through their POS.</a:t>
+            </a:r>
+            <a:endParaRPr lang="en-US" sz="2700" dirty="0"/>
+          </a:p>
+        </p:txBody>
+      </p:sp>
+      <p:sp>
+        <p:nvSpPr>
+          <p:cNvPr id="4" name="Shape 2"/>
+          <p:cNvSpPr/>
+          <p:nvPr/>
+        </p:nvSpPr>
+        <p:spPr>
+          <a:xfrm>
+            <a:off x="502920" y="1417320"/>
+            <a:ext cx="4023360" cy="3337560"/>
+          </a:xfrm>
+          <a:prstGeom prst="roundRect">
+            <a:avLst>
+              <a:gd name="adj" fmla="val 3288"/>
+            </a:avLst>
+          </a:prstGeom>
+          <a:solidFill>
+            <a:srgbClr val="FBF6EF"/>
+          </a:solidFill>
+          <a:ln/>
+          <a:effectLst>
+            <a:outerShdw sx="100000" sy="100000" kx="0" ky="0" algn="bl" rotWithShape="0" blurRad="76200" dist="25400" dir="5400000">
+              <a:srgbClr val="CBD5E1">
+                <a:alpha val="25000"/>
+              </a:srgbClr>
+            </a:outerShdw>
+          </a:effectLst>
+        </p:spPr>
+      </p:sp>
+      <p:sp>
+        <p:nvSpPr>
+          <p:cNvPr id="5" name="Text 3"/>
+          <p:cNvSpPr/>
+          <p:nvPr/>
+        </p:nvSpPr>
+        <p:spPr>
+          <a:xfrm>
+            <a:off x="685800" y="1572768"/>
+            <a:ext cx="3657600" cy="256032"/>
+          </a:xfrm>
+          <a:prstGeom prst="rect">
+            <a:avLst/>
+          </a:prstGeom>
+          <a:noFill/>
+          <a:ln/>
+        </p:spPr>
+        <p:txBody>
+          <a:bodyPr wrap="square" rtlCol="0" anchor="ctr"/>
+          <a:lstStyle/>
+          <a:p>
+            <a:pPr indent="0" marL="0">
+              <a:buNone/>
+            </a:pPr>
+            <a:r>
+              <a:rPr lang="en-US" sz="950" b="1" spc="200" kern="0" dirty="0">
+                <a:solidFill>
+                  <a:srgbClr val="B45309"/>
+                </a:solidFill>
+                <a:latin typeface="Calibri" pitchFamily="34" charset="0"/>
+                <a:ea typeface="Calibri" pitchFamily="34" charset="-122"/>
+                <a:cs typeface="Calibri" pitchFamily="34" charset="-120"/>
+              </a:rPr>
+              <a:t>THE ADDRESSABLE UNIVERSE</a:t>
+            </a:r>
+            <a:endParaRPr lang="en-US" sz="950" dirty="0"/>
+          </a:p>
+        </p:txBody>
+      </p:sp>
+      <p:sp>
+        <p:nvSpPr>
+          <p:cNvPr id="6" name="Shape 4"/>
+          <p:cNvSpPr/>
+          <p:nvPr/>
+        </p:nvSpPr>
+        <p:spPr>
+          <a:xfrm>
+            <a:off x="685800" y="1920240"/>
+            <a:ext cx="3474720" cy="777240"/>
+          </a:xfrm>
+          <a:prstGeom prst="roundRect">
+            <a:avLst>
+              <a:gd name="adj" fmla="val 9412"/>
+            </a:avLst>
+          </a:prstGeom>
+          <a:solidFill>
+            <a:srgbClr val="FFFFFF"/>
+          </a:solidFill>
+          <a:ln/>
+          <a:effectLst>
+            <a:outerShdw sx="100000" sy="100000" kx="0" ky="0" algn="bl" rotWithShape="0" blurRad="76200" dist="25400" dir="5400000">
+              <a:srgbClr val="CBD5E1">
+                <a:alpha val="25000"/>
+              </a:srgbClr>
+            </a:outerShdw>
+          </a:effectLst>
+        </p:spPr>
+      </p:sp>
+      <p:sp>
+        <p:nvSpPr>
+          <p:cNvPr id="7" name="Text 5"/>
+          <p:cNvSpPr/>
+          <p:nvPr/>
+        </p:nvSpPr>
+        <p:spPr>
+          <a:xfrm>
+            <a:off x="822960" y="1975104"/>
+            <a:ext cx="1371600" cy="384048"/>
+          </a:xfrm>
+          <a:prstGeom prst="rect">
+            <a:avLst/>
+          </a:prstGeom>
+          <a:noFill/>
+          <a:ln/>
+        </p:spPr>
+        <p:txBody>
+          <a:bodyPr wrap="square" rtlCol="0" anchor="ctr"/>
+          <a:lstStyle/>
+          <a:p>
+            <a:pPr indent="0" marL="0">
+              <a:buNone/>
+            </a:pPr>
+            <a:r>
+              <a:rPr lang="en-US" sz="2400" b="1" dirty="0">
+                <a:solidFill>
+                  <a:srgbClr val="10182B"/>
+                </a:solidFill>
+                <a:latin typeface="Calibri" pitchFamily="34" charset="0"/>
+                <a:ea typeface="Calibri" pitchFamily="34" charset="-122"/>
+                <a:cs typeface="Calibri" pitchFamily="34" charset="-120"/>
+              </a:rPr>
+              <a:t>7.5M+</a:t>
+            </a:r>
+            <a:endParaRPr lang="en-US" sz="2400" dirty="0"/>
+          </a:p>
+        </p:txBody>
+      </p:sp>
+      <p:sp>
+        <p:nvSpPr>
+          <p:cNvPr id="8" name="Text 6"/>
+          <p:cNvSpPr/>
+          <p:nvPr/>
+        </p:nvSpPr>
+        <p:spPr>
+          <a:xfrm>
+            <a:off x="2103120" y="1975104"/>
+            <a:ext cx="1965960" cy="274320"/>
+          </a:xfrm>
+          <a:prstGeom prst="rect">
+            <a:avLst/>
+          </a:prstGeom>
+          <a:noFill/>
+          <a:ln/>
+        </p:spPr>
+        <p:txBody>
+          <a:bodyPr wrap="square" rtlCol="0" anchor="ctr"/>
+          <a:lstStyle/>
+          <a:p>
+            <a:pPr indent="0" marL="0">
+              <a:buNone/>
+            </a:pPr>
+            <a:r>
+              <a:rPr lang="en-US" sz="950" b="1" dirty="0">
+                <a:solidFill>
+                  <a:srgbClr val="10182B"/>
+                </a:solidFill>
+                <a:latin typeface="Calibri" pitchFamily="34" charset="0"/>
+                <a:ea typeface="Calibri" pitchFamily="34" charset="-122"/>
+                <a:cs typeface="Calibri" pitchFamily="34" charset="-120"/>
+              </a:rPr>
+              <a:t>Total HORECA outlets in India</a:t>
+            </a:r>
+            <a:endParaRPr lang="en-US" sz="950" dirty="0"/>
+          </a:p>
+        </p:txBody>
+      </p:sp>
+      <p:sp>
+        <p:nvSpPr>
+          <p:cNvPr id="9" name="Text 7"/>
+          <p:cNvSpPr/>
+          <p:nvPr/>
+        </p:nvSpPr>
+        <p:spPr>
+          <a:xfrm>
+            <a:off x="2103120" y="2267712"/>
+            <a:ext cx="1965960" cy="274320"/>
+          </a:xfrm>
+          <a:prstGeom prst="rect">
+            <a:avLst/>
+          </a:prstGeom>
+          <a:noFill/>
+          <a:ln/>
+        </p:spPr>
+        <p:txBody>
+          <a:bodyPr wrap="square" rtlCol="0" anchor="ctr"/>
+          <a:lstStyle/>
+          <a:p>
+            <a:pPr indent="0" marL="0">
+              <a:buNone/>
+            </a:pPr>
+            <a:r>
+              <a:rPr lang="en-US" sz="800" dirty="0">
+                <a:solidFill>
+                  <a:srgbClr val="8E99B0"/>
+                </a:solidFill>
+                <a:latin typeface="Calibri" pitchFamily="34" charset="0"/>
+                <a:ea typeface="Calibri" pitchFamily="34" charset="-122"/>
+                <a:cs typeface="Calibri" pitchFamily="34" charset="-120"/>
+              </a:rPr>
+              <a:t>NRAI / industry est.</a:t>
+            </a:r>
+            <a:endParaRPr lang="en-US" sz="800" dirty="0"/>
+          </a:p>
+        </p:txBody>
+      </p:sp>
+      <p:sp>
+        <p:nvSpPr>
+          <p:cNvPr id="10" name="Shape 8"/>
+          <p:cNvSpPr/>
+          <p:nvPr/>
+        </p:nvSpPr>
+        <p:spPr>
+          <a:xfrm>
+            <a:off x="685800" y="2862072"/>
+            <a:ext cx="3474720" cy="777240"/>
+          </a:xfrm>
+          <a:prstGeom prst="roundRect">
+            <a:avLst>
+              <a:gd name="adj" fmla="val 9412"/>
+            </a:avLst>
+          </a:prstGeom>
+          <a:solidFill>
+            <a:srgbClr val="FFFFFF"/>
+          </a:solidFill>
+          <a:ln/>
+          <a:effectLst>
+            <a:outerShdw sx="100000" sy="100000" kx="0" ky="0" algn="bl" rotWithShape="0" blurRad="76200" dist="25400" dir="5400000">
+              <a:srgbClr val="CBD5E1">
+                <a:alpha val="25000"/>
+              </a:srgbClr>
+            </a:outerShdw>
+          </a:effectLst>
+        </p:spPr>
+      </p:sp>
+      <p:sp>
+        <p:nvSpPr>
+          <p:cNvPr id="11" name="Text 9"/>
+          <p:cNvSpPr/>
+          <p:nvPr/>
+        </p:nvSpPr>
+        <p:spPr>
+          <a:xfrm>
+            <a:off x="822960" y="2916936"/>
+            <a:ext cx="1371600" cy="384048"/>
+          </a:xfrm>
+          <a:prstGeom prst="rect">
+            <a:avLst/>
+          </a:prstGeom>
+          <a:noFill/>
+          <a:ln/>
+        </p:spPr>
+        <p:txBody>
+          <a:bodyPr wrap="square" rtlCol="0" anchor="ctr"/>
+          <a:lstStyle/>
+          <a:p>
+            <a:pPr indent="0" marL="0">
+              <a:buNone/>
+            </a:pPr>
+            <a:r>
+              <a:rPr lang="en-US" sz="2400" b="1" dirty="0">
+                <a:solidFill>
+                  <a:srgbClr val="0E756C"/>
+                </a:solidFill>
+                <a:latin typeface="Calibri" pitchFamily="34" charset="0"/>
+                <a:ea typeface="Calibri" pitchFamily="34" charset="-122"/>
+                <a:cs typeface="Calibri" pitchFamily="34" charset="-120"/>
+              </a:rPr>
+              <a:t>1.5M+</a:t>
+            </a:r>
+            <a:endParaRPr lang="en-US" sz="2400" dirty="0"/>
+          </a:p>
+        </p:txBody>
+      </p:sp>
+      <p:sp>
+        <p:nvSpPr>
+          <p:cNvPr id="12" name="Text 10"/>
+          <p:cNvSpPr/>
+          <p:nvPr/>
+        </p:nvSpPr>
+        <p:spPr>
+          <a:xfrm>
+            <a:off x="2103120" y="2916936"/>
+            <a:ext cx="1965960" cy="274320"/>
+          </a:xfrm>
+          <a:prstGeom prst="rect">
+            <a:avLst/>
+          </a:prstGeom>
+          <a:noFill/>
+          <a:ln/>
+        </p:spPr>
+        <p:txBody>
+          <a:bodyPr wrap="square" rtlCol="0" anchor="ctr"/>
+          <a:lstStyle/>
+          <a:p>
+            <a:pPr indent="0" marL="0">
+              <a:buNone/>
+            </a:pPr>
+            <a:r>
+              <a:rPr lang="en-US" sz="950" b="1" dirty="0">
+                <a:solidFill>
+                  <a:srgbClr val="10182B"/>
+                </a:solidFill>
+                <a:latin typeface="Calibri" pitchFamily="34" charset="0"/>
+                <a:ea typeface="Calibri" pitchFamily="34" charset="-122"/>
+                <a:cs typeface="Calibri" pitchFamily="34" charset="-120"/>
+              </a:rPr>
+              <a:t>Organised, physical, digital-payment enabled</a:t>
+            </a:r>
+            <a:endParaRPr lang="en-US" sz="950" dirty="0"/>
+          </a:p>
+        </p:txBody>
+      </p:sp>
+      <p:sp>
+        <p:nvSpPr>
+          <p:cNvPr id="13" name="Text 11"/>
+          <p:cNvSpPr/>
+          <p:nvPr/>
+        </p:nvSpPr>
+        <p:spPr>
+          <a:xfrm>
+            <a:off x="2103120" y="3209544"/>
+            <a:ext cx="1965960" cy="274320"/>
+          </a:xfrm>
+          <a:prstGeom prst="rect">
+            <a:avLst/>
+          </a:prstGeom>
+          <a:noFill/>
+          <a:ln/>
+        </p:spPr>
+        <p:txBody>
+          <a:bodyPr wrap="square" rtlCol="0" anchor="ctr"/>
+          <a:lstStyle/>
+          <a:p>
+            <a:pPr indent="0" marL="0">
+              <a:buNone/>
+            </a:pPr>
+            <a:r>
+              <a:rPr lang="en-US" sz="800" dirty="0">
+                <a:solidFill>
+                  <a:srgbClr val="8E99B0"/>
+                </a:solidFill>
+                <a:latin typeface="Calibri" pitchFamily="34" charset="0"/>
+                <a:ea typeface="Calibri" pitchFamily="34" charset="-122"/>
+                <a:cs typeface="Calibri" pitchFamily="34" charset="-120"/>
+              </a:rPr>
+              <a:t>Our underwritable universe (top 30 cities)</a:t>
+            </a:r>
+            <a:endParaRPr lang="en-US" sz="800" dirty="0"/>
+          </a:p>
+        </p:txBody>
+      </p:sp>
+      <p:sp>
+        <p:nvSpPr>
+          <p:cNvPr id="14" name="Shape 12"/>
+          <p:cNvSpPr/>
+          <p:nvPr/>
+        </p:nvSpPr>
+        <p:spPr>
+          <a:xfrm>
+            <a:off x="685800" y="3803904"/>
+            <a:ext cx="3474720" cy="777240"/>
+          </a:xfrm>
+          <a:prstGeom prst="roundRect">
+            <a:avLst>
+              <a:gd name="adj" fmla="val 9412"/>
+            </a:avLst>
+          </a:prstGeom>
+          <a:solidFill>
+            <a:srgbClr val="FFFFFF"/>
+          </a:solidFill>
+          <a:ln/>
+          <a:effectLst>
+            <a:outerShdw sx="100000" sy="100000" kx="0" ky="0" algn="bl" rotWithShape="0" blurRad="76200" dist="25400" dir="5400000">
+              <a:srgbClr val="CBD5E1">
+                <a:alpha val="25000"/>
+              </a:srgbClr>
+            </a:outerShdw>
+          </a:effectLst>
+        </p:spPr>
+      </p:sp>
+      <p:sp>
+        <p:nvSpPr>
+          <p:cNvPr id="15" name="Text 13"/>
+          <p:cNvSpPr/>
+          <p:nvPr/>
+        </p:nvSpPr>
+        <p:spPr>
+          <a:xfrm>
+            <a:off x="822960" y="3858768"/>
+            <a:ext cx="1371600" cy="384048"/>
+          </a:xfrm>
+          <a:prstGeom prst="rect">
+            <a:avLst/>
+          </a:prstGeom>
+          <a:noFill/>
+          <a:ln/>
+        </p:spPr>
+        <p:txBody>
+          <a:bodyPr wrap="square" rtlCol="0" anchor="ctr"/>
+          <a:lstStyle/>
+          <a:p>
+            <a:pPr indent="0" marL="0">
+              <a:buNone/>
+            </a:pPr>
+            <a:r>
+              <a:rPr lang="en-US" sz="2400" b="1" dirty="0">
+                <a:solidFill>
+                  <a:srgbClr val="E8520A"/>
+                </a:solidFill>
+                <a:latin typeface="Calibri" pitchFamily="34" charset="0"/>
+                <a:ea typeface="Calibri" pitchFamily="34" charset="-122"/>
+                <a:cs typeface="Calibri" pitchFamily="34" charset="-120"/>
+              </a:rPr>
+              <a:t>150K+</a:t>
+            </a:r>
+            <a:endParaRPr lang="en-US" sz="2400" dirty="0"/>
+          </a:p>
+        </p:txBody>
+      </p:sp>
+      <p:sp>
+        <p:nvSpPr>
+          <p:cNvPr id="16" name="Text 14"/>
+          <p:cNvSpPr/>
+          <p:nvPr/>
+        </p:nvSpPr>
+        <p:spPr>
+          <a:xfrm>
+            <a:off x="2103120" y="3858768"/>
+            <a:ext cx="1965960" cy="274320"/>
+          </a:xfrm>
+          <a:prstGeom prst="rect">
+            <a:avLst/>
+          </a:prstGeom>
+          <a:noFill/>
+          <a:ln/>
+        </p:spPr>
+        <p:txBody>
+          <a:bodyPr wrap="square" rtlCol="0" anchor="ctr"/>
+          <a:lstStyle/>
+          <a:p>
+            <a:pPr indent="0" marL="0">
+              <a:buNone/>
+            </a:pPr>
+            <a:r>
+              <a:rPr lang="en-US" sz="950" b="1" dirty="0">
+                <a:solidFill>
+                  <a:srgbClr val="10182B"/>
+                </a:solidFill>
+                <a:latin typeface="Calibri" pitchFamily="34" charset="0"/>
+                <a:ea typeface="Calibri" pitchFamily="34" charset="-122"/>
+                <a:cs typeface="Calibri" pitchFamily="34" charset="-120"/>
+              </a:rPr>
+              <a:t>On POS systems today (Petpooja + UrbanPiper)</a:t>
+            </a:r>
+            <a:endParaRPr lang="en-US" sz="950" dirty="0"/>
+          </a:p>
+        </p:txBody>
+      </p:sp>
+      <p:sp>
+        <p:nvSpPr>
+          <p:cNvPr id="17" name="Text 15"/>
+          <p:cNvSpPr/>
+          <p:nvPr/>
+        </p:nvSpPr>
+        <p:spPr>
+          <a:xfrm>
+            <a:off x="2103120" y="4151376"/>
+            <a:ext cx="1965960" cy="274320"/>
+          </a:xfrm>
+          <a:prstGeom prst="rect">
+            <a:avLst/>
+          </a:prstGeom>
+          <a:noFill/>
+          <a:ln/>
+        </p:spPr>
+        <p:txBody>
+          <a:bodyPr wrap="square" rtlCol="0" anchor="ctr"/>
+          <a:lstStyle/>
+          <a:p>
+            <a:pPr indent="0" marL="0">
+              <a:buNone/>
+            </a:pPr>
+            <a:r>
+              <a:rPr lang="en-US" sz="800" dirty="0">
+                <a:solidFill>
+                  <a:srgbClr val="8E99B0"/>
+                </a:solidFill>
+                <a:latin typeface="Calibri" pitchFamily="34" charset="0"/>
+                <a:ea typeface="Calibri" pitchFamily="34" charset="-122"/>
+                <a:cs typeface="Calibri" pitchFamily="34" charset="-120"/>
+              </a:rPr>
+              <a:t>Pre-verified, real-time sales data accessible</a:t>
+            </a:r>
+            <a:endParaRPr lang="en-US" sz="800" dirty="0"/>
+          </a:p>
+        </p:txBody>
+      </p:sp>
+      <p:sp>
+        <p:nvSpPr>
+          <p:cNvPr id="18" name="Text 16"/>
+          <p:cNvSpPr/>
+          <p:nvPr/>
+        </p:nvSpPr>
+        <p:spPr>
+          <a:xfrm>
+            <a:off x="4800600" y="1572768"/>
+            <a:ext cx="3931920" cy="256032"/>
+          </a:xfrm>
+          <a:prstGeom prst="rect">
+            <a:avLst/>
+          </a:prstGeom>
+          <a:noFill/>
+          <a:ln/>
+        </p:spPr>
+        <p:txBody>
+          <a:bodyPr wrap="square" rtlCol="0" anchor="ctr"/>
+          <a:lstStyle/>
+          <a:p>
+            <a:pPr indent="0" marL="0">
+              <a:buNone/>
+            </a:pPr>
+            <a:r>
+              <a:rPr lang="en-US" sz="950" b="1" spc="200" kern="0" dirty="0">
+                <a:solidFill>
+                  <a:srgbClr val="E8520A"/>
+                </a:solidFill>
+                <a:latin typeface="Calibri" pitchFamily="34" charset="0"/>
+                <a:ea typeface="Calibri" pitchFamily="34" charset="-122"/>
+                <a:cs typeface="Calibri" pitchFamily="34" charset="-120"/>
+              </a:rPr>
+              <a:t>THE CHANNEL: POS-LED DISTRIBUTION</a:t>
+            </a:r>
+            <a:endParaRPr lang="en-US" sz="950" dirty="0"/>
+          </a:p>
+        </p:txBody>
+      </p:sp>
+      <p:sp>
+        <p:nvSpPr>
+          <p:cNvPr id="19" name="Text 17"/>
+          <p:cNvSpPr/>
+          <p:nvPr/>
+        </p:nvSpPr>
+        <p:spPr>
+          <a:xfrm>
+            <a:off x="4800600" y="1920240"/>
+            <a:ext cx="3977640" cy="502920"/>
+          </a:xfrm>
+          <a:prstGeom prst="rect">
+            <a:avLst/>
+          </a:prstGeom>
+          <a:noFill/>
+          <a:ln/>
+        </p:spPr>
+        <p:txBody>
+          <a:bodyPr wrap="square" rtlCol="0" anchor="ctr"/>
+          <a:lstStyle/>
+          <a:p>
+            <a:pPr indent="0" marL="0">
+              <a:lnSpc>
+                <a:spcPts val="1400"/>
+              </a:lnSpc>
+              <a:buNone/>
+            </a:pPr>
+            <a:r>
+              <a:rPr lang="en-US" sz="1100" dirty="0">
+                <a:solidFill>
+                  <a:srgbClr val="4A5670"/>
+                </a:solidFill>
+                <a:latin typeface="Calibri" pitchFamily="34" charset="0"/>
+                <a:ea typeface="Calibri" pitchFamily="34" charset="-122"/>
+                <a:cs typeface="Calibri" pitchFamily="34" charset="-120"/>
+              </a:rPr>
+              <a:t>Instead of building a field force of 10,000, we embed inside the software the restaurant already uses every day.</a:t>
+            </a:r>
+            <a:endParaRPr lang="en-US" sz="1100" dirty="0"/>
+          </a:p>
+        </p:txBody>
+      </p:sp>
+      <p:sp>
+        <p:nvSpPr>
+          <p:cNvPr id="20" name="Shape 18"/>
+          <p:cNvSpPr/>
+          <p:nvPr/>
+        </p:nvSpPr>
+        <p:spPr>
+          <a:xfrm>
+            <a:off x="4800600" y="2578608"/>
+            <a:ext cx="3977640" cy="594360"/>
+          </a:xfrm>
+          <a:prstGeom prst="roundRect">
+            <a:avLst>
+              <a:gd name="adj" fmla="val 13846"/>
+            </a:avLst>
+          </a:prstGeom>
+          <a:solidFill>
+            <a:srgbClr val="FFFFFF"/>
+          </a:solidFill>
+          <a:ln w="9525">
+            <a:solidFill>
+              <a:srgbClr val="ECE6DA"/>
+            </a:solidFill>
+            <a:prstDash val="solid"/>
+          </a:ln>
+          <a:effectLst>
+            <a:outerShdw sx="100000" sy="100000" kx="0" ky="0" algn="bl" rotWithShape="0" blurRad="76200" dist="25400" dir="5400000">
+              <a:srgbClr val="CBD5E1">
+                <a:alpha val="25000"/>
+              </a:srgbClr>
+            </a:outerShdw>
+          </a:effectLst>
+        </p:spPr>
+      </p:sp>
+      <p:sp>
+        <p:nvSpPr>
+          <p:cNvPr id="21" name="Shape 19"/>
+          <p:cNvSpPr/>
+          <p:nvPr/>
+        </p:nvSpPr>
+        <p:spPr>
+          <a:xfrm>
+            <a:off x="4800600" y="2578608"/>
+            <a:ext cx="109728" cy="594360"/>
+          </a:xfrm>
+          <a:prstGeom prst="roundRect">
+            <a:avLst>
+              <a:gd name="adj" fmla="val 33333"/>
+            </a:avLst>
+          </a:prstGeom>
+          <a:solidFill>
+            <a:srgbClr val="E8520A"/>
+          </a:solidFill>
+          <a:ln/>
+        </p:spPr>
+      </p:sp>
+      <p:sp>
+        <p:nvSpPr>
+          <p:cNvPr id="22" name="Text 20"/>
+          <p:cNvSpPr/>
+          <p:nvPr/>
+        </p:nvSpPr>
+        <p:spPr>
+          <a:xfrm>
+            <a:off x="5029200" y="2651760"/>
+            <a:ext cx="1280160" cy="228600"/>
+          </a:xfrm>
+          <a:prstGeom prst="rect">
+            <a:avLst/>
+          </a:prstGeom>
+          <a:noFill/>
+          <a:ln/>
+        </p:spPr>
+        <p:txBody>
+          <a:bodyPr wrap="square" rtlCol="0" anchor="ctr"/>
+          <a:lstStyle/>
+          <a:p>
+            <a:pPr indent="0" marL="0">
+              <a:buNone/>
+            </a:pPr>
+            <a:r>
+              <a:rPr lang="en-US" sz="1300" b="1" dirty="0">
+                <a:solidFill>
+                  <a:srgbClr val="E8520A"/>
+                </a:solidFill>
+                <a:latin typeface="Calibri" pitchFamily="34" charset="0"/>
+                <a:ea typeface="Calibri" pitchFamily="34" charset="-122"/>
+                <a:cs typeface="Calibri" pitchFamily="34" charset="-120"/>
+              </a:rPr>
+              <a:t>Petpooja</a:t>
+            </a:r>
+            <a:endParaRPr lang="en-US" sz="1300" dirty="0"/>
+          </a:p>
+        </p:txBody>
+      </p:sp>
+      <p:sp>
+        <p:nvSpPr>
+          <p:cNvPr id="23" name="Text 21"/>
+          <p:cNvSpPr/>
+          <p:nvPr/>
+        </p:nvSpPr>
+        <p:spPr>
+          <a:xfrm>
+            <a:off x="6309360" y="2651760"/>
+            <a:ext cx="1143000" cy="228600"/>
+          </a:xfrm>
+          <a:prstGeom prst="rect">
+            <a:avLst/>
+          </a:prstGeom>
+          <a:noFill/>
+          <a:ln/>
+        </p:spPr>
+        <p:txBody>
+          <a:bodyPr wrap="square" rtlCol="0" anchor="ctr"/>
+          <a:lstStyle/>
+          <a:p>
+            <a:pPr indent="0" marL="0">
+              <a:buNone/>
+            </a:pPr>
+            <a:r>
+              <a:rPr lang="en-US" sz="1200" b="1" dirty="0">
+                <a:solidFill>
+                  <a:srgbClr val="10182B"/>
+                </a:solidFill>
+                <a:latin typeface="Calibri" pitchFamily="34" charset="0"/>
+                <a:ea typeface="Calibri" pitchFamily="34" charset="-122"/>
+                <a:cs typeface="Calibri" pitchFamily="34" charset="-120"/>
+              </a:rPr>
+              <a:t>150K+ outlets</a:t>
+            </a:r>
+            <a:endParaRPr lang="en-US" sz="1200" dirty="0"/>
+          </a:p>
+        </p:txBody>
+      </p:sp>
+      <p:sp>
+        <p:nvSpPr>
+          <p:cNvPr id="24" name="Text 22"/>
+          <p:cNvSpPr/>
+          <p:nvPr/>
+        </p:nvSpPr>
+        <p:spPr>
+          <a:xfrm>
+            <a:off x="5029200" y="2907792"/>
+            <a:ext cx="3657600" cy="201168"/>
+          </a:xfrm>
+          <a:prstGeom prst="rect">
+            <a:avLst/>
+          </a:prstGeom>
+          <a:noFill/>
+          <a:ln/>
+        </p:spPr>
+        <p:txBody>
+          <a:bodyPr wrap="square" rtlCol="0" anchor="ctr"/>
+          <a:lstStyle/>
+          <a:p>
+            <a:pPr indent="0" marL="0">
+              <a:buNone/>
+            </a:pPr>
+            <a:r>
+              <a:rPr lang="en-US" sz="880" dirty="0">
+                <a:solidFill>
+                  <a:srgbClr val="4A5670"/>
+                </a:solidFill>
+                <a:latin typeface="Calibri" pitchFamily="34" charset="0"/>
+                <a:ea typeface="Calibri" pitchFamily="34" charset="-122"/>
+                <a:cs typeface="Calibri" pitchFamily="34" charset="-120"/>
+              </a:rPr>
+              <a:t>India's largest restaurant POS · 200+ cities</a:t>
+            </a:r>
+            <a:endParaRPr lang="en-US" sz="880" dirty="0"/>
+          </a:p>
+        </p:txBody>
+      </p:sp>
+      <p:sp>
+        <p:nvSpPr>
+          <p:cNvPr id="25" name="Shape 23"/>
+          <p:cNvSpPr/>
+          <p:nvPr/>
+        </p:nvSpPr>
+        <p:spPr>
+          <a:xfrm>
+            <a:off x="4800600" y="3291840"/>
+            <a:ext cx="3977640" cy="594360"/>
+          </a:xfrm>
+          <a:prstGeom prst="roundRect">
+            <a:avLst>
+              <a:gd name="adj" fmla="val 13846"/>
+            </a:avLst>
+          </a:prstGeom>
+          <a:solidFill>
+            <a:srgbClr val="FFFFFF"/>
+          </a:solidFill>
+          <a:ln w="9525">
+            <a:solidFill>
+              <a:srgbClr val="ECE6DA"/>
+            </a:solidFill>
+            <a:prstDash val="solid"/>
+          </a:ln>
+          <a:effectLst>
+            <a:outerShdw sx="100000" sy="100000" kx="0" ky="0" algn="bl" rotWithShape="0" blurRad="76200" dist="25400" dir="5400000">
+              <a:srgbClr val="CBD5E1">
+                <a:alpha val="25000"/>
+              </a:srgbClr>
+            </a:outerShdw>
+          </a:effectLst>
+        </p:spPr>
+      </p:sp>
+      <p:sp>
+        <p:nvSpPr>
+          <p:cNvPr id="26" name="Shape 24"/>
+          <p:cNvSpPr/>
+          <p:nvPr/>
+        </p:nvSpPr>
+        <p:spPr>
+          <a:xfrm>
+            <a:off x="4800600" y="3291840"/>
+            <a:ext cx="109728" cy="594360"/>
+          </a:xfrm>
+          <a:prstGeom prst="roundRect">
+            <a:avLst>
+              <a:gd name="adj" fmla="val 33333"/>
+            </a:avLst>
+          </a:prstGeom>
+          <a:solidFill>
+            <a:srgbClr val="0E756C"/>
+          </a:solidFill>
+          <a:ln/>
+        </p:spPr>
+      </p:sp>
+      <p:sp>
+        <p:nvSpPr>
+          <p:cNvPr id="27" name="Text 25"/>
+          <p:cNvSpPr/>
+          <p:nvPr/>
+        </p:nvSpPr>
+        <p:spPr>
+          <a:xfrm>
+            <a:off x="5029200" y="3364992"/>
+            <a:ext cx="1280160" cy="228600"/>
+          </a:xfrm>
+          <a:prstGeom prst="rect">
+            <a:avLst/>
+          </a:prstGeom>
+          <a:noFill/>
+          <a:ln/>
+        </p:spPr>
+        <p:txBody>
+          <a:bodyPr wrap="square" rtlCol="0" anchor="ctr"/>
+          <a:lstStyle/>
+          <a:p>
+            <a:pPr indent="0" marL="0">
+              <a:buNone/>
+            </a:pPr>
+            <a:r>
+              <a:rPr lang="en-US" sz="1300" b="1" dirty="0">
+                <a:solidFill>
+                  <a:srgbClr val="0E756C"/>
+                </a:solidFill>
+                <a:latin typeface="Calibri" pitchFamily="34" charset="0"/>
+                <a:ea typeface="Calibri" pitchFamily="34" charset="-122"/>
+                <a:cs typeface="Calibri" pitchFamily="34" charset="-120"/>
+              </a:rPr>
+              <a:t>UrbanPiper</a:t>
+            </a:r>
+            <a:endParaRPr lang="en-US" sz="1300" dirty="0"/>
+          </a:p>
+        </p:txBody>
+      </p:sp>
+      <p:sp>
+        <p:nvSpPr>
+          <p:cNvPr id="28" name="Text 26"/>
+          <p:cNvSpPr/>
+          <p:nvPr/>
+        </p:nvSpPr>
+        <p:spPr>
+          <a:xfrm>
+            <a:off x="6309360" y="3364992"/>
+            <a:ext cx="1143000" cy="228600"/>
+          </a:xfrm>
+          <a:prstGeom prst="rect">
+            <a:avLst/>
+          </a:prstGeom>
+          <a:noFill/>
+          <a:ln/>
+        </p:spPr>
+        <p:txBody>
+          <a:bodyPr wrap="square" rtlCol="0" anchor="ctr"/>
+          <a:lstStyle/>
+          <a:p>
+            <a:pPr indent="0" marL="0">
+              <a:buNone/>
+            </a:pPr>
+            <a:r>
+              <a:rPr lang="en-US" sz="1200" b="1" dirty="0">
+                <a:solidFill>
+                  <a:srgbClr val="10182B"/>
+                </a:solidFill>
+                <a:latin typeface="Calibri" pitchFamily="34" charset="0"/>
+                <a:ea typeface="Calibri" pitchFamily="34" charset="-122"/>
+                <a:cs typeface="Calibri" pitchFamily="34" charset="-120"/>
+              </a:rPr>
+              <a:t>45K+ outlets</a:t>
+            </a:r>
+            <a:endParaRPr lang="en-US" sz="1200" dirty="0"/>
+          </a:p>
+        </p:txBody>
+      </p:sp>
+      <p:sp>
+        <p:nvSpPr>
+          <p:cNvPr id="29" name="Text 27"/>
+          <p:cNvSpPr/>
+          <p:nvPr/>
+        </p:nvSpPr>
+        <p:spPr>
+          <a:xfrm>
+            <a:off x="5029200" y="3621024"/>
+            <a:ext cx="3657600" cy="201168"/>
+          </a:xfrm>
+          <a:prstGeom prst="rect">
+            <a:avLst/>
+          </a:prstGeom>
+          <a:noFill/>
+          <a:ln/>
+        </p:spPr>
+        <p:txBody>
+          <a:bodyPr wrap="square" rtlCol="0" anchor="ctr"/>
+          <a:lstStyle/>
+          <a:p>
+            <a:pPr indent="0" marL="0">
+              <a:buNone/>
+            </a:pPr>
+            <a:r>
+              <a:rPr lang="en-US" sz="880" dirty="0">
+                <a:solidFill>
+                  <a:srgbClr val="4A5670"/>
+                </a:solidFill>
+                <a:latin typeface="Calibri" pitchFamily="34" charset="0"/>
+                <a:ea typeface="Calibri" pitchFamily="34" charset="-122"/>
+                <a:cs typeface="Calibri" pitchFamily="34" charset="-120"/>
+              </a:rPr>
+              <a:t>Swiggy &amp; Zomato backed · 30 countries</a:t>
+            </a:r>
+            <a:endParaRPr lang="en-US" sz="880" dirty="0"/>
+          </a:p>
+        </p:txBody>
+      </p:sp>
+      <p:sp>
+        <p:nvSpPr>
+          <p:cNvPr id="30" name="Shape 28"/>
+          <p:cNvSpPr/>
+          <p:nvPr/>
+        </p:nvSpPr>
+        <p:spPr>
+          <a:xfrm>
+            <a:off x="4800600" y="4005072"/>
+            <a:ext cx="3977640" cy="594360"/>
+          </a:xfrm>
+          <a:prstGeom prst="roundRect">
+            <a:avLst>
+              <a:gd name="adj" fmla="val 13846"/>
+            </a:avLst>
+          </a:prstGeom>
+          <a:solidFill>
+            <a:srgbClr val="FFFFFF"/>
+          </a:solidFill>
+          <a:ln w="9525">
+            <a:solidFill>
+              <a:srgbClr val="ECE6DA"/>
+            </a:solidFill>
+            <a:prstDash val="solid"/>
+          </a:ln>
+          <a:effectLst>
+            <a:outerShdw sx="100000" sy="100000" kx="0" ky="0" algn="bl" rotWithShape="0" blurRad="76200" dist="25400" dir="5400000">
+              <a:srgbClr val="CBD5E1">
+                <a:alpha val="25000"/>
+              </a:srgbClr>
+            </a:outerShdw>
+          </a:effectLst>
+        </p:spPr>
+      </p:sp>
+      <p:sp>
+        <p:nvSpPr>
+          <p:cNvPr id="31" name="Shape 29"/>
+          <p:cNvSpPr/>
+          <p:nvPr/>
+        </p:nvSpPr>
+        <p:spPr>
+          <a:xfrm>
+            <a:off x="4800600" y="4005072"/>
+            <a:ext cx="109728" cy="594360"/>
+          </a:xfrm>
+          <a:prstGeom prst="roundRect">
+            <a:avLst>
+              <a:gd name="adj" fmla="val 33333"/>
+            </a:avLst>
+          </a:prstGeom>
+          <a:solidFill>
+            <a:srgbClr val="8E99B0"/>
+          </a:solidFill>
+          <a:ln/>
+        </p:spPr>
+      </p:sp>
+      <p:sp>
+        <p:nvSpPr>
+          <p:cNvPr id="32" name="Text 30"/>
+          <p:cNvSpPr/>
+          <p:nvPr/>
+        </p:nvSpPr>
+        <p:spPr>
+          <a:xfrm>
+            <a:off x="5029200" y="4078224"/>
+            <a:ext cx="1280160" cy="228600"/>
+          </a:xfrm>
+          <a:prstGeom prst="rect">
+            <a:avLst/>
+          </a:prstGeom>
+          <a:noFill/>
+          <a:ln/>
+        </p:spPr>
+        <p:txBody>
+          <a:bodyPr wrap="square" rtlCol="0" anchor="ctr"/>
+          <a:lstStyle/>
+          <a:p>
+            <a:pPr indent="0" marL="0">
+              <a:buNone/>
+            </a:pPr>
+            <a:r>
+              <a:rPr lang="en-US" sz="1300" b="1" dirty="0">
+                <a:solidFill>
+                  <a:srgbClr val="8E99B0"/>
+                </a:solidFill>
+                <a:latin typeface="Calibri" pitchFamily="34" charset="0"/>
+                <a:ea typeface="Calibri" pitchFamily="34" charset="-122"/>
+                <a:cs typeface="Calibri" pitchFamily="34" charset="-120"/>
+              </a:rPr>
+              <a:t>Others</a:t>
+            </a:r>
+            <a:endParaRPr lang="en-US" sz="1300" dirty="0"/>
+          </a:p>
+        </p:txBody>
+      </p:sp>
+      <p:sp>
+        <p:nvSpPr>
+          <p:cNvPr id="33" name="Text 31"/>
+          <p:cNvSpPr/>
+          <p:nvPr/>
+        </p:nvSpPr>
+        <p:spPr>
+          <a:xfrm>
+            <a:off x="6309360" y="4078224"/>
+            <a:ext cx="1143000" cy="228600"/>
+          </a:xfrm>
+          <a:prstGeom prst="rect">
+            <a:avLst/>
+          </a:prstGeom>
+          <a:noFill/>
+          <a:ln/>
+        </p:spPr>
+        <p:txBody>
+          <a:bodyPr wrap="square" rtlCol="0" anchor="ctr"/>
+          <a:lstStyle/>
+          <a:p>
+            <a:pPr indent="0" marL="0">
+              <a:buNone/>
+            </a:pPr>
+            <a:r>
+              <a:rPr lang="en-US" sz="1200" b="1" dirty="0">
+                <a:solidFill>
+                  <a:srgbClr val="10182B"/>
+                </a:solidFill>
+                <a:latin typeface="Calibri" pitchFamily="34" charset="0"/>
+                <a:ea typeface="Calibri" pitchFamily="34" charset="-122"/>
+                <a:cs typeface="Calibri" pitchFamily="34" charset="-120"/>
+              </a:rPr>
+              <a:t>100K+ outlets</a:t>
+            </a:r>
+            <a:endParaRPr lang="en-US" sz="1200" dirty="0"/>
+          </a:p>
+        </p:txBody>
+      </p:sp>
+      <p:sp>
+        <p:nvSpPr>
+          <p:cNvPr id="34" name="Text 32"/>
+          <p:cNvSpPr/>
+          <p:nvPr/>
+        </p:nvSpPr>
+        <p:spPr>
+          <a:xfrm>
+            <a:off x="5029200" y="4334256"/>
+            <a:ext cx="3657600" cy="201168"/>
+          </a:xfrm>
+          <a:prstGeom prst="rect">
+            <a:avLst/>
+          </a:prstGeom>
+          <a:noFill/>
+          <a:ln/>
+        </p:spPr>
+        <p:txBody>
+          <a:bodyPr wrap="square" rtlCol="0" anchor="ctr"/>
+          <a:lstStyle/>
+          <a:p>
+            <a:pPr indent="0" marL="0">
+              <a:buNone/>
+            </a:pPr>
+            <a:r>
+              <a:rPr lang="en-US" sz="880" dirty="0">
+                <a:solidFill>
+                  <a:srgbClr val="4A5670"/>
+                </a:solidFill>
+                <a:latin typeface="Calibri" pitchFamily="34" charset="0"/>
+                <a:ea typeface="Calibri" pitchFamily="34" charset="-122"/>
+                <a:cs typeface="Calibri" pitchFamily="34" charset="-120"/>
+              </a:rPr>
+              <a:t>GoFrugal, Posist, Torqus, Billberry...</a:t>
+            </a:r>
+            <a:endParaRPr lang="en-US" sz="880" dirty="0"/>
+          </a:p>
+        </p:txBody>
+      </p:sp>
+      <p:sp>
+        <p:nvSpPr>
+          <p:cNvPr id="35" name="Shape 33"/>
+          <p:cNvSpPr/>
+          <p:nvPr/>
+        </p:nvSpPr>
+        <p:spPr>
+          <a:xfrm>
+            <a:off x="4800600" y="4663440"/>
+            <a:ext cx="3977640" cy="329184"/>
+          </a:xfrm>
+          <a:prstGeom prst="roundRect">
+            <a:avLst>
+              <a:gd name="adj" fmla="val 19444"/>
+            </a:avLst>
+          </a:prstGeom>
+          <a:solidFill>
+            <a:srgbClr val="ECFDF5"/>
+          </a:solidFill>
+          <a:ln w="9525">
+            <a:solidFill>
+              <a:srgbClr val="177A3D"/>
+            </a:solidFill>
+            <a:prstDash val="solid"/>
+          </a:ln>
+        </p:spPr>
+      </p:sp>
+      <p:sp>
+        <p:nvSpPr>
+          <p:cNvPr id="36" name="Text 34"/>
+          <p:cNvSpPr/>
+          <p:nvPr/>
+        </p:nvSpPr>
+        <p:spPr>
+          <a:xfrm>
+            <a:off x="4937760" y="4718304"/>
+            <a:ext cx="3749040" cy="237744"/>
+          </a:xfrm>
+          <a:prstGeom prst="rect">
+            <a:avLst/>
+          </a:prstGeom>
+          <a:noFill/>
+          <a:ln/>
+        </p:spPr>
+        <p:txBody>
+          <a:bodyPr wrap="square" rtlCol="0" anchor="ctr"/>
+          <a:lstStyle/>
+          <a:p>
+            <a:pPr indent="0" marL="0">
+              <a:buNone/>
+            </a:pPr>
+            <a:r>
+              <a:rPr lang="en-US" sz="880" b="1" dirty="0">
+                <a:solidFill>
+                  <a:srgbClr val="177A3D"/>
+                </a:solidFill>
+                <a:latin typeface="Calibri" pitchFamily="34" charset="0"/>
+                <a:ea typeface="Calibri" pitchFamily="34" charset="-122"/>
+                <a:cs typeface="Calibri" pitchFamily="34" charset="-120"/>
+              </a:rPr>
+              <a:t>✓  Revenue-sharing model: POS partner gets % of PF — no upfront cost, pure incentive alignment</a:t>
+            </a:r>
+            <a:endParaRPr lang="en-US" sz="880" dirty="0"/>
+          </a:p>
+        </p:txBody>
+      </p:sp>
+      <p:sp>
+        <p:nvSpPr>
+          <p:cNvPr id="37" name="Text 35"/>
+          <p:cNvSpPr/>
+          <p:nvPr/>
+        </p:nvSpPr>
+        <p:spPr>
+          <a:xfrm>
+            <a:off x="8549640" y="4864608"/>
+            <a:ext cx="411480" cy="256032"/>
+          </a:xfrm>
+          <a:prstGeom prst="rect">
+            <a:avLst/>
+          </a:prstGeom>
+          <a:noFill/>
+          <a:ln/>
+        </p:spPr>
+        <p:txBody>
+          <a:bodyPr wrap="square" rtlCol="0" anchor="ctr"/>
+          <a:lstStyle/>
+          <a:p>
+            <a:pPr algn="r" indent="0" marL="0">
+              <a:buNone/>
+            </a:pPr>
+            <a:r>
+              <a:rPr lang="en-US" sz="1000" b="1" dirty="0">
+                <a:solidFill>
+                  <a:srgbClr val="8E99B0"/>
+                </a:solidFill>
+                <a:latin typeface="Calibri" pitchFamily="34" charset="0"/>
+                <a:ea typeface="Calibri" pitchFamily="34" charset="-122"/>
+                <a:cs typeface="Calibri" pitchFamily="34" charset="-120"/>
+              </a:rPr>
+              <a:t>5A</a:t>
+            </a:r>
+            <a:endParaRPr lang="en-US" sz="1000" dirty="0"/>
+          </a:p>
+        </p:txBody>
+      </p:sp>
+      <p:sp>
+        <p:nvSpPr>
+          <p:cNvPr id="38" name="Shape 36"/>
+          <p:cNvSpPr/>
+          <p:nvPr/>
+        </p:nvSpPr>
+        <p:spPr>
+          <a:xfrm>
+            <a:off x="0" y="5074920"/>
+            <a:ext cx="9144000" cy="68580"/>
+          </a:xfrm>
+          <a:prstGeom prst="rect">
+            <a:avLst/>
+          </a:prstGeom>
+          <a:solidFill>
+            <a:srgbClr val="E8520A"/>
+          </a:solidFill>
+          <a:ln/>
+        </p:spPr>
+      </p:sp>
+    </p:spTree>
+  </p:cSld>
+  <p:clrMapOvr>
+    <a:masterClrMapping/>
+  </p:clrMapOvr>
+</p:sld>
+</file>
+
+<file path=ppt/slides/slide18.xml><?xml version="1.0" encoding="utf-8"?>
+<p:sld xmlns:a="http://schemas.openxmlformats.org/drawingml/2006/main" xmlns:r="http://schemas.openxmlformats.org/officeDocument/2006/relationships" xmlns:p="http://schemas.openxmlformats.org/presentationml/2006/main">
+  <p:cSld name="Slide 2">
+    <p:bg>
+      <p:bgPr>
+        <a:solidFill>
+          <a:srgbClr val="F2F5F9"/>
+        </a:solidFill>
+      </p:bgPr>
+    </p:bg>
+    <p:spTree>
+      <p:nvGrpSpPr>
+        <p:cNvPr id="1" name=""/>
+        <p:cNvGrpSpPr/>
+        <p:nvPr/>
+      </p:nvGrpSpPr>
+      <p:grpSpPr>
+        <a:xfrm>
+          <a:off x="0" y="0"/>
+          <a:ext cx="0" cy="0"/>
+          <a:chOff x="0" y="0"/>
+          <a:chExt cx="0" cy="0"/>
+        </a:xfrm>
+      </p:grpSpPr>
+      <p:sp>
+        <p:nvSpPr>
+          <p:cNvPr id="2" name="Text 0"/>
+          <p:cNvSpPr/>
+          <p:nvPr/>
+        </p:nvSpPr>
+        <p:spPr>
+          <a:xfrm>
+            <a:off x="502920" y="292608"/>
+            <a:ext cx="8229600" cy="274320"/>
+          </a:xfrm>
+          <a:prstGeom prst="rect">
+            <a:avLst/>
+          </a:prstGeom>
+          <a:noFill/>
+          <a:ln/>
+        </p:spPr>
+        <p:txBody>
+          <a:bodyPr wrap="square" rtlCol="0" anchor="ctr"/>
+          <a:lstStyle/>
+          <a:p>
+            <a:pPr indent="0" marL="0">
+              <a:buNone/>
+            </a:pPr>
+            <a:r>
+              <a:rPr lang="en-US" sz="1100" b="1" spc="300" kern="0" dirty="0">
+                <a:solidFill>
+                  <a:srgbClr val="6B2BD9"/>
+                </a:solidFill>
+                <a:latin typeface="Calibri" pitchFamily="34" charset="0"/>
+                <a:ea typeface="Calibri" pitchFamily="34" charset="-122"/>
+                <a:cs typeface="Calibri" pitchFamily="34" charset="-120"/>
+              </a:rPr>
+              <a:t>WHY WE WIN · MOAT &amp; USP</a:t>
+            </a:r>
+            <a:endParaRPr lang="en-US" sz="1100" dirty="0"/>
+          </a:p>
+        </p:txBody>
+      </p:sp>
+      <p:sp>
+        <p:nvSpPr>
+          <p:cNvPr id="3" name="Text 1"/>
+          <p:cNvSpPr/>
+          <p:nvPr/>
+        </p:nvSpPr>
+        <p:spPr>
+          <a:xfrm>
+            <a:off x="502920" y="566928"/>
+            <a:ext cx="8321040" cy="548640"/>
+          </a:xfrm>
+          <a:prstGeom prst="rect">
+            <a:avLst/>
+          </a:prstGeom>
+          <a:noFill/>
+          <a:ln/>
+        </p:spPr>
+        <p:txBody>
+          <a:bodyPr wrap="square" rtlCol="0" anchor="ctr"/>
+          <a:lstStyle/>
+          <a:p>
+            <a:pPr indent="0" marL="0">
+              <a:buNone/>
+            </a:pPr>
+            <a:r>
+              <a:rPr lang="en-US" sz="2700" b="1" dirty="0">
+                <a:solidFill>
+                  <a:srgbClr val="10182B"/>
+                </a:solidFill>
+                <a:latin typeface="Calibri" pitchFamily="34" charset="0"/>
+                <a:ea typeface="Calibri" pitchFamily="34" charset="-122"/>
+                <a:cs typeface="Calibri" pitchFamily="34" charset="-120"/>
+              </a:rPr>
+              <a:t>Five unfair advantages. None of them copyable.</a:t>
+            </a:r>
+            <a:endParaRPr lang="en-US" sz="2700" dirty="0"/>
+          </a:p>
+        </p:txBody>
+      </p:sp>
+      <p:sp>
+        <p:nvSpPr>
+          <p:cNvPr id="4" name="Shape 2"/>
+          <p:cNvSpPr/>
+          <p:nvPr/>
+        </p:nvSpPr>
+        <p:spPr>
+          <a:xfrm>
+            <a:off x="502920" y="1298448"/>
+            <a:ext cx="3977640" cy="1572768"/>
+          </a:xfrm>
+          <a:prstGeom prst="roundRect">
+            <a:avLst>
+              <a:gd name="adj" fmla="val 5814"/>
+            </a:avLst>
+          </a:prstGeom>
+          <a:solidFill>
+            <a:srgbClr val="FFFFFF"/>
+          </a:solidFill>
+          <a:ln w="9525">
+            <a:solidFill>
+              <a:srgbClr val="ECE6DA"/>
+            </a:solidFill>
+            <a:prstDash val="solid"/>
+          </a:ln>
+          <a:effectLst>
+            <a:outerShdw sx="100000" sy="100000" kx="0" ky="0" algn="bl" rotWithShape="0" blurRad="76200" dist="25400" dir="5400000">
+              <a:srgbClr val="CBD5E1">
+                <a:alpha val="25000"/>
+              </a:srgbClr>
+            </a:outerShdw>
+          </a:effectLst>
+        </p:spPr>
+      </p:sp>
+      <p:sp>
+        <p:nvSpPr>
+          <p:cNvPr id="5" name="Shape 3"/>
+          <p:cNvSpPr/>
+          <p:nvPr/>
+        </p:nvSpPr>
+        <p:spPr>
+          <a:xfrm>
+            <a:off x="502920" y="1298448"/>
+            <a:ext cx="3977640" cy="91440"/>
+          </a:xfrm>
+          <a:prstGeom prst="rect">
+            <a:avLst/>
+          </a:prstGeom>
+          <a:solidFill>
+            <a:srgbClr val="6B2BD9"/>
+          </a:solidFill>
+          <a:ln/>
+        </p:spPr>
+      </p:sp>
+      <p:sp>
+        <p:nvSpPr>
+          <p:cNvPr id="6" name="Text 4"/>
+          <p:cNvSpPr/>
+          <p:nvPr/>
+        </p:nvSpPr>
+        <p:spPr>
+          <a:xfrm>
+            <a:off x="667512" y="1463040"/>
+            <a:ext cx="457200" cy="274320"/>
+          </a:xfrm>
+          <a:prstGeom prst="rect">
+            <a:avLst/>
+          </a:prstGeom>
+          <a:noFill/>
+          <a:ln/>
+        </p:spPr>
+        <p:txBody>
+          <a:bodyPr wrap="square" rtlCol="0" anchor="ctr"/>
+          <a:lstStyle/>
+          <a:p>
+            <a:pPr indent="0" marL="0">
+              <a:buNone/>
+            </a:pPr>
+            <a:r>
+              <a:rPr lang="en-US" sz="1800" b="1" dirty="0">
+                <a:solidFill>
+                  <a:srgbClr val="E5E7EB"/>
+                </a:solidFill>
+                <a:latin typeface="Calibri" pitchFamily="34" charset="0"/>
+                <a:ea typeface="Calibri" pitchFamily="34" charset="-122"/>
+                <a:cs typeface="Calibri" pitchFamily="34" charset="-120"/>
+              </a:rPr>
+              <a:t>01</a:t>
+            </a:r>
+            <a:endParaRPr lang="en-US" sz="1800" dirty="0"/>
+          </a:p>
+        </p:txBody>
+      </p:sp>
+      <p:sp>
+        <p:nvSpPr>
+          <p:cNvPr id="7" name="Text 5"/>
+          <p:cNvSpPr/>
+          <p:nvPr/>
+        </p:nvSpPr>
+        <p:spPr>
+          <a:xfrm>
+            <a:off x="667512" y="1463040"/>
+            <a:ext cx="3566160" cy="347472"/>
+          </a:xfrm>
+          <a:prstGeom prst="rect">
+            <a:avLst/>
+          </a:prstGeom>
+          <a:noFill/>
+          <a:ln/>
+        </p:spPr>
+        <p:txBody>
+          <a:bodyPr wrap="square" rtlCol="0" anchor="ctr"/>
+          <a:lstStyle/>
+          <a:p>
+            <a:pPr indent="0" marL="0">
+              <a:buNone/>
+            </a:pPr>
+            <a:r>
+              <a:rPr lang="en-US" sz="1250" b="1" dirty="0">
+                <a:solidFill>
+                  <a:srgbClr val="10182B"/>
+                </a:solidFill>
+                <a:latin typeface="Calibri" pitchFamily="34" charset="0"/>
+                <a:ea typeface="Calibri" pitchFamily="34" charset="-122"/>
+                <a:cs typeface="Calibri" pitchFamily="34" charset="-120"/>
+              </a:rPr>
+              <a:t>🧠  We score the business, not the paperwork</a:t>
+            </a:r>
+            <a:endParaRPr lang="en-US" sz="1250" dirty="0"/>
+          </a:p>
+        </p:txBody>
+      </p:sp>
+      <p:sp>
+        <p:nvSpPr>
+          <p:cNvPr id="8" name="Text 6"/>
+          <p:cNvSpPr/>
+          <p:nvPr/>
+        </p:nvSpPr>
+        <p:spPr>
+          <a:xfrm>
+            <a:off x="667512" y="1828800"/>
+            <a:ext cx="3611880" cy="640080"/>
+          </a:xfrm>
+          <a:prstGeom prst="rect">
+            <a:avLst/>
+          </a:prstGeom>
+          <a:noFill/>
+          <a:ln/>
+        </p:spPr>
+        <p:txBody>
+          <a:bodyPr wrap="square" rtlCol="0" anchor="ctr"/>
+          <a:lstStyle/>
+          <a:p>
+            <a:pPr indent="0" marL="0">
+              <a:lnSpc>
+                <a:spcPts val="1050"/>
+              </a:lnSpc>
+              <a:buNone/>
+            </a:pPr>
+            <a:r>
+              <a:rPr lang="en-US" sz="850" dirty="0">
+                <a:solidFill>
+                  <a:srgbClr val="4A5670"/>
+                </a:solidFill>
+                <a:latin typeface="Calibri" pitchFamily="34" charset="0"/>
+                <a:ea typeface="Calibri" pitchFamily="34" charset="-122"/>
+                <a:cs typeface="Calibri" pitchFamily="34" charset="-120"/>
+              </a:rPr>
+              <a:t>6-factor HORECA model: outlet margin, Q-Q growth, location, FSA ambience, sales, bureau. CIBIL is our smallest weight. Every competitor builds around it. That single inversion lets us approve outlets banks reject — at lower NPA.</a:t>
+            </a:r>
+            <a:endParaRPr lang="en-US" sz="850" dirty="0"/>
+          </a:p>
+        </p:txBody>
+      </p:sp>
+      <p:sp>
+        <p:nvSpPr>
+          <p:cNvPr id="9" name="Shape 7"/>
+          <p:cNvSpPr/>
+          <p:nvPr/>
+        </p:nvSpPr>
+        <p:spPr>
+          <a:xfrm>
+            <a:off x="667512" y="2487168"/>
+            <a:ext cx="3611880" cy="256032"/>
+          </a:xfrm>
+          <a:prstGeom prst="roundRect">
+            <a:avLst>
+              <a:gd name="adj" fmla="val 17857"/>
+            </a:avLst>
+          </a:prstGeom>
+          <a:solidFill>
+            <a:srgbClr val="F5F3FF"/>
+          </a:solidFill>
+          <a:ln/>
+        </p:spPr>
+      </p:sp>
+      <p:sp>
+        <p:nvSpPr>
+          <p:cNvPr id="10" name="Text 8"/>
+          <p:cNvSpPr/>
+          <p:nvPr/>
+        </p:nvSpPr>
+        <p:spPr>
+          <a:xfrm>
+            <a:off x="722376" y="2523744"/>
+            <a:ext cx="3520440" cy="201168"/>
+          </a:xfrm>
+          <a:prstGeom prst="rect">
+            <a:avLst/>
+          </a:prstGeom>
+          <a:noFill/>
+          <a:ln/>
+        </p:spPr>
+        <p:txBody>
+          <a:bodyPr wrap="square" rtlCol="0" anchor="ctr"/>
+          <a:lstStyle/>
+          <a:p>
+            <a:pPr indent="0" marL="0">
+              <a:buNone/>
+            </a:pPr>
+            <a:r>
+              <a:rPr lang="en-US" sz="780" b="1" dirty="0">
+                <a:solidFill>
+                  <a:srgbClr val="6B2BD9"/>
+                </a:solidFill>
+                <a:latin typeface="Calibri" pitchFamily="34" charset="0"/>
+                <a:ea typeface="Calibri" pitchFamily="34" charset="-122"/>
+                <a:cs typeface="Calibri" pitchFamily="34" charset="-120"/>
+              </a:rPr>
+              <a:t>🔒  Proprietary scoring model calibrated to HORECA — no competitor dataset, 6-month rebuild minimum</a:t>
+            </a:r>
+            <a:endParaRPr lang="en-US" sz="780" dirty="0"/>
+          </a:p>
+        </p:txBody>
+      </p:sp>
+      <p:sp>
+        <p:nvSpPr>
+          <p:cNvPr id="11" name="Shape 9"/>
+          <p:cNvSpPr/>
+          <p:nvPr/>
+        </p:nvSpPr>
+        <p:spPr>
+          <a:xfrm>
+            <a:off x="4818888" y="1298448"/>
+            <a:ext cx="3977640" cy="1572768"/>
+          </a:xfrm>
+          <a:prstGeom prst="roundRect">
+            <a:avLst>
+              <a:gd name="adj" fmla="val 5814"/>
+            </a:avLst>
+          </a:prstGeom>
+          <a:solidFill>
+            <a:srgbClr val="FFFFFF"/>
+          </a:solidFill>
+          <a:ln w="9525">
+            <a:solidFill>
+              <a:srgbClr val="ECE6DA"/>
+            </a:solidFill>
+            <a:prstDash val="solid"/>
+          </a:ln>
+          <a:effectLst>
+            <a:outerShdw sx="100000" sy="100000" kx="0" ky="0" algn="bl" rotWithShape="0" blurRad="76200" dist="25400" dir="5400000">
+              <a:srgbClr val="CBD5E1">
+                <a:alpha val="25000"/>
+              </a:srgbClr>
+            </a:outerShdw>
+          </a:effectLst>
+        </p:spPr>
+      </p:sp>
+      <p:sp>
+        <p:nvSpPr>
+          <p:cNvPr id="12" name="Shape 10"/>
+          <p:cNvSpPr/>
+          <p:nvPr/>
+        </p:nvSpPr>
+        <p:spPr>
+          <a:xfrm>
+            <a:off x="4818888" y="1298448"/>
+            <a:ext cx="3977640" cy="91440"/>
+          </a:xfrm>
+          <a:prstGeom prst="rect">
+            <a:avLst/>
+          </a:prstGeom>
+          <a:solidFill>
+            <a:srgbClr val="E8520A"/>
+          </a:solidFill>
+          <a:ln/>
+        </p:spPr>
+      </p:sp>
+      <p:sp>
+        <p:nvSpPr>
+          <p:cNvPr id="13" name="Text 11"/>
+          <p:cNvSpPr/>
+          <p:nvPr/>
+        </p:nvSpPr>
+        <p:spPr>
+          <a:xfrm>
+            <a:off x="4983480" y="1463040"/>
+            <a:ext cx="457200" cy="274320"/>
+          </a:xfrm>
+          <a:prstGeom prst="rect">
+            <a:avLst/>
+          </a:prstGeom>
+          <a:noFill/>
+          <a:ln/>
+        </p:spPr>
+        <p:txBody>
+          <a:bodyPr wrap="square" rtlCol="0" anchor="ctr"/>
+          <a:lstStyle/>
+          <a:p>
+            <a:pPr indent="0" marL="0">
+              <a:buNone/>
+            </a:pPr>
+            <a:r>
+              <a:rPr lang="en-US" sz="1800" b="1" dirty="0">
+                <a:solidFill>
+                  <a:srgbClr val="E5E7EB"/>
+                </a:solidFill>
+                <a:latin typeface="Calibri" pitchFamily="34" charset="0"/>
+                <a:ea typeface="Calibri" pitchFamily="34" charset="-122"/>
+                <a:cs typeface="Calibri" pitchFamily="34" charset="-120"/>
+              </a:rPr>
+              <a:t>02</a:t>
+            </a:r>
+            <a:endParaRPr lang="en-US" sz="1800" dirty="0"/>
+          </a:p>
+        </p:txBody>
+      </p:sp>
+      <p:sp>
+        <p:nvSpPr>
+          <p:cNvPr id="14" name="Text 12"/>
+          <p:cNvSpPr/>
+          <p:nvPr/>
+        </p:nvSpPr>
+        <p:spPr>
+          <a:xfrm>
+            <a:off x="4983480" y="1463040"/>
+            <a:ext cx="3566160" cy="347472"/>
+          </a:xfrm>
+          <a:prstGeom prst="rect">
+            <a:avLst/>
+          </a:prstGeom>
+          <a:noFill/>
+          <a:ln/>
+        </p:spPr>
+        <p:txBody>
+          <a:bodyPr wrap="square" rtlCol="0" anchor="ctr"/>
+          <a:lstStyle/>
+          <a:p>
+            <a:pPr indent="0" marL="0">
+              <a:buNone/>
+            </a:pPr>
+            <a:r>
+              <a:rPr lang="en-US" sz="1250" b="1" dirty="0">
+                <a:solidFill>
+                  <a:srgbClr val="10182B"/>
+                </a:solidFill>
+                <a:latin typeface="Calibri" pitchFamily="34" charset="0"/>
+                <a:ea typeface="Calibri" pitchFamily="34" charset="-122"/>
+                <a:cs typeface="Calibri" pitchFamily="34" charset="-120"/>
+              </a:rPr>
+              <a:t>⏰  Daily EMI at 9 PM — when the till is full</a:t>
+            </a:r>
+            <a:endParaRPr lang="en-US" sz="1250" dirty="0"/>
+          </a:p>
+        </p:txBody>
+      </p:sp>
+      <p:sp>
+        <p:nvSpPr>
+          <p:cNvPr id="15" name="Text 13"/>
+          <p:cNvSpPr/>
+          <p:nvPr/>
+        </p:nvSpPr>
+        <p:spPr>
+          <a:xfrm>
+            <a:off x="4983480" y="1828800"/>
+            <a:ext cx="3611880" cy="640080"/>
+          </a:xfrm>
+          <a:prstGeom prst="rect">
+            <a:avLst/>
+          </a:prstGeom>
+          <a:noFill/>
+          <a:ln/>
+        </p:spPr>
+        <p:txBody>
+          <a:bodyPr wrap="square" rtlCol="0" anchor="ctr"/>
+          <a:lstStyle/>
+          <a:p>
+            <a:pPr indent="0" marL="0">
+              <a:lnSpc>
+                <a:spcPts val="1050"/>
+              </a:lnSpc>
+              <a:buNone/>
+            </a:pPr>
+            <a:r>
+              <a:rPr lang="en-US" sz="850" dirty="0">
+                <a:solidFill>
+                  <a:srgbClr val="4A5670"/>
+                </a:solidFill>
+                <a:latin typeface="Calibri" pitchFamily="34" charset="0"/>
+                <a:ea typeface="Calibri" pitchFamily="34" charset="-122"/>
+                <a:cs typeface="Calibri" pitchFamily="34" charset="-120"/>
+              </a:rPr>
+              <a:t>HORECA earns daily. We collect daily, at peak. A bad Tuesday costs ₹3,500 — not ₹1,05,000. Monthly NACH competitors manufacture defaults by design. Our multi-bank SI waterfall is structurally impossible to replicate on monthly-EMI architecture.</a:t>
+            </a:r>
+            <a:endParaRPr lang="en-US" sz="850" dirty="0"/>
+          </a:p>
+        </p:txBody>
+      </p:sp>
+      <p:sp>
+        <p:nvSpPr>
+          <p:cNvPr id="16" name="Shape 14"/>
+          <p:cNvSpPr/>
+          <p:nvPr/>
+        </p:nvSpPr>
+        <p:spPr>
+          <a:xfrm>
+            <a:off x="4983480" y="2487168"/>
+            <a:ext cx="3611880" cy="256032"/>
+          </a:xfrm>
+          <a:prstGeom prst="roundRect">
+            <a:avLst>
+              <a:gd name="adj" fmla="val 17857"/>
+            </a:avLst>
+          </a:prstGeom>
+          <a:solidFill>
+            <a:srgbClr val="F5F3FF"/>
+          </a:solidFill>
+          <a:ln/>
+        </p:spPr>
+      </p:sp>
+      <p:sp>
+        <p:nvSpPr>
+          <p:cNvPr id="17" name="Text 15"/>
+          <p:cNvSpPr/>
+          <p:nvPr/>
+        </p:nvSpPr>
+        <p:spPr>
+          <a:xfrm>
+            <a:off x="5038344" y="2523744"/>
+            <a:ext cx="3520440" cy="201168"/>
+          </a:xfrm>
+          <a:prstGeom prst="rect">
+            <a:avLst/>
+          </a:prstGeom>
+          <a:noFill/>
+          <a:ln/>
+        </p:spPr>
+        <p:txBody>
+          <a:bodyPr wrap="square" rtlCol="0" anchor="ctr"/>
+          <a:lstStyle/>
+          <a:p>
+            <a:pPr indent="0" marL="0">
+              <a:buNone/>
+            </a:pPr>
+            <a:r>
+              <a:rPr lang="en-US" sz="780" b="1" dirty="0">
+                <a:solidFill>
+                  <a:srgbClr val="6B2BD9"/>
+                </a:solidFill>
+                <a:latin typeface="Calibri" pitchFamily="34" charset="0"/>
+                <a:ea typeface="Calibri" pitchFamily="34" charset="-122"/>
+                <a:cs typeface="Calibri" pitchFamily="34" charset="-120"/>
+              </a:rPr>
+              <a:t>🔒  Requires SI waterfall + daily bureau-reporting design — not retrofittable onto NACH infrastructure</a:t>
+            </a:r>
+            <a:endParaRPr lang="en-US" sz="780" dirty="0"/>
+          </a:p>
+        </p:txBody>
+      </p:sp>
+      <p:sp>
+        <p:nvSpPr>
+          <p:cNvPr id="18" name="Shape 16"/>
+          <p:cNvSpPr/>
+          <p:nvPr/>
+        </p:nvSpPr>
+        <p:spPr>
+          <a:xfrm>
+            <a:off x="502920" y="3017520"/>
+            <a:ext cx="3977640" cy="1572768"/>
+          </a:xfrm>
+          <a:prstGeom prst="roundRect">
+            <a:avLst>
+              <a:gd name="adj" fmla="val 5814"/>
+            </a:avLst>
+          </a:prstGeom>
+          <a:solidFill>
+            <a:srgbClr val="FFFFFF"/>
+          </a:solidFill>
+          <a:ln w="9525">
+            <a:solidFill>
+              <a:srgbClr val="ECE6DA"/>
+            </a:solidFill>
+            <a:prstDash val="solid"/>
+          </a:ln>
+          <a:effectLst>
+            <a:outerShdw sx="100000" sy="100000" kx="0" ky="0" algn="bl" rotWithShape="0" blurRad="76200" dist="25400" dir="5400000">
+              <a:srgbClr val="CBD5E1">
+                <a:alpha val="25000"/>
+              </a:srgbClr>
+            </a:outerShdw>
+          </a:effectLst>
+        </p:spPr>
+      </p:sp>
+      <p:sp>
+        <p:nvSpPr>
+          <p:cNvPr id="19" name="Shape 17"/>
+          <p:cNvSpPr/>
+          <p:nvPr/>
+        </p:nvSpPr>
+        <p:spPr>
+          <a:xfrm>
+            <a:off x="502920" y="3017520"/>
+            <a:ext cx="3977640" cy="91440"/>
+          </a:xfrm>
+          <a:prstGeom prst="rect">
+            <a:avLst/>
+          </a:prstGeom>
+          <a:solidFill>
+            <a:srgbClr val="0E756C"/>
+          </a:solidFill>
+          <a:ln/>
+        </p:spPr>
+      </p:sp>
+      <p:sp>
+        <p:nvSpPr>
+          <p:cNvPr id="20" name="Text 18"/>
+          <p:cNvSpPr/>
+          <p:nvPr/>
+        </p:nvSpPr>
+        <p:spPr>
+          <a:xfrm>
+            <a:off x="667512" y="3182112"/>
+            <a:ext cx="457200" cy="274320"/>
+          </a:xfrm>
+          <a:prstGeom prst="rect">
+            <a:avLst/>
+          </a:prstGeom>
+          <a:noFill/>
+          <a:ln/>
+        </p:spPr>
+        <p:txBody>
+          <a:bodyPr wrap="square" rtlCol="0" anchor="ctr"/>
+          <a:lstStyle/>
+          <a:p>
+            <a:pPr indent="0" marL="0">
+              <a:buNone/>
+            </a:pPr>
+            <a:r>
+              <a:rPr lang="en-US" sz="1800" b="1" dirty="0">
+                <a:solidFill>
+                  <a:srgbClr val="E5E7EB"/>
+                </a:solidFill>
+                <a:latin typeface="Calibri" pitchFamily="34" charset="0"/>
+                <a:ea typeface="Calibri" pitchFamily="34" charset="-122"/>
+                <a:cs typeface="Calibri" pitchFamily="34" charset="-120"/>
+              </a:rPr>
+              <a:t>03</a:t>
+            </a:r>
+            <a:endParaRPr lang="en-US" sz="1800" dirty="0"/>
+          </a:p>
+        </p:txBody>
+      </p:sp>
+      <p:sp>
+        <p:nvSpPr>
+          <p:cNvPr id="21" name="Text 19"/>
+          <p:cNvSpPr/>
+          <p:nvPr/>
+        </p:nvSpPr>
+        <p:spPr>
+          <a:xfrm>
+            <a:off x="667512" y="3182112"/>
+            <a:ext cx="3566160" cy="347472"/>
+          </a:xfrm>
+          <a:prstGeom prst="rect">
+            <a:avLst/>
+          </a:prstGeom>
+          <a:noFill/>
+          <a:ln/>
+        </p:spPr>
+        <p:txBody>
+          <a:bodyPr wrap="square" rtlCol="0" anchor="ctr"/>
+          <a:lstStyle/>
+          <a:p>
+            <a:pPr indent="0" marL="0">
+              <a:buNone/>
+            </a:pPr>
+            <a:r>
+              <a:rPr lang="en-US" sz="1250" b="1" dirty="0">
+                <a:solidFill>
+                  <a:srgbClr val="10182B"/>
+                </a:solidFill>
+                <a:latin typeface="Calibri" pitchFamily="34" charset="0"/>
+                <a:ea typeface="Calibri" pitchFamily="34" charset="-122"/>
+                <a:cs typeface="Calibri" pitchFamily="34" charset="-120"/>
+              </a:rPr>
+              <a:t>📡  POS distribution — 150K+ outlets, near-zero CAC</a:t>
+            </a:r>
+            <a:endParaRPr lang="en-US" sz="1250" dirty="0"/>
+          </a:p>
+        </p:txBody>
+      </p:sp>
+      <p:sp>
+        <p:nvSpPr>
+          <p:cNvPr id="22" name="Text 20"/>
+          <p:cNvSpPr/>
+          <p:nvPr/>
+        </p:nvSpPr>
+        <p:spPr>
+          <a:xfrm>
+            <a:off x="667512" y="3547872"/>
+            <a:ext cx="3611880" cy="640080"/>
+          </a:xfrm>
+          <a:prstGeom prst="rect">
+            <a:avLst/>
+          </a:prstGeom>
+          <a:noFill/>
+          <a:ln/>
+        </p:spPr>
+        <p:txBody>
+          <a:bodyPr wrap="square" rtlCol="0" anchor="ctr"/>
+          <a:lstStyle/>
+          <a:p>
+            <a:pPr indent="0" marL="0">
+              <a:lnSpc>
+                <a:spcPts val="1050"/>
+              </a:lnSpc>
+              <a:buNone/>
+            </a:pPr>
+            <a:r>
+              <a:rPr lang="en-US" sz="850" dirty="0">
+                <a:solidFill>
+                  <a:srgbClr val="4A5670"/>
+                </a:solidFill>
+                <a:latin typeface="Calibri" pitchFamily="34" charset="0"/>
+                <a:ea typeface="Calibri" pitchFamily="34" charset="-122"/>
+                <a:cs typeface="Calibri" pitchFamily="34" charset="-120"/>
+              </a:rPr>
+              <a:t>Petpooja (150K outlets, 200 cities) + UrbanPiper (45K outlets, Zomato/Swiggy-backed) are our channel. Revenue-sharing model: no fixed cost, pure incentive alignment. Competitor field-sales CAC: ₹8,000–15,000/loan. Ours: near zero on repeat.</a:t>
+            </a:r>
+            <a:endParaRPr lang="en-US" sz="850" dirty="0"/>
+          </a:p>
+        </p:txBody>
+      </p:sp>
+      <p:sp>
+        <p:nvSpPr>
+          <p:cNvPr id="23" name="Shape 21"/>
+          <p:cNvSpPr/>
+          <p:nvPr/>
+        </p:nvSpPr>
+        <p:spPr>
+          <a:xfrm>
+            <a:off x="667512" y="4206240"/>
+            <a:ext cx="3611880" cy="256032"/>
+          </a:xfrm>
+          <a:prstGeom prst="roundRect">
+            <a:avLst>
+              <a:gd name="adj" fmla="val 17857"/>
+            </a:avLst>
+          </a:prstGeom>
+          <a:solidFill>
+            <a:srgbClr val="F5F3FF"/>
+          </a:solidFill>
+          <a:ln/>
+        </p:spPr>
+      </p:sp>
+      <p:sp>
+        <p:nvSpPr>
+          <p:cNvPr id="24" name="Text 22"/>
+          <p:cNvSpPr/>
+          <p:nvPr/>
+        </p:nvSpPr>
+        <p:spPr>
+          <a:xfrm>
+            <a:off x="722376" y="4242816"/>
+            <a:ext cx="3520440" cy="201168"/>
+          </a:xfrm>
+          <a:prstGeom prst="rect">
+            <a:avLst/>
+          </a:prstGeom>
+          <a:noFill/>
+          <a:ln/>
+        </p:spPr>
+        <p:txBody>
+          <a:bodyPr wrap="square" rtlCol="0" anchor="ctr"/>
+          <a:lstStyle/>
+          <a:p>
+            <a:pPr indent="0" marL="0">
+              <a:buNone/>
+            </a:pPr>
+            <a:r>
+              <a:rPr lang="en-US" sz="780" b="1" dirty="0">
+                <a:solidFill>
+                  <a:srgbClr val="6B2BD9"/>
+                </a:solidFill>
+                <a:latin typeface="Calibri" pitchFamily="34" charset="0"/>
+                <a:ea typeface="Calibri" pitchFamily="34" charset="-122"/>
+                <a:cs typeface="Calibri" pitchFamily="34" charset="-120"/>
+              </a:rPr>
+              <a:t>🔒  Exclusive channel relationships + real-time POS data for underwriting — competitors need ground ops</a:t>
+            </a:r>
+            <a:endParaRPr lang="en-US" sz="780" dirty="0"/>
+          </a:p>
+        </p:txBody>
+      </p:sp>
+      <p:sp>
+        <p:nvSpPr>
+          <p:cNvPr id="25" name="Shape 23"/>
+          <p:cNvSpPr/>
+          <p:nvPr/>
+        </p:nvSpPr>
+        <p:spPr>
+          <a:xfrm>
+            <a:off x="4818888" y="3017520"/>
+            <a:ext cx="3977640" cy="1572768"/>
+          </a:xfrm>
+          <a:prstGeom prst="roundRect">
+            <a:avLst>
+              <a:gd name="adj" fmla="val 5814"/>
+            </a:avLst>
+          </a:prstGeom>
+          <a:solidFill>
+            <a:srgbClr val="FFFFFF"/>
+          </a:solidFill>
+          <a:ln w="9525">
+            <a:solidFill>
+              <a:srgbClr val="ECE6DA"/>
+            </a:solidFill>
+            <a:prstDash val="solid"/>
+          </a:ln>
+          <a:effectLst>
+            <a:outerShdw sx="100000" sy="100000" kx="0" ky="0" algn="bl" rotWithShape="0" blurRad="76200" dist="25400" dir="5400000">
+              <a:srgbClr val="CBD5E1">
+                <a:alpha val="25000"/>
+              </a:srgbClr>
+            </a:outerShdw>
+          </a:effectLst>
+        </p:spPr>
+      </p:sp>
+      <p:sp>
+        <p:nvSpPr>
+          <p:cNvPr id="26" name="Shape 24"/>
+          <p:cNvSpPr/>
+          <p:nvPr/>
+        </p:nvSpPr>
+        <p:spPr>
+          <a:xfrm>
+            <a:off x="4818888" y="3017520"/>
+            <a:ext cx="3977640" cy="91440"/>
+          </a:xfrm>
+          <a:prstGeom prst="rect">
+            <a:avLst/>
+          </a:prstGeom>
+          <a:solidFill>
+            <a:srgbClr val="B45309"/>
+          </a:solidFill>
+          <a:ln/>
+        </p:spPr>
+      </p:sp>
+      <p:sp>
+        <p:nvSpPr>
+          <p:cNvPr id="27" name="Text 25"/>
+          <p:cNvSpPr/>
+          <p:nvPr/>
+        </p:nvSpPr>
+        <p:spPr>
+          <a:xfrm>
+            <a:off x="4983480" y="3182112"/>
+            <a:ext cx="457200" cy="274320"/>
+          </a:xfrm>
+          <a:prstGeom prst="rect">
+            <a:avLst/>
+          </a:prstGeom>
+          <a:noFill/>
+          <a:ln/>
+        </p:spPr>
+        <p:txBody>
+          <a:bodyPr wrap="square" rtlCol="0" anchor="ctr"/>
+          <a:lstStyle/>
+          <a:p>
+            <a:pPr indent="0" marL="0">
+              <a:buNone/>
+            </a:pPr>
+            <a:r>
+              <a:rPr lang="en-US" sz="1800" b="1" dirty="0">
+                <a:solidFill>
+                  <a:srgbClr val="E5E7EB"/>
+                </a:solidFill>
+                <a:latin typeface="Calibri" pitchFamily="34" charset="0"/>
+                <a:ea typeface="Calibri" pitchFamily="34" charset="-122"/>
+                <a:cs typeface="Calibri" pitchFamily="34" charset="-120"/>
+              </a:rPr>
+              <a:t>04</a:t>
+            </a:r>
+            <a:endParaRPr lang="en-US" sz="1800" dirty="0"/>
+          </a:p>
+        </p:txBody>
+      </p:sp>
+      <p:sp>
+        <p:nvSpPr>
+          <p:cNvPr id="28" name="Text 26"/>
+          <p:cNvSpPr/>
+          <p:nvPr/>
+        </p:nvSpPr>
+        <p:spPr>
+          <a:xfrm>
+            <a:off x="4983480" y="3182112"/>
+            <a:ext cx="3566160" cy="347472"/>
+          </a:xfrm>
+          <a:prstGeom prst="rect">
+            <a:avLst/>
+          </a:prstGeom>
+          <a:noFill/>
+          <a:ln/>
+        </p:spPr>
+        <p:txBody>
+          <a:bodyPr wrap="square" rtlCol="0" anchor="ctr"/>
+          <a:lstStyle/>
+          <a:p>
+            <a:pPr indent="0" marL="0">
+              <a:buNone/>
+            </a:pPr>
+            <a:r>
+              <a:rPr lang="en-US" sz="1250" b="1" dirty="0">
+                <a:solidFill>
+                  <a:srgbClr val="10182B"/>
+                </a:solidFill>
+                <a:latin typeface="Calibri" pitchFamily="34" charset="0"/>
+                <a:ea typeface="Calibri" pitchFamily="34" charset="-122"/>
+                <a:cs typeface="Calibri" pitchFamily="34" charset="-120"/>
+              </a:rPr>
+              <a:t>📊  30× repayment data — the RL model no one else can build</a:t>
+            </a:r>
+            <a:endParaRPr lang="en-US" sz="1250" dirty="0"/>
+          </a:p>
+        </p:txBody>
+      </p:sp>
+      <p:sp>
+        <p:nvSpPr>
+          <p:cNvPr id="29" name="Text 27"/>
+          <p:cNvSpPr/>
+          <p:nvPr/>
+        </p:nvSpPr>
+        <p:spPr>
+          <a:xfrm>
+            <a:off x="4983480" y="3547872"/>
+            <a:ext cx="3611880" cy="640080"/>
+          </a:xfrm>
+          <a:prstGeom prst="rect">
+            <a:avLst/>
+          </a:prstGeom>
+          <a:noFill/>
+          <a:ln/>
+        </p:spPr>
+        <p:txBody>
+          <a:bodyPr wrap="square" rtlCol="0" anchor="ctr"/>
+          <a:lstStyle/>
+          <a:p>
+            <a:pPr indent="0" marL="0">
+              <a:lnSpc>
+                <a:spcPts val="1050"/>
+              </a:lnSpc>
+              <a:buNone/>
+            </a:pPr>
+            <a:r>
+              <a:rPr lang="en-US" sz="850" dirty="0">
+                <a:solidFill>
+                  <a:srgbClr val="4A5670"/>
+                </a:solidFill>
+                <a:latin typeface="Calibri" pitchFamily="34" charset="0"/>
+                <a:ea typeface="Calibri" pitchFamily="34" charset="-122"/>
+                <a:cs typeface="Calibri" pitchFamily="34" charset="-120"/>
+              </a:rPr>
+              <a:t>Daily EMI = 365 signals per loan per year. Monthly lenders get 12. We are training a Reinforcement Learning model on labelled HORECA repayment data — a dataset that doesn't exist anywhere on Earth today. By month 18, no competitor can buy this moat.</a:t>
+            </a:r>
+            <a:endParaRPr lang="en-US" sz="850" dirty="0"/>
+          </a:p>
+        </p:txBody>
+      </p:sp>
+      <p:sp>
+        <p:nvSpPr>
+          <p:cNvPr id="30" name="Shape 28"/>
+          <p:cNvSpPr/>
+          <p:nvPr/>
+        </p:nvSpPr>
+        <p:spPr>
+          <a:xfrm>
+            <a:off x="4983480" y="4206240"/>
+            <a:ext cx="3611880" cy="256032"/>
+          </a:xfrm>
+          <a:prstGeom prst="roundRect">
+            <a:avLst>
+              <a:gd name="adj" fmla="val 17857"/>
+            </a:avLst>
+          </a:prstGeom>
+          <a:solidFill>
+            <a:srgbClr val="F5F3FF"/>
+          </a:solidFill>
+          <a:ln/>
+        </p:spPr>
+      </p:sp>
+      <p:sp>
+        <p:nvSpPr>
+          <p:cNvPr id="31" name="Text 29"/>
+          <p:cNvSpPr/>
+          <p:nvPr/>
+        </p:nvSpPr>
+        <p:spPr>
+          <a:xfrm>
+            <a:off x="5038344" y="4242816"/>
+            <a:ext cx="3520440" cy="201168"/>
+          </a:xfrm>
+          <a:prstGeom prst="rect">
+            <a:avLst/>
+          </a:prstGeom>
+          <a:noFill/>
+          <a:ln/>
+        </p:spPr>
+        <p:txBody>
+          <a:bodyPr wrap="square" rtlCol="0" anchor="ctr"/>
+          <a:lstStyle/>
+          <a:p>
+            <a:pPr indent="0" marL="0">
+              <a:buNone/>
+            </a:pPr>
+            <a:r>
+              <a:rPr lang="en-US" sz="780" b="1" dirty="0">
+                <a:solidFill>
+                  <a:srgbClr val="6B2BD9"/>
+                </a:solidFill>
+                <a:latin typeface="Calibri" pitchFamily="34" charset="0"/>
+                <a:ea typeface="Calibri" pitchFamily="34" charset="-122"/>
+                <a:cs typeface="Calibri" pitchFamily="34" charset="-120"/>
+              </a:rPr>
+              <a:t>🔒  Proprietary labelled HORECA default/repayment data — 18-month head start, cannot be acquired</a:t>
+            </a:r>
+            <a:endParaRPr lang="en-US" sz="780" dirty="0"/>
+          </a:p>
+        </p:txBody>
+      </p:sp>
+      <p:sp>
+        <p:nvSpPr>
+          <p:cNvPr id="32" name="Shape 30"/>
+          <p:cNvSpPr/>
+          <p:nvPr/>
+        </p:nvSpPr>
+        <p:spPr>
+          <a:xfrm>
+            <a:off x="4315968" y="4736592"/>
+            <a:ext cx="3977640" cy="1572768"/>
+          </a:xfrm>
+          <a:prstGeom prst="roundRect">
+            <a:avLst>
+              <a:gd name="adj" fmla="val 5814"/>
+            </a:avLst>
+          </a:prstGeom>
+          <a:solidFill>
+            <a:srgbClr val="FFFFFF"/>
+          </a:solidFill>
+          <a:ln w="9525">
+            <a:solidFill>
+              <a:srgbClr val="ECE6DA"/>
+            </a:solidFill>
+            <a:prstDash val="solid"/>
+          </a:ln>
+          <a:effectLst>
+            <a:outerShdw sx="100000" sy="100000" kx="0" ky="0" algn="bl" rotWithShape="0" blurRad="76200" dist="25400" dir="5400000">
+              <a:srgbClr val="CBD5E1">
+                <a:alpha val="25000"/>
+              </a:srgbClr>
+            </a:outerShdw>
+          </a:effectLst>
+        </p:spPr>
+      </p:sp>
+      <p:sp>
+        <p:nvSpPr>
+          <p:cNvPr id="33" name="Shape 31"/>
+          <p:cNvSpPr/>
+          <p:nvPr/>
+        </p:nvSpPr>
+        <p:spPr>
+          <a:xfrm>
+            <a:off x="4315968" y="4736592"/>
+            <a:ext cx="3977640" cy="91440"/>
+          </a:xfrm>
+          <a:prstGeom prst="rect">
+            <a:avLst/>
+          </a:prstGeom>
+          <a:solidFill>
+            <a:srgbClr val="177A3D"/>
+          </a:solidFill>
+          <a:ln/>
+        </p:spPr>
+      </p:sp>
+      <p:sp>
+        <p:nvSpPr>
+          <p:cNvPr id="34" name="Text 32"/>
+          <p:cNvSpPr/>
+          <p:nvPr/>
+        </p:nvSpPr>
+        <p:spPr>
+          <a:xfrm>
+            <a:off x="4480560" y="4901184"/>
+            <a:ext cx="457200" cy="274320"/>
+          </a:xfrm>
+          <a:prstGeom prst="rect">
+            <a:avLst/>
+          </a:prstGeom>
+          <a:noFill/>
+          <a:ln/>
+        </p:spPr>
+        <p:txBody>
+          <a:bodyPr wrap="square" rtlCol="0" anchor="ctr"/>
+          <a:lstStyle/>
+          <a:p>
+            <a:pPr indent="0" marL="0">
+              <a:buNone/>
+            </a:pPr>
+            <a:r>
+              <a:rPr lang="en-US" sz="1800" b="1" dirty="0">
+                <a:solidFill>
+                  <a:srgbClr val="E5E7EB"/>
+                </a:solidFill>
+                <a:latin typeface="Calibri" pitchFamily="34" charset="0"/>
+                <a:ea typeface="Calibri" pitchFamily="34" charset="-122"/>
+                <a:cs typeface="Calibri" pitchFamily="34" charset="-120"/>
+              </a:rPr>
+              <a:t>05</a:t>
+            </a:r>
+            <a:endParaRPr lang="en-US" sz="1800" dirty="0"/>
+          </a:p>
+        </p:txBody>
+      </p:sp>
+      <p:sp>
+        <p:nvSpPr>
+          <p:cNvPr id="35" name="Text 33"/>
+          <p:cNvSpPr/>
+          <p:nvPr/>
+        </p:nvSpPr>
+        <p:spPr>
+          <a:xfrm>
+            <a:off x="4480560" y="4901184"/>
+            <a:ext cx="3566160" cy="347472"/>
+          </a:xfrm>
+          <a:prstGeom prst="rect">
+            <a:avLst/>
+          </a:prstGeom>
+          <a:noFill/>
+          <a:ln/>
+        </p:spPr>
+        <p:txBody>
+          <a:bodyPr wrap="square" rtlCol="0" anchor="ctr"/>
+          <a:lstStyle/>
+          <a:p>
+            <a:pPr indent="0" marL="0">
+              <a:buNone/>
+            </a:pPr>
+            <a:r>
+              <a:rPr lang="en-US" sz="1250" b="1" dirty="0">
+                <a:solidFill>
+                  <a:srgbClr val="10182B"/>
+                </a:solidFill>
+                <a:latin typeface="Calibri" pitchFamily="34" charset="0"/>
+                <a:ea typeface="Calibri" pitchFamily="34" charset="-122"/>
+                <a:cs typeface="Calibri" pitchFamily="34" charset="-120"/>
+              </a:rPr>
+              <a:t>🛡️  RBI-ready policy stack — live, board-reviewed</a:t>
+            </a:r>
+            <a:endParaRPr lang="en-US" sz="1250" dirty="0"/>
+          </a:p>
+        </p:txBody>
+      </p:sp>
+      <p:sp>
+        <p:nvSpPr>
+          <p:cNvPr id="36" name="Text 34"/>
+          <p:cNvSpPr/>
+          <p:nvPr/>
+        </p:nvSpPr>
+        <p:spPr>
+          <a:xfrm>
+            <a:off x="4480560" y="5266944"/>
+            <a:ext cx="3611880" cy="640080"/>
+          </a:xfrm>
+          <a:prstGeom prst="rect">
+            <a:avLst/>
+          </a:prstGeom>
+          <a:noFill/>
+          <a:ln/>
+        </p:spPr>
+        <p:txBody>
+          <a:bodyPr wrap="square" rtlCol="0" anchor="ctr"/>
+          <a:lstStyle/>
+          <a:p>
+            <a:pPr indent="0" marL="0">
+              <a:lnSpc>
+                <a:spcPts val="1050"/>
+              </a:lnSpc>
+              <a:buNone/>
+            </a:pPr>
+            <a:r>
+              <a:rPr lang="en-US" sz="850" dirty="0">
+                <a:solidFill>
+                  <a:srgbClr val="4A5670"/>
+                </a:solidFill>
+                <a:latin typeface="Calibri" pitchFamily="34" charset="0"/>
+                <a:ea typeface="Calibri" pitchFamily="34" charset="-122"/>
+                <a:cs typeface="Calibri" pitchFamily="34" charset="-120"/>
+              </a:rPr>
+              <a:t>Credit policy, Collection &amp; Recovery Policy (Fair Practices Code), bureau framework — all written, reviewed, and board-ready. Most fintech NBFC applicants spend 6–9 months on this. We walk in with it done.</a:t>
+            </a:r>
+            <a:endParaRPr lang="en-US" sz="850" dirty="0"/>
+          </a:p>
+        </p:txBody>
+      </p:sp>
+      <p:sp>
+        <p:nvSpPr>
+          <p:cNvPr id="37" name="Shape 35"/>
+          <p:cNvSpPr/>
+          <p:nvPr/>
+        </p:nvSpPr>
+        <p:spPr>
+          <a:xfrm>
+            <a:off x="4480560" y="5925312"/>
+            <a:ext cx="3611880" cy="256032"/>
+          </a:xfrm>
+          <a:prstGeom prst="roundRect">
+            <a:avLst>
+              <a:gd name="adj" fmla="val 17857"/>
+            </a:avLst>
+          </a:prstGeom>
+          <a:solidFill>
+            <a:srgbClr val="F5F3FF"/>
+          </a:solidFill>
+          <a:ln/>
+        </p:spPr>
+      </p:sp>
+      <p:sp>
+        <p:nvSpPr>
+          <p:cNvPr id="38" name="Text 36"/>
+          <p:cNvSpPr/>
+          <p:nvPr/>
+        </p:nvSpPr>
+        <p:spPr>
+          <a:xfrm>
+            <a:off x="4535424" y="5961888"/>
+            <a:ext cx="3520440" cy="201168"/>
+          </a:xfrm>
+          <a:prstGeom prst="rect">
+            <a:avLst/>
+          </a:prstGeom>
+          <a:noFill/>
+          <a:ln/>
+        </p:spPr>
+        <p:txBody>
+          <a:bodyPr wrap="square" rtlCol="0" anchor="ctr"/>
+          <a:lstStyle/>
+          <a:p>
+            <a:pPr indent="0" marL="0">
+              <a:buNone/>
+            </a:pPr>
+            <a:r>
+              <a:rPr lang="en-US" sz="780" b="1" dirty="0">
+                <a:solidFill>
+                  <a:srgbClr val="6B2BD9"/>
+                </a:solidFill>
+                <a:latin typeface="Calibri" pitchFamily="34" charset="0"/>
+                <a:ea typeface="Calibri" pitchFamily="34" charset="-122"/>
+                <a:cs typeface="Calibri" pitchFamily="34" charset="-120"/>
+              </a:rPr>
+              <a:t>🔒  Policy stack complete before licence — 6-9 month structural advantage over any new entrant</a:t>
+            </a:r>
+            <a:endParaRPr lang="en-US" sz="780" dirty="0"/>
+          </a:p>
+        </p:txBody>
+      </p:sp>
+      <p:sp>
+        <p:nvSpPr>
+          <p:cNvPr id="39" name="Text 37"/>
+          <p:cNvSpPr/>
+          <p:nvPr/>
+        </p:nvSpPr>
+        <p:spPr>
+          <a:xfrm>
+            <a:off x="8549640" y="4864608"/>
+            <a:ext cx="411480" cy="256032"/>
+          </a:xfrm>
+          <a:prstGeom prst="rect">
+            <a:avLst/>
+          </a:prstGeom>
+          <a:noFill/>
+          <a:ln/>
+        </p:spPr>
+        <p:txBody>
+          <a:bodyPr wrap="square" rtlCol="0" anchor="ctr"/>
+          <a:lstStyle/>
+          <a:p>
+            <a:pPr algn="r" indent="0" marL="0">
+              <a:buNone/>
+            </a:pPr>
+            <a:r>
+              <a:rPr lang="en-US" sz="1000" b="1" dirty="0">
+                <a:solidFill>
+                  <a:srgbClr val="8E99B0"/>
+                </a:solidFill>
+                <a:latin typeface="Calibri" pitchFamily="34" charset="0"/>
+                <a:ea typeface="Calibri" pitchFamily="34" charset="-122"/>
+                <a:cs typeface="Calibri" pitchFamily="34" charset="-120"/>
+              </a:rPr>
+              <a:t>5B</a:t>
+            </a:r>
+            <a:endParaRPr lang="en-US" sz="1000" dirty="0"/>
+          </a:p>
+        </p:txBody>
+      </p:sp>
+      <p:sp>
+        <p:nvSpPr>
+          <p:cNvPr id="40" name="Shape 38"/>
+          <p:cNvSpPr/>
+          <p:nvPr/>
+        </p:nvSpPr>
+        <p:spPr>
+          <a:xfrm>
+            <a:off x="0" y="5074920"/>
+            <a:ext cx="9144000" cy="68580"/>
+          </a:xfrm>
+          <a:prstGeom prst="rect">
+            <a:avLst/>
+          </a:prstGeom>
+          <a:solidFill>
+            <a:srgbClr val="E8520A"/>
+          </a:solidFill>
+          <a:ln/>
+        </p:spPr>
+      </p:sp>
+    </p:spTree>
+  </p:cSld>
+  <p:clrMapOvr>
+    <a:masterClrMapping/>
+  </p:clrMapOvr>
+</p:sld>
+</file>
+
 <file path=ppt/slides/slide2.xml><?xml version="1.0" encoding="utf-8"?>
 <p:sld xmlns:a="http://schemas.openxmlformats.org/drawingml/2006/main" xmlns:r="http://schemas.openxmlformats.org/officeDocument/2006/relationships" xmlns:p="http://schemas.openxmlformats.org/presentationml/2006/main">
   <p:cSld name="Slide 2">

--- a/public/RasoiCapital_PitchDeck.pptx
+++ b/public/RasoiCapital_PitchDeck.pptx
@@ -9,8 +9,6 @@
     <p:sldId id="257" r:id="rId3"/>
     <p:sldId id="258" r:id="rId4"/>
     <p:sldId id="259" r:id="rId5"/>
-    <p:sldId id="2147483649" r:id="rId23"/>
-    <p:sldId id="2147483650" r:id="rId24"/>
     <p:sldId id="260" r:id="rId6"/>
     <p:sldId id="261" r:id="rId7"/>
     <p:sldId id="262" r:id="rId8"/>
@@ -22,6 +20,7 @@
     <p:sldId id="268" r:id="rId14"/>
     <p:sldId id="269" r:id="rId15"/>
     <p:sldId id="270" r:id="rId16"/>
+    <p:sldId id="272" r:id="rId23"/>
     <p:sldId id="271" r:id="rId17"/>
   </p:sldIdLst>
   <p:notesMasterIdLst>
@@ -4413,7 +4412,7 @@
                 <a:ea typeface="Calibri" pitchFamily="34" charset="-122"/>
                 <a:cs typeface="Calibri" pitchFamily="34" charset="-120"/>
               </a:rPr>
-              <a:t>Daily EMI @ cash peak</a:t>
+              <a:t>Collection at source</a:t>
             </a:r>
             <a:endParaRPr lang="en-US" sz="950" dirty="0"/>
           </a:p>
@@ -4647,7 +4646,7 @@
                 <a:ea typeface="Calibri" pitchFamily="34" charset="-122"/>
                 <a:cs typeface="Calibri" pitchFamily="34" charset="-120"/>
               </a:rPr>
-              <a:t>✓ 9–11 PM SI</a:t>
+              <a:t>✓ Virtual account</a:t>
             </a:r>
             <a:endParaRPr lang="en-US" sz="900" dirty="0"/>
           </a:p>
@@ -6175,7 +6174,7 @@
                 <a:ea typeface="Calibri" pitchFamily="34" charset="-122"/>
                 <a:cs typeface="Calibri" pitchFamily="34" charset="-120"/>
               </a:rPr>
-              <a:t>2 · Observe daily</a:t>
+              <a:t>2 · Observe the revenue</a:t>
             </a:r>
             <a:endParaRPr lang="en-US" sz="1250" dirty="0"/>
           </a:p>
@@ -6217,7 +6216,7 @@
                 <a:ea typeface="Calibri" pitchFamily="34" charset="-122"/>
                 <a:cs typeface="Calibri" pitchFamily="34" charset="-120"/>
               </a:rPr>
-              <a:t>365 repayment signals per loan per year vs 12 for monthly lenders</a:t>
+              <a:t>Every settlement flows through the account we control — real revenue, not a proxy</a:t>
             </a:r>
             <a:endParaRPr lang="en-US" sz="950" dirty="0"/>
           </a:p>
@@ -6548,7 +6547,7 @@
                 <a:ea typeface="Calibri" pitchFamily="34" charset="-122"/>
                 <a:cs typeface="Calibri" pitchFamily="34" charset="-120"/>
               </a:rPr>
-              <a:t>30×</a:t>
+              <a:t>Own the pipe</a:t>
             </a:r>
             <a:endParaRPr lang="en-US" sz="2300" dirty="0"/>
           </a:p>
@@ -6590,7 +6589,7 @@
                 <a:ea typeface="Calibri" pitchFamily="34" charset="-122"/>
                 <a:cs typeface="Calibri" pitchFamily="34" charset="-120"/>
               </a:rPr>
-              <a:t>more repayment data per loan than any monthly lender — the raw fuel for the RL model</a:t>
+              <a:t>we control the account every rupee of aggregator revenue flows through — the raw fuel for the RL model</a:t>
             </a:r>
             <a:endParaRPr lang="en-US" sz="900" dirty="0"/>
           </a:p>
@@ -12786,7 +12785,7 @@
                 <a:ea typeface="Calibri" pitchFamily="34" charset="-122"/>
                 <a:cs typeface="Calibri" pitchFamily="34" charset="-120"/>
               </a:rPr>
-              <a:t>Daily-EMI = 30× repayment signal density — the RL moat compounds from loan #1</a:t>
+              <a:t>We control the account every rupee of aggregator revenue flows through — the moat compounds from loan #1</a:t>
             </a:r>
             <a:endParaRPr lang="en-US" sz="950" dirty="0"/>
           </a:p>
@@ -13020,7 +13019,7 @@
                 <a:ea typeface="Calibri" pitchFamily="34" charset="-122"/>
                 <a:cs typeface="Calibri" pitchFamily="34" charset="-120"/>
               </a:rPr>
-              <a:t>Goverdhan M D — Co-founder   ·   Aparna — Co-founder   ·   Srinivas J — Co-founder   ·   Boi — Co-founder</a:t>
+              <a:t>Serial entrepreneurs · Goverdhan M D · Aparna · Srinivas Jayaram · Boi · Mathew Varkey</a:t>
             </a:r>
             <a:endParaRPr lang="en-US" sz="950" dirty="0"/>
           </a:p>
@@ -13036,11 +13035,11 @@
 
 <file path=ppt/slides/slide17.xml><?xml version="1.0" encoding="utf-8"?>
 <p:sld xmlns:a="http://schemas.openxmlformats.org/drawingml/2006/main" xmlns:r="http://schemas.openxmlformats.org/officeDocument/2006/relationships" xmlns:p="http://schemas.openxmlformats.org/presentationml/2006/main">
-  <p:cSld name="Slide 1">
+  <p:cSld name="Slide 16">
     <p:bg>
       <p:bgPr>
         <a:solidFill>
-          <a:srgbClr val="FFFFFF"/>
+          <a:srgbClr val="FAF7F2"/>
         </a:solidFill>
       </p:bgPr>
     </p:bg>
@@ -13091,7 +13090,7 @@
                 <a:ea typeface="Calibri" pitchFamily="34" charset="-122"/>
                 <a:cs typeface="Calibri" pitchFamily="34" charset="-120"/>
               </a:rPr>
-              <a:t>DISTRIBUTION STRATEGY</a:t>
+              <a:t>THE TEAM</a:t>
             </a:r>
             <a:endParaRPr lang="en-US" sz="1100" dirty="0"/>
           </a:p>
@@ -13124,13 +13123,13 @@
             <a:r>
               <a:rPr lang="en-US" sz="2700" b="1" dirty="0">
                 <a:solidFill>
-                  <a:srgbClr val="10182B"/>
-                </a:solidFill>
-                <a:latin typeface="Calibri" pitchFamily="34" charset="0"/>
-                <a:ea typeface="Calibri" pitchFamily="34" charset="-122"/>
-                <a:cs typeface="Calibri" pitchFamily="34" charset="-120"/>
-              </a:rPr>
-              <a:t>7.5M outlets. We reach them through their POS.</a:t>
+                  <a:srgbClr val="0F172A"/>
+                </a:solidFill>
+                <a:latin typeface="Calibri" pitchFamily="34" charset="0"/>
+                <a:ea typeface="Calibri" pitchFamily="34" charset="-122"/>
+                <a:cs typeface="Calibri" pitchFamily="34" charset="-120"/>
+              </a:rPr>
+              <a:t>Serial entrepreneurs who've built, scaled, and exited.</a:t>
             </a:r>
             <a:endParaRPr lang="en-US" sz="2700" dirty="0"/>
           </a:p>
@@ -13144,16 +13143,16 @@
         </p:nvSpPr>
         <p:spPr>
           <a:xfrm>
-            <a:off x="502920" y="1417320"/>
-            <a:ext cx="4023360" cy="3337560"/>
+            <a:off x="502920" y="1463040"/>
+            <a:ext cx="2011680" cy="3063240"/>
           </a:xfrm>
           <a:prstGeom prst="roundRect">
             <a:avLst>
-              <a:gd name="adj" fmla="val 3288"/>
+              <a:gd name="adj" fmla="val 4545"/>
             </a:avLst>
           </a:prstGeom>
           <a:solidFill>
-            <a:srgbClr val="FBF6EF"/>
+            <a:srgbClr val="FFFFFF"/>
           </a:solidFill>
           <a:ln/>
           <a:effectLst>
@@ -13167,57 +13166,359 @@
       </p:sp>
       <p:sp>
         <p:nvSpPr>
-          <p:cNvPr id="5" name="Text 3"/>
-          <p:cNvSpPr/>
-          <p:nvPr/>
-        </p:nvSpPr>
-        <p:spPr>
-          <a:xfrm>
-            <a:off x="685800" y="1572768"/>
-            <a:ext cx="3657600" cy="256032"/>
-          </a:xfrm>
-          <a:prstGeom prst="rect">
-            <a:avLst/>
-          </a:prstGeom>
-          <a:noFill/>
-          <a:ln/>
-        </p:spPr>
-        <p:txBody>
-          <a:bodyPr wrap="square" rtlCol="0" anchor="ctr"/>
-          <a:lstStyle/>
-          <a:p>
-            <a:pPr indent="0" marL="0">
-              <a:buNone/>
-            </a:pPr>
-            <a:r>
-              <a:rPr lang="en-US" sz="950" b="1" spc="200" kern="0" dirty="0">
-                <a:solidFill>
-                  <a:srgbClr val="B45309"/>
-                </a:solidFill>
-                <a:latin typeface="Calibri" pitchFamily="34" charset="0"/>
-                <a:ea typeface="Calibri" pitchFamily="34" charset="-122"/>
-                <a:cs typeface="Calibri" pitchFamily="34" charset="-120"/>
-              </a:rPr>
-              <a:t>THE ADDRESSABLE UNIVERSE</a:t>
-            </a:r>
-            <a:endParaRPr lang="en-US" sz="950" dirty="0"/>
-          </a:p>
-        </p:txBody>
-      </p:sp>
-      <p:sp>
-        <p:nvSpPr>
-          <p:cNvPr id="6" name="Shape 4"/>
-          <p:cNvSpPr/>
-          <p:nvPr/>
-        </p:nvSpPr>
-        <p:spPr>
-          <a:xfrm>
-            <a:off x="685800" y="1920240"/>
-            <a:ext cx="3474720" cy="777240"/>
+          <p:cNvPr id="5" name="Shape 3"/>
+          <p:cNvSpPr/>
+          <p:nvPr/>
+        </p:nvSpPr>
+        <p:spPr>
+          <a:xfrm>
+            <a:off x="502920" y="1463040"/>
+            <a:ext cx="2011680" cy="91440"/>
+          </a:xfrm>
+          <a:prstGeom prst="rect">
+            <a:avLst/>
+          </a:prstGeom>
+          <a:solidFill>
+            <a:srgbClr val="E8520A"/>
+          </a:solidFill>
+          <a:ln/>
+        </p:spPr>
+      </p:sp>
+      <p:sp>
+        <p:nvSpPr>
+          <p:cNvPr id="6" name="Text 4"/>
+          <p:cNvSpPr/>
+          <p:nvPr/>
+        </p:nvSpPr>
+        <p:spPr>
+          <a:xfrm>
+            <a:off x="640080" y="1645920"/>
+            <a:ext cx="1737360" cy="237744"/>
+          </a:xfrm>
+          <a:prstGeom prst="rect">
+            <a:avLst/>
+          </a:prstGeom>
+          <a:noFill/>
+          <a:ln/>
+        </p:spPr>
+        <p:txBody>
+          <a:bodyPr wrap="square" rtlCol="0" anchor="ctr"/>
+          <a:lstStyle/>
+          <a:p>
+            <a:pPr indent="0" marL="0">
+              <a:buNone/>
+            </a:pPr>
+            <a:r>
+              <a:rPr lang="en-US" sz="1000" b="1" spc="100" kern="0" dirty="0">
+                <a:solidFill>
+                  <a:srgbClr val="E8520A"/>
+                </a:solidFill>
+                <a:latin typeface="Calibri" pitchFamily="34" charset="0"/>
+                <a:ea typeface="Calibri" pitchFamily="34" charset="-122"/>
+                <a:cs typeface="Calibri" pitchFamily="34" charset="-120"/>
+              </a:rPr>
+              <a:t>Goverdhan M D</a:t>
+            </a:r>
+            <a:endParaRPr lang="en-US" sz="1000" dirty="0"/>
+          </a:p>
+        </p:txBody>
+      </p:sp>
+      <p:sp>
+        <p:nvSpPr>
+          <p:cNvPr id="7" name="Text 5"/>
+          <p:cNvSpPr/>
+          <p:nvPr/>
+        </p:nvSpPr>
+        <p:spPr>
+          <a:xfrm>
+            <a:off x="640080" y="1883664"/>
+            <a:ext cx="1783080" cy="310896"/>
+          </a:xfrm>
+          <a:prstGeom prst="rect">
+            <a:avLst/>
+          </a:prstGeom>
+          <a:noFill/>
+          <a:ln/>
+        </p:spPr>
+        <p:txBody>
+          <a:bodyPr wrap="square" rtlCol="0" anchor="ctr"/>
+          <a:lstStyle/>
+          <a:p>
+            <a:pPr indent="0" marL="0">
+              <a:buNone/>
+            </a:pPr>
+            <a:r>
+              <a:rPr lang="en-US" sz="1350" b="1" dirty="0">
+                <a:solidFill>
+                  <a:srgbClr val="0F172A"/>
+                </a:solidFill>
+                <a:latin typeface="Calibri" pitchFamily="34" charset="0"/>
+                <a:ea typeface="Calibri" pitchFamily="34" charset="-122"/>
+                <a:cs typeface="Calibri" pitchFamily="34" charset="-120"/>
+              </a:rPr>
+              <a:t>Co-Founder &amp; CEO</a:t>
+            </a:r>
+            <a:endParaRPr lang="en-US" sz="1350" dirty="0"/>
+          </a:p>
+        </p:txBody>
+      </p:sp>
+      <p:sp>
+        <p:nvSpPr>
+          <p:cNvPr id="8" name="Text 6"/>
+          <p:cNvSpPr/>
+          <p:nvPr/>
+        </p:nvSpPr>
+        <p:spPr>
+          <a:xfrm>
+            <a:off x="640080" y="2286000"/>
+            <a:ext cx="1783080" cy="548640"/>
+          </a:xfrm>
+          <a:prstGeom prst="rect">
+            <a:avLst/>
+          </a:prstGeom>
+          <a:noFill/>
+          <a:ln/>
+        </p:spPr>
+        <p:txBody>
+          <a:bodyPr wrap="square" rtlCol="0" anchor="ctr"/>
+          <a:lstStyle/>
+          <a:p>
+            <a:pPr indent="0" marL="0">
+              <a:lnSpc>
+                <a:spcPts val="1050"/>
+              </a:lnSpc>
+              <a:buNone/>
+            </a:pPr>
+            <a:r>
+              <a:rPr lang="en-US" sz="860" b="1" dirty="0">
+                <a:solidFill>
+                  <a:srgbClr val="E8520A"/>
+                </a:solidFill>
+                <a:latin typeface="Calibri" pitchFamily="34" charset="0"/>
+                <a:ea typeface="Calibri" pitchFamily="34" charset="-122"/>
+                <a:cs typeface="Calibri" pitchFamily="34" charset="-120"/>
+              </a:rPr>
+              <a:t>·  </a:t>
+            </a:r>
+            <a:pPr indent="0" marL="0">
+              <a:lnSpc>
+                <a:spcPts val="1050"/>
+              </a:lnSpc>
+              <a:buNone/>
+            </a:pPr>
+            <a:r>
+              <a:rPr lang="en-US" sz="860" dirty="0">
+                <a:solidFill>
+                  <a:srgbClr val="475569"/>
+                </a:solidFill>
+                <a:latin typeface="Calibri" pitchFamily="34" charset="0"/>
+                <a:ea typeface="Calibri" pitchFamily="34" charset="-122"/>
+                <a:cs typeface="Calibri" pitchFamily="34" charset="-120"/>
+              </a:rPr>
+              <a:t>Co-founded Tipplr (acquired by GoKhana, Jan 2026)</a:t>
+            </a:r>
+            <a:endParaRPr lang="en-US" sz="860" dirty="0"/>
+          </a:p>
+        </p:txBody>
+      </p:sp>
+      <p:sp>
+        <p:nvSpPr>
+          <p:cNvPr id="9" name="Text 7"/>
+          <p:cNvSpPr/>
+          <p:nvPr/>
+        </p:nvSpPr>
+        <p:spPr>
+          <a:xfrm>
+            <a:off x="640080" y="2852928"/>
+            <a:ext cx="1783080" cy="548640"/>
+          </a:xfrm>
+          <a:prstGeom prst="rect">
+            <a:avLst/>
+          </a:prstGeom>
+          <a:noFill/>
+          <a:ln/>
+        </p:spPr>
+        <p:txBody>
+          <a:bodyPr wrap="square" rtlCol="0" anchor="ctr"/>
+          <a:lstStyle/>
+          <a:p>
+            <a:pPr indent="0" marL="0">
+              <a:lnSpc>
+                <a:spcPts val="1050"/>
+              </a:lnSpc>
+              <a:buNone/>
+            </a:pPr>
+            <a:r>
+              <a:rPr lang="en-US" sz="860" b="1" dirty="0">
+                <a:solidFill>
+                  <a:srgbClr val="E8520A"/>
+                </a:solidFill>
+                <a:latin typeface="Calibri" pitchFamily="34" charset="0"/>
+                <a:ea typeface="Calibri" pitchFamily="34" charset="-122"/>
+                <a:cs typeface="Calibri" pitchFamily="34" charset="-120"/>
+              </a:rPr>
+              <a:t>·  </a:t>
+            </a:r>
+            <a:pPr indent="0" marL="0">
+              <a:lnSpc>
+                <a:spcPts val="1050"/>
+              </a:lnSpc>
+              <a:buNone/>
+            </a:pPr>
+            <a:r>
+              <a:rPr lang="en-US" sz="860" dirty="0">
+                <a:solidFill>
+                  <a:srgbClr val="475569"/>
+                </a:solidFill>
+                <a:latin typeface="Calibri" pitchFamily="34" charset="0"/>
+                <a:ea typeface="Calibri" pitchFamily="34" charset="-122"/>
+                <a:cs typeface="Calibri" pitchFamily="34" charset="-120"/>
+              </a:rPr>
+              <a:t>20+ years building &amp; exiting marketplaces</a:t>
+            </a:r>
+            <a:endParaRPr lang="en-US" sz="860" dirty="0"/>
+          </a:p>
+        </p:txBody>
+      </p:sp>
+      <p:sp>
+        <p:nvSpPr>
+          <p:cNvPr id="10" name="Text 8"/>
+          <p:cNvSpPr/>
+          <p:nvPr/>
+        </p:nvSpPr>
+        <p:spPr>
+          <a:xfrm>
+            <a:off x="640080" y="3419856"/>
+            <a:ext cx="1783080" cy="548640"/>
+          </a:xfrm>
+          <a:prstGeom prst="rect">
+            <a:avLst/>
+          </a:prstGeom>
+          <a:noFill/>
+          <a:ln/>
+        </p:spPr>
+        <p:txBody>
+          <a:bodyPr wrap="square" rtlCol="0" anchor="ctr"/>
+          <a:lstStyle/>
+          <a:p>
+            <a:pPr indent="0" marL="0">
+              <a:lnSpc>
+                <a:spcPts val="1050"/>
+              </a:lnSpc>
+              <a:buNone/>
+            </a:pPr>
+            <a:r>
+              <a:rPr lang="en-US" sz="860" b="1" dirty="0">
+                <a:solidFill>
+                  <a:srgbClr val="E8520A"/>
+                </a:solidFill>
+                <a:latin typeface="Calibri" pitchFamily="34" charset="0"/>
+                <a:ea typeface="Calibri" pitchFamily="34" charset="-122"/>
+                <a:cs typeface="Calibri" pitchFamily="34" charset="-120"/>
+              </a:rPr>
+              <a:t>·  </a:t>
+            </a:r>
+            <a:pPr indent="0" marL="0">
+              <a:lnSpc>
+                <a:spcPts val="1050"/>
+              </a:lnSpc>
+              <a:buNone/>
+            </a:pPr>
+            <a:r>
+              <a:rPr lang="en-US" sz="860" dirty="0">
+                <a:solidFill>
+                  <a:srgbClr val="475569"/>
+                </a:solidFill>
+                <a:latin typeface="Calibri" pitchFamily="34" charset="0"/>
+                <a:ea typeface="Calibri" pitchFamily="34" charset="-122"/>
+                <a:cs typeface="Calibri" pitchFamily="34" charset="-120"/>
+              </a:rPr>
+              <a:t>Leads product, technology &amp; fundraising</a:t>
+            </a:r>
+            <a:endParaRPr lang="en-US" sz="860" dirty="0"/>
+          </a:p>
+        </p:txBody>
+      </p:sp>
+      <p:sp>
+        <p:nvSpPr>
+          <p:cNvPr id="11" name="Shape 9"/>
+          <p:cNvSpPr/>
+          <p:nvPr/>
+        </p:nvSpPr>
+        <p:spPr>
+          <a:xfrm>
+            <a:off x="640080" y="4096512"/>
+            <a:ext cx="1737360" cy="310896"/>
           </a:xfrm>
           <a:prstGeom prst="roundRect">
             <a:avLst>
-              <a:gd name="adj" fmla="val 9412"/>
+              <a:gd name="adj" fmla="val 14706"/>
+            </a:avLst>
+          </a:prstGeom>
+          <a:solidFill>
+            <a:srgbClr val="F8FAFC"/>
+          </a:solidFill>
+          <a:ln w="9525">
+            <a:solidFill>
+              <a:srgbClr val="E8520A"/>
+            </a:solidFill>
+            <a:prstDash val="solid"/>
+          </a:ln>
+        </p:spPr>
+      </p:sp>
+      <p:sp>
+        <p:nvSpPr>
+          <p:cNvPr id="12" name="Text 10"/>
+          <p:cNvSpPr/>
+          <p:nvPr/>
+        </p:nvSpPr>
+        <p:spPr>
+          <a:xfrm>
+            <a:off x="685800" y="4142232"/>
+            <a:ext cx="1664208" cy="237744"/>
+          </a:xfrm>
+          <a:prstGeom prst="rect">
+            <a:avLst/>
+          </a:prstGeom>
+          <a:noFill/>
+          <a:ln/>
+        </p:spPr>
+        <p:txBody>
+          <a:bodyPr wrap="square" rtlCol="0" anchor="ctr"/>
+          <a:lstStyle/>
+          <a:p>
+            <a:pPr algn="ctr" indent="0" marL="0">
+              <a:buNone/>
+            </a:pPr>
+            <a:r>
+              <a:rPr lang="en-US" sz="820" b="1" dirty="0">
+                <a:solidFill>
+                  <a:srgbClr val="E8520A"/>
+                </a:solidFill>
+                <a:latin typeface="Calibri" pitchFamily="34" charset="0"/>
+                <a:ea typeface="Calibri" pitchFamily="34" charset="-122"/>
+                <a:cs typeface="Calibri" pitchFamily="34" charset="-120"/>
+              </a:rPr>
+              <a:t>Serial entrepreneur</a:t>
+            </a:r>
+            <a:endParaRPr lang="en-US" sz="820" dirty="0"/>
+          </a:p>
+        </p:txBody>
+      </p:sp>
+      <p:sp>
+        <p:nvSpPr>
+          <p:cNvPr id="13" name="Shape 11"/>
+          <p:cNvSpPr/>
+          <p:nvPr/>
+        </p:nvSpPr>
+        <p:spPr>
+          <a:xfrm>
+            <a:off x="2660904" y="1463040"/>
+            <a:ext cx="2011680" cy="3063240"/>
+          </a:xfrm>
+          <a:prstGeom prst="roundRect">
+            <a:avLst>
+              <a:gd name="adj" fmla="val 4545"/>
             </a:avLst>
           </a:prstGeom>
           <a:solidFill>
@@ -13235,135 +13536,359 @@
       </p:sp>
       <p:sp>
         <p:nvSpPr>
-          <p:cNvPr id="7" name="Text 5"/>
-          <p:cNvSpPr/>
-          <p:nvPr/>
-        </p:nvSpPr>
-        <p:spPr>
-          <a:xfrm>
-            <a:off x="822960" y="1975104"/>
-            <a:ext cx="1371600" cy="384048"/>
-          </a:xfrm>
-          <a:prstGeom prst="rect">
-            <a:avLst/>
-          </a:prstGeom>
-          <a:noFill/>
-          <a:ln/>
-        </p:spPr>
-        <p:txBody>
-          <a:bodyPr wrap="square" rtlCol="0" anchor="ctr"/>
-          <a:lstStyle/>
-          <a:p>
-            <a:pPr indent="0" marL="0">
-              <a:buNone/>
-            </a:pPr>
-            <a:r>
-              <a:rPr lang="en-US" sz="2400" b="1" dirty="0">
-                <a:solidFill>
-                  <a:srgbClr val="10182B"/>
-                </a:solidFill>
-                <a:latin typeface="Calibri" pitchFamily="34" charset="0"/>
-                <a:ea typeface="Calibri" pitchFamily="34" charset="-122"/>
-                <a:cs typeface="Calibri" pitchFamily="34" charset="-120"/>
-              </a:rPr>
-              <a:t>7.5M+</a:t>
-            </a:r>
-            <a:endParaRPr lang="en-US" sz="2400" dirty="0"/>
-          </a:p>
-        </p:txBody>
-      </p:sp>
-      <p:sp>
-        <p:nvSpPr>
-          <p:cNvPr id="8" name="Text 6"/>
-          <p:cNvSpPr/>
-          <p:nvPr/>
-        </p:nvSpPr>
-        <p:spPr>
-          <a:xfrm>
-            <a:off x="2103120" y="1975104"/>
-            <a:ext cx="1965960" cy="274320"/>
-          </a:xfrm>
-          <a:prstGeom prst="rect">
-            <a:avLst/>
-          </a:prstGeom>
-          <a:noFill/>
-          <a:ln/>
-        </p:spPr>
-        <p:txBody>
-          <a:bodyPr wrap="square" rtlCol="0" anchor="ctr"/>
-          <a:lstStyle/>
-          <a:p>
-            <a:pPr indent="0" marL="0">
-              <a:buNone/>
-            </a:pPr>
-            <a:r>
-              <a:rPr lang="en-US" sz="950" b="1" dirty="0">
-                <a:solidFill>
-                  <a:srgbClr val="10182B"/>
-                </a:solidFill>
-                <a:latin typeface="Calibri" pitchFamily="34" charset="0"/>
-                <a:ea typeface="Calibri" pitchFamily="34" charset="-122"/>
-                <a:cs typeface="Calibri" pitchFamily="34" charset="-120"/>
-              </a:rPr>
-              <a:t>Total HORECA outlets in India</a:t>
-            </a:r>
-            <a:endParaRPr lang="en-US" sz="950" dirty="0"/>
-          </a:p>
-        </p:txBody>
-      </p:sp>
-      <p:sp>
-        <p:nvSpPr>
-          <p:cNvPr id="9" name="Text 7"/>
-          <p:cNvSpPr/>
-          <p:nvPr/>
-        </p:nvSpPr>
-        <p:spPr>
-          <a:xfrm>
-            <a:off x="2103120" y="2267712"/>
-            <a:ext cx="1965960" cy="274320"/>
-          </a:xfrm>
-          <a:prstGeom prst="rect">
-            <a:avLst/>
-          </a:prstGeom>
-          <a:noFill/>
-          <a:ln/>
-        </p:spPr>
-        <p:txBody>
-          <a:bodyPr wrap="square" rtlCol="0" anchor="ctr"/>
-          <a:lstStyle/>
-          <a:p>
-            <a:pPr indent="0" marL="0">
-              <a:buNone/>
-            </a:pPr>
-            <a:r>
-              <a:rPr lang="en-US" sz="800" dirty="0">
-                <a:solidFill>
-                  <a:srgbClr val="8E99B0"/>
-                </a:solidFill>
-                <a:latin typeface="Calibri" pitchFamily="34" charset="0"/>
-                <a:ea typeface="Calibri" pitchFamily="34" charset="-122"/>
-                <a:cs typeface="Calibri" pitchFamily="34" charset="-120"/>
-              </a:rPr>
-              <a:t>NRAI / industry est.</a:t>
-            </a:r>
-            <a:endParaRPr lang="en-US" sz="800" dirty="0"/>
-          </a:p>
-        </p:txBody>
-      </p:sp>
-      <p:sp>
-        <p:nvSpPr>
-          <p:cNvPr id="10" name="Shape 8"/>
-          <p:cNvSpPr/>
-          <p:nvPr/>
-        </p:nvSpPr>
-        <p:spPr>
-          <a:xfrm>
-            <a:off x="685800" y="2862072"/>
-            <a:ext cx="3474720" cy="777240"/>
+          <p:cNvPr id="14" name="Shape 12"/>
+          <p:cNvSpPr/>
+          <p:nvPr/>
+        </p:nvSpPr>
+        <p:spPr>
+          <a:xfrm>
+            <a:off x="2660904" y="1463040"/>
+            <a:ext cx="2011680" cy="91440"/>
+          </a:xfrm>
+          <a:prstGeom prst="rect">
+            <a:avLst/>
+          </a:prstGeom>
+          <a:solidFill>
+            <a:srgbClr val="B45309"/>
+          </a:solidFill>
+          <a:ln/>
+        </p:spPr>
+      </p:sp>
+      <p:sp>
+        <p:nvSpPr>
+          <p:cNvPr id="15" name="Text 13"/>
+          <p:cNvSpPr/>
+          <p:nvPr/>
+        </p:nvSpPr>
+        <p:spPr>
+          <a:xfrm>
+            <a:off x="2798064" y="1645920"/>
+            <a:ext cx="1737360" cy="237744"/>
+          </a:xfrm>
+          <a:prstGeom prst="rect">
+            <a:avLst/>
+          </a:prstGeom>
+          <a:noFill/>
+          <a:ln/>
+        </p:spPr>
+        <p:txBody>
+          <a:bodyPr wrap="square" rtlCol="0" anchor="ctr"/>
+          <a:lstStyle/>
+          <a:p>
+            <a:pPr indent="0" marL="0">
+              <a:buNone/>
+            </a:pPr>
+            <a:r>
+              <a:rPr lang="en-US" sz="1000" b="1" spc="100" kern="0" dirty="0">
+                <a:solidFill>
+                  <a:srgbClr val="B45309"/>
+                </a:solidFill>
+                <a:latin typeface="Calibri" pitchFamily="34" charset="0"/>
+                <a:ea typeface="Calibri" pitchFamily="34" charset="-122"/>
+                <a:cs typeface="Calibri" pitchFamily="34" charset="-120"/>
+              </a:rPr>
+              <a:t>Aparna</a:t>
+            </a:r>
+            <a:endParaRPr lang="en-US" sz="1000" dirty="0"/>
+          </a:p>
+        </p:txBody>
+      </p:sp>
+      <p:sp>
+        <p:nvSpPr>
+          <p:cNvPr id="16" name="Text 14"/>
+          <p:cNvSpPr/>
+          <p:nvPr/>
+        </p:nvSpPr>
+        <p:spPr>
+          <a:xfrm>
+            <a:off x="2798064" y="1883664"/>
+            <a:ext cx="1783080" cy="310896"/>
+          </a:xfrm>
+          <a:prstGeom prst="rect">
+            <a:avLst/>
+          </a:prstGeom>
+          <a:noFill/>
+          <a:ln/>
+        </p:spPr>
+        <p:txBody>
+          <a:bodyPr wrap="square" rtlCol="0" anchor="ctr"/>
+          <a:lstStyle/>
+          <a:p>
+            <a:pPr indent="0" marL="0">
+              <a:buNone/>
+            </a:pPr>
+            <a:r>
+              <a:rPr lang="en-US" sz="1350" b="1" dirty="0">
+                <a:solidFill>
+                  <a:srgbClr val="0F172A"/>
+                </a:solidFill>
+                <a:latin typeface="Calibri" pitchFamily="34" charset="0"/>
+                <a:ea typeface="Calibri" pitchFamily="34" charset="-122"/>
+                <a:cs typeface="Calibri" pitchFamily="34" charset="-120"/>
+              </a:rPr>
+              <a:t>Co-Founder</a:t>
+            </a:r>
+            <a:endParaRPr lang="en-US" sz="1350" dirty="0"/>
+          </a:p>
+        </p:txBody>
+      </p:sp>
+      <p:sp>
+        <p:nvSpPr>
+          <p:cNvPr id="17" name="Text 15"/>
+          <p:cNvSpPr/>
+          <p:nvPr/>
+        </p:nvSpPr>
+        <p:spPr>
+          <a:xfrm>
+            <a:off x="2798064" y="2286000"/>
+            <a:ext cx="1783080" cy="548640"/>
+          </a:xfrm>
+          <a:prstGeom prst="rect">
+            <a:avLst/>
+          </a:prstGeom>
+          <a:noFill/>
+          <a:ln/>
+        </p:spPr>
+        <p:txBody>
+          <a:bodyPr wrap="square" rtlCol="0" anchor="ctr"/>
+          <a:lstStyle/>
+          <a:p>
+            <a:pPr indent="0" marL="0">
+              <a:lnSpc>
+                <a:spcPts val="1050"/>
+              </a:lnSpc>
+              <a:buNone/>
+            </a:pPr>
+            <a:r>
+              <a:rPr lang="en-US" sz="860" b="1" dirty="0">
+                <a:solidFill>
+                  <a:srgbClr val="B45309"/>
+                </a:solidFill>
+                <a:latin typeface="Calibri" pitchFamily="34" charset="0"/>
+                <a:ea typeface="Calibri" pitchFamily="34" charset="-122"/>
+                <a:cs typeface="Calibri" pitchFamily="34" charset="-120"/>
+              </a:rPr>
+              <a:t>·  </a:t>
+            </a:r>
+            <a:pPr indent="0" marL="0">
+              <a:lnSpc>
+                <a:spcPts val="1050"/>
+              </a:lnSpc>
+              <a:buNone/>
+            </a:pPr>
+            <a:r>
+              <a:rPr lang="en-US" sz="860" dirty="0">
+                <a:solidFill>
+                  <a:srgbClr val="475569"/>
+                </a:solidFill>
+                <a:latin typeface="Calibri" pitchFamily="34" charset="0"/>
+                <a:ea typeface="Calibri" pitchFamily="34" charset="-122"/>
+                <a:cs typeface="Calibri" pitchFamily="34" charset="-120"/>
+              </a:rPr>
+              <a:t>Founder Director, India's first credit-advocacy company</a:t>
+            </a:r>
+            <a:endParaRPr lang="en-US" sz="860" dirty="0"/>
+          </a:p>
+        </p:txBody>
+      </p:sp>
+      <p:sp>
+        <p:nvSpPr>
+          <p:cNvPr id="18" name="Text 16"/>
+          <p:cNvSpPr/>
+          <p:nvPr/>
+        </p:nvSpPr>
+        <p:spPr>
+          <a:xfrm>
+            <a:off x="2798064" y="2852928"/>
+            <a:ext cx="1783080" cy="548640"/>
+          </a:xfrm>
+          <a:prstGeom prst="rect">
+            <a:avLst/>
+          </a:prstGeom>
+          <a:noFill/>
+          <a:ln/>
+        </p:spPr>
+        <p:txBody>
+          <a:bodyPr wrap="square" rtlCol="0" anchor="ctr"/>
+          <a:lstStyle/>
+          <a:p>
+            <a:pPr indent="0" marL="0">
+              <a:lnSpc>
+                <a:spcPts val="1050"/>
+              </a:lnSpc>
+              <a:buNone/>
+            </a:pPr>
+            <a:r>
+              <a:rPr lang="en-US" sz="860" b="1" dirty="0">
+                <a:solidFill>
+                  <a:srgbClr val="B45309"/>
+                </a:solidFill>
+                <a:latin typeface="Calibri" pitchFamily="34" charset="0"/>
+                <a:ea typeface="Calibri" pitchFamily="34" charset="-122"/>
+                <a:cs typeface="Calibri" pitchFamily="34" charset="-120"/>
+              </a:rPr>
+              <a:t>·  </a:t>
+            </a:r>
+            <a:pPr indent="0" marL="0">
+              <a:lnSpc>
+                <a:spcPts val="1050"/>
+              </a:lnSpc>
+              <a:buNone/>
+            </a:pPr>
+            <a:r>
+              <a:rPr lang="en-US" sz="860" dirty="0">
+                <a:solidFill>
+                  <a:srgbClr val="475569"/>
+                </a:solidFill>
+                <a:latin typeface="Calibri" pitchFamily="34" charset="0"/>
+                <a:ea typeface="Calibri" pitchFamily="34" charset="-122"/>
+                <a:cs typeface="Calibri" pitchFamily="34" charset="-120"/>
+              </a:rPr>
+              <a:t>Works with regulators &amp; 60+ lenders</a:t>
+            </a:r>
+            <a:endParaRPr lang="en-US" sz="860" dirty="0"/>
+          </a:p>
+        </p:txBody>
+      </p:sp>
+      <p:sp>
+        <p:nvSpPr>
+          <p:cNvPr id="19" name="Text 17"/>
+          <p:cNvSpPr/>
+          <p:nvPr/>
+        </p:nvSpPr>
+        <p:spPr>
+          <a:xfrm>
+            <a:off x="2798064" y="3419856"/>
+            <a:ext cx="1783080" cy="548640"/>
+          </a:xfrm>
+          <a:prstGeom prst="rect">
+            <a:avLst/>
+          </a:prstGeom>
+          <a:noFill/>
+          <a:ln/>
+        </p:spPr>
+        <p:txBody>
+          <a:bodyPr wrap="square" rtlCol="0" anchor="ctr"/>
+          <a:lstStyle/>
+          <a:p>
+            <a:pPr indent="0" marL="0">
+              <a:lnSpc>
+                <a:spcPts val="1050"/>
+              </a:lnSpc>
+              <a:buNone/>
+            </a:pPr>
+            <a:r>
+              <a:rPr lang="en-US" sz="860" b="1" dirty="0">
+                <a:solidFill>
+                  <a:srgbClr val="B45309"/>
+                </a:solidFill>
+                <a:latin typeface="Calibri" pitchFamily="34" charset="0"/>
+                <a:ea typeface="Calibri" pitchFamily="34" charset="-122"/>
+                <a:cs typeface="Calibri" pitchFamily="34" charset="-120"/>
+              </a:rPr>
+              <a:t>·  </a:t>
+            </a:r>
+            <a:pPr indent="0" marL="0">
+              <a:lnSpc>
+                <a:spcPts val="1050"/>
+              </a:lnSpc>
+              <a:buNone/>
+            </a:pPr>
+            <a:r>
+              <a:rPr lang="en-US" sz="860" dirty="0">
+                <a:solidFill>
+                  <a:srgbClr val="475569"/>
+                </a:solidFill>
+                <a:latin typeface="Calibri" pitchFamily="34" charset="0"/>
+                <a:ea typeface="Calibri" pitchFamily="34" charset="-122"/>
+                <a:cs typeface="Calibri" pitchFamily="34" charset="-120"/>
+              </a:rPr>
+              <a:t>Author, Mint/Femina/Outlook columns, TV credit expert</a:t>
+            </a:r>
+            <a:endParaRPr lang="en-US" sz="860" dirty="0"/>
+          </a:p>
+        </p:txBody>
+      </p:sp>
+      <p:sp>
+        <p:nvSpPr>
+          <p:cNvPr id="20" name="Shape 18"/>
+          <p:cNvSpPr/>
+          <p:nvPr/>
+        </p:nvSpPr>
+        <p:spPr>
+          <a:xfrm>
+            <a:off x="2798064" y="4096512"/>
+            <a:ext cx="1737360" cy="310896"/>
           </a:xfrm>
           <a:prstGeom prst="roundRect">
             <a:avLst>
-              <a:gd name="adj" fmla="val 9412"/>
+              <a:gd name="adj" fmla="val 14706"/>
+            </a:avLst>
+          </a:prstGeom>
+          <a:solidFill>
+            <a:srgbClr val="F8FAFC"/>
+          </a:solidFill>
+          <a:ln w="9525">
+            <a:solidFill>
+              <a:srgbClr val="B45309"/>
+            </a:solidFill>
+            <a:prstDash val="solid"/>
+          </a:ln>
+        </p:spPr>
+      </p:sp>
+      <p:sp>
+        <p:nvSpPr>
+          <p:cNvPr id="21" name="Text 19"/>
+          <p:cNvSpPr/>
+          <p:nvPr/>
+        </p:nvSpPr>
+        <p:spPr>
+          <a:xfrm>
+            <a:off x="2843784" y="4142232"/>
+            <a:ext cx="1664208" cy="237744"/>
+          </a:xfrm>
+          <a:prstGeom prst="rect">
+            <a:avLst/>
+          </a:prstGeom>
+          <a:noFill/>
+          <a:ln/>
+        </p:spPr>
+        <p:txBody>
+          <a:bodyPr wrap="square" rtlCol="0" anchor="ctr"/>
+          <a:lstStyle/>
+          <a:p>
+            <a:pPr algn="ctr" indent="0" marL="0">
+              <a:buNone/>
+            </a:pPr>
+            <a:r>
+              <a:rPr lang="en-US" sz="820" b="1" dirty="0">
+                <a:solidFill>
+                  <a:srgbClr val="B45309"/>
+                </a:solidFill>
+                <a:latin typeface="Calibri" pitchFamily="34" charset="0"/>
+                <a:ea typeface="Calibri" pitchFamily="34" charset="-122"/>
+                <a:cs typeface="Calibri" pitchFamily="34" charset="-120"/>
+              </a:rPr>
+              <a:t>Leads credit policy &amp; regulators</a:t>
+            </a:r>
+            <a:endParaRPr lang="en-US" sz="820" dirty="0"/>
+          </a:p>
+        </p:txBody>
+      </p:sp>
+      <p:sp>
+        <p:nvSpPr>
+          <p:cNvPr id="22" name="Shape 20"/>
+          <p:cNvSpPr/>
+          <p:nvPr/>
+        </p:nvSpPr>
+        <p:spPr>
+          <a:xfrm>
+            <a:off x="4818888" y="1463040"/>
+            <a:ext cx="2011680" cy="3063240"/>
+          </a:xfrm>
+          <a:prstGeom prst="roundRect">
+            <a:avLst>
+              <a:gd name="adj" fmla="val 4545"/>
             </a:avLst>
           </a:prstGeom>
           <a:solidFill>
@@ -13381,135 +13906,359 @@
       </p:sp>
       <p:sp>
         <p:nvSpPr>
-          <p:cNvPr id="11" name="Text 9"/>
-          <p:cNvSpPr/>
-          <p:nvPr/>
-        </p:nvSpPr>
-        <p:spPr>
-          <a:xfrm>
-            <a:off x="822960" y="2916936"/>
-            <a:ext cx="1371600" cy="384048"/>
-          </a:xfrm>
-          <a:prstGeom prst="rect">
-            <a:avLst/>
-          </a:prstGeom>
-          <a:noFill/>
-          <a:ln/>
-        </p:spPr>
-        <p:txBody>
-          <a:bodyPr wrap="square" rtlCol="0" anchor="ctr"/>
-          <a:lstStyle/>
-          <a:p>
-            <a:pPr indent="0" marL="0">
-              <a:buNone/>
-            </a:pPr>
-            <a:r>
-              <a:rPr lang="en-US" sz="2400" b="1" dirty="0">
-                <a:solidFill>
-                  <a:srgbClr val="0E756C"/>
-                </a:solidFill>
-                <a:latin typeface="Calibri" pitchFamily="34" charset="0"/>
-                <a:ea typeface="Calibri" pitchFamily="34" charset="-122"/>
-                <a:cs typeface="Calibri" pitchFamily="34" charset="-120"/>
-              </a:rPr>
-              <a:t>1.5M+</a:t>
-            </a:r>
-            <a:endParaRPr lang="en-US" sz="2400" dirty="0"/>
-          </a:p>
-        </p:txBody>
-      </p:sp>
-      <p:sp>
-        <p:nvSpPr>
-          <p:cNvPr id="12" name="Text 10"/>
-          <p:cNvSpPr/>
-          <p:nvPr/>
-        </p:nvSpPr>
-        <p:spPr>
-          <a:xfrm>
-            <a:off x="2103120" y="2916936"/>
-            <a:ext cx="1965960" cy="274320"/>
-          </a:xfrm>
-          <a:prstGeom prst="rect">
-            <a:avLst/>
-          </a:prstGeom>
-          <a:noFill/>
-          <a:ln/>
-        </p:spPr>
-        <p:txBody>
-          <a:bodyPr wrap="square" rtlCol="0" anchor="ctr"/>
-          <a:lstStyle/>
-          <a:p>
-            <a:pPr indent="0" marL="0">
-              <a:buNone/>
-            </a:pPr>
-            <a:r>
-              <a:rPr lang="en-US" sz="950" b="1" dirty="0">
-                <a:solidFill>
-                  <a:srgbClr val="10182B"/>
-                </a:solidFill>
-                <a:latin typeface="Calibri" pitchFamily="34" charset="0"/>
-                <a:ea typeface="Calibri" pitchFamily="34" charset="-122"/>
-                <a:cs typeface="Calibri" pitchFamily="34" charset="-120"/>
-              </a:rPr>
-              <a:t>Organised, physical, digital-payment enabled</a:t>
-            </a:r>
-            <a:endParaRPr lang="en-US" sz="950" dirty="0"/>
-          </a:p>
-        </p:txBody>
-      </p:sp>
-      <p:sp>
-        <p:nvSpPr>
-          <p:cNvPr id="13" name="Text 11"/>
-          <p:cNvSpPr/>
-          <p:nvPr/>
-        </p:nvSpPr>
-        <p:spPr>
-          <a:xfrm>
-            <a:off x="2103120" y="3209544"/>
-            <a:ext cx="1965960" cy="274320"/>
-          </a:xfrm>
-          <a:prstGeom prst="rect">
-            <a:avLst/>
-          </a:prstGeom>
-          <a:noFill/>
-          <a:ln/>
-        </p:spPr>
-        <p:txBody>
-          <a:bodyPr wrap="square" rtlCol="0" anchor="ctr"/>
-          <a:lstStyle/>
-          <a:p>
-            <a:pPr indent="0" marL="0">
-              <a:buNone/>
-            </a:pPr>
-            <a:r>
-              <a:rPr lang="en-US" sz="800" dirty="0">
-                <a:solidFill>
-                  <a:srgbClr val="8E99B0"/>
-                </a:solidFill>
-                <a:latin typeface="Calibri" pitchFamily="34" charset="0"/>
-                <a:ea typeface="Calibri" pitchFamily="34" charset="-122"/>
-                <a:cs typeface="Calibri" pitchFamily="34" charset="-120"/>
-              </a:rPr>
-              <a:t>Our underwritable universe (top 30 cities)</a:t>
-            </a:r>
-            <a:endParaRPr lang="en-US" sz="800" dirty="0"/>
-          </a:p>
-        </p:txBody>
-      </p:sp>
-      <p:sp>
-        <p:nvSpPr>
-          <p:cNvPr id="14" name="Shape 12"/>
-          <p:cNvSpPr/>
-          <p:nvPr/>
-        </p:nvSpPr>
-        <p:spPr>
-          <a:xfrm>
-            <a:off x="685800" y="3803904"/>
-            <a:ext cx="3474720" cy="777240"/>
+          <p:cNvPr id="23" name="Shape 21"/>
+          <p:cNvSpPr/>
+          <p:nvPr/>
+        </p:nvSpPr>
+        <p:spPr>
+          <a:xfrm>
+            <a:off x="4818888" y="1463040"/>
+            <a:ext cx="2011680" cy="91440"/>
+          </a:xfrm>
+          <a:prstGeom prst="rect">
+            <a:avLst/>
+          </a:prstGeom>
+          <a:solidFill>
+            <a:srgbClr val="0F766E"/>
+          </a:solidFill>
+          <a:ln/>
+        </p:spPr>
+      </p:sp>
+      <p:sp>
+        <p:nvSpPr>
+          <p:cNvPr id="24" name="Text 22"/>
+          <p:cNvSpPr/>
+          <p:nvPr/>
+        </p:nvSpPr>
+        <p:spPr>
+          <a:xfrm>
+            <a:off x="4956048" y="1645920"/>
+            <a:ext cx="1737360" cy="237744"/>
+          </a:xfrm>
+          <a:prstGeom prst="rect">
+            <a:avLst/>
+          </a:prstGeom>
+          <a:noFill/>
+          <a:ln/>
+        </p:spPr>
+        <p:txBody>
+          <a:bodyPr wrap="square" rtlCol="0" anchor="ctr"/>
+          <a:lstStyle/>
+          <a:p>
+            <a:pPr indent="0" marL="0">
+              <a:buNone/>
+            </a:pPr>
+            <a:r>
+              <a:rPr lang="en-US" sz="1000" b="1" spc="100" kern="0" dirty="0">
+                <a:solidFill>
+                  <a:srgbClr val="0F766E"/>
+                </a:solidFill>
+                <a:latin typeface="Calibri" pitchFamily="34" charset="0"/>
+                <a:ea typeface="Calibri" pitchFamily="34" charset="-122"/>
+                <a:cs typeface="Calibri" pitchFamily="34" charset="-120"/>
+              </a:rPr>
+              <a:t>Srinivas Jayaram</a:t>
+            </a:r>
+            <a:endParaRPr lang="en-US" sz="1000" dirty="0"/>
+          </a:p>
+        </p:txBody>
+      </p:sp>
+      <p:sp>
+        <p:nvSpPr>
+          <p:cNvPr id="25" name="Text 23"/>
+          <p:cNvSpPr/>
+          <p:nvPr/>
+        </p:nvSpPr>
+        <p:spPr>
+          <a:xfrm>
+            <a:off x="4956048" y="1883664"/>
+            <a:ext cx="1783080" cy="310896"/>
+          </a:xfrm>
+          <a:prstGeom prst="rect">
+            <a:avLst/>
+          </a:prstGeom>
+          <a:noFill/>
+          <a:ln/>
+        </p:spPr>
+        <p:txBody>
+          <a:bodyPr wrap="square" rtlCol="0" anchor="ctr"/>
+          <a:lstStyle/>
+          <a:p>
+            <a:pPr indent="0" marL="0">
+              <a:buNone/>
+            </a:pPr>
+            <a:r>
+              <a:rPr lang="en-US" sz="1350" b="1" dirty="0">
+                <a:solidFill>
+                  <a:srgbClr val="0F172A"/>
+                </a:solidFill>
+                <a:latin typeface="Calibri" pitchFamily="34" charset="0"/>
+                <a:ea typeface="Calibri" pitchFamily="34" charset="-122"/>
+                <a:cs typeface="Calibri" pitchFamily="34" charset="-120"/>
+              </a:rPr>
+              <a:t>Co-Founder</a:t>
+            </a:r>
+            <a:endParaRPr lang="en-US" sz="1350" dirty="0"/>
+          </a:p>
+        </p:txBody>
+      </p:sp>
+      <p:sp>
+        <p:nvSpPr>
+          <p:cNvPr id="26" name="Text 24"/>
+          <p:cNvSpPr/>
+          <p:nvPr/>
+        </p:nvSpPr>
+        <p:spPr>
+          <a:xfrm>
+            <a:off x="4956048" y="2286000"/>
+            <a:ext cx="1783080" cy="548640"/>
+          </a:xfrm>
+          <a:prstGeom prst="rect">
+            <a:avLst/>
+          </a:prstGeom>
+          <a:noFill/>
+          <a:ln/>
+        </p:spPr>
+        <p:txBody>
+          <a:bodyPr wrap="square" rtlCol="0" anchor="ctr"/>
+          <a:lstStyle/>
+          <a:p>
+            <a:pPr indent="0" marL="0">
+              <a:lnSpc>
+                <a:spcPts val="1050"/>
+              </a:lnSpc>
+              <a:buNone/>
+            </a:pPr>
+            <a:r>
+              <a:rPr lang="en-US" sz="860" b="1" dirty="0">
+                <a:solidFill>
+                  <a:srgbClr val="0F766E"/>
+                </a:solidFill>
+                <a:latin typeface="Calibri" pitchFamily="34" charset="0"/>
+                <a:ea typeface="Calibri" pitchFamily="34" charset="-122"/>
+                <a:cs typeface="Calibri" pitchFamily="34" charset="-120"/>
+              </a:rPr>
+              <a:t>·  </a:t>
+            </a:r>
+            <a:pPr indent="0" marL="0">
+              <a:lnSpc>
+                <a:spcPts val="1050"/>
+              </a:lnSpc>
+              <a:buNone/>
+            </a:pPr>
+            <a:r>
+              <a:rPr lang="en-US" sz="860" dirty="0">
+                <a:solidFill>
+                  <a:srgbClr val="475569"/>
+                </a:solidFill>
+                <a:latin typeface="Calibri" pitchFamily="34" charset="0"/>
+                <a:ea typeface="Calibri" pitchFamily="34" charset="-122"/>
+                <a:cs typeface="Calibri" pitchFamily="34" charset="-120"/>
+              </a:rPr>
+              <a:t>Co-founded Tipplr; 20+ yrs enterprise IT, data &amp; AI/ML</a:t>
+            </a:r>
+            <a:endParaRPr lang="en-US" sz="860" dirty="0"/>
+          </a:p>
+        </p:txBody>
+      </p:sp>
+      <p:sp>
+        <p:nvSpPr>
+          <p:cNvPr id="27" name="Text 25"/>
+          <p:cNvSpPr/>
+          <p:nvPr/>
+        </p:nvSpPr>
+        <p:spPr>
+          <a:xfrm>
+            <a:off x="4956048" y="2852928"/>
+            <a:ext cx="1783080" cy="548640"/>
+          </a:xfrm>
+          <a:prstGeom prst="rect">
+            <a:avLst/>
+          </a:prstGeom>
+          <a:noFill/>
+          <a:ln/>
+        </p:spPr>
+        <p:txBody>
+          <a:bodyPr wrap="square" rtlCol="0" anchor="ctr"/>
+          <a:lstStyle/>
+          <a:p>
+            <a:pPr indent="0" marL="0">
+              <a:lnSpc>
+                <a:spcPts val="1050"/>
+              </a:lnSpc>
+              <a:buNone/>
+            </a:pPr>
+            <a:r>
+              <a:rPr lang="en-US" sz="860" b="1" dirty="0">
+                <a:solidFill>
+                  <a:srgbClr val="0F766E"/>
+                </a:solidFill>
+                <a:latin typeface="Calibri" pitchFamily="34" charset="0"/>
+                <a:ea typeface="Calibri" pitchFamily="34" charset="-122"/>
+                <a:cs typeface="Calibri" pitchFamily="34" charset="-120"/>
+              </a:rPr>
+              <a:t>·  </a:t>
+            </a:r>
+            <a:pPr indent="0" marL="0">
+              <a:lnSpc>
+                <a:spcPts val="1050"/>
+              </a:lnSpc>
+              <a:buNone/>
+            </a:pPr>
+            <a:r>
+              <a:rPr lang="en-US" sz="860" dirty="0">
+                <a:solidFill>
+                  <a:srgbClr val="475569"/>
+                </a:solidFill>
+                <a:latin typeface="Calibri" pitchFamily="34" charset="0"/>
+                <a:ea typeface="Calibri" pitchFamily="34" charset="-122"/>
+                <a:cs typeface="Calibri" pitchFamily="34" charset="-120"/>
+              </a:rPr>
+              <a:t>Led Eng/Product/Data across Retail, FMCG, Banking, FoodTech</a:t>
+            </a:r>
+            <a:endParaRPr lang="en-US" sz="860" dirty="0"/>
+          </a:p>
+        </p:txBody>
+      </p:sp>
+      <p:sp>
+        <p:nvSpPr>
+          <p:cNvPr id="28" name="Text 26"/>
+          <p:cNvSpPr/>
+          <p:nvPr/>
+        </p:nvSpPr>
+        <p:spPr>
+          <a:xfrm>
+            <a:off x="4956048" y="3419856"/>
+            <a:ext cx="1783080" cy="548640"/>
+          </a:xfrm>
+          <a:prstGeom prst="rect">
+            <a:avLst/>
+          </a:prstGeom>
+          <a:noFill/>
+          <a:ln/>
+        </p:spPr>
+        <p:txBody>
+          <a:bodyPr wrap="square" rtlCol="0" anchor="ctr"/>
+          <a:lstStyle/>
+          <a:p>
+            <a:pPr indent="0" marL="0">
+              <a:lnSpc>
+                <a:spcPts val="1050"/>
+              </a:lnSpc>
+              <a:buNone/>
+            </a:pPr>
+            <a:r>
+              <a:rPr lang="en-US" sz="860" b="1" dirty="0">
+                <a:solidFill>
+                  <a:srgbClr val="0F766E"/>
+                </a:solidFill>
+                <a:latin typeface="Calibri" pitchFamily="34" charset="0"/>
+                <a:ea typeface="Calibri" pitchFamily="34" charset="-122"/>
+                <a:cs typeface="Calibri" pitchFamily="34" charset="-120"/>
+              </a:rPr>
+              <a:t>·  </a:t>
+            </a:r>
+            <a:pPr indent="0" marL="0">
+              <a:lnSpc>
+                <a:spcPts val="1050"/>
+              </a:lnSpc>
+              <a:buNone/>
+            </a:pPr>
+            <a:r>
+              <a:rPr lang="en-US" sz="860" dirty="0">
+                <a:solidFill>
+                  <a:srgbClr val="475569"/>
+                </a:solidFill>
+                <a:latin typeface="Calibri" pitchFamily="34" charset="0"/>
+                <a:ea typeface="Calibri" pitchFamily="34" charset="-122"/>
+                <a:cs typeface="Calibri" pitchFamily="34" charset="-120"/>
+              </a:rPr>
+              <a:t>IICA-Certified Independent Director</a:t>
+            </a:r>
+            <a:endParaRPr lang="en-US" sz="860" dirty="0"/>
+          </a:p>
+        </p:txBody>
+      </p:sp>
+      <p:sp>
+        <p:nvSpPr>
+          <p:cNvPr id="29" name="Shape 27"/>
+          <p:cNvSpPr/>
+          <p:nvPr/>
+        </p:nvSpPr>
+        <p:spPr>
+          <a:xfrm>
+            <a:off x="4956048" y="4096512"/>
+            <a:ext cx="1737360" cy="310896"/>
           </a:xfrm>
           <a:prstGeom prst="roundRect">
             <a:avLst>
-              <a:gd name="adj" fmla="val 9412"/>
+              <a:gd name="adj" fmla="val 14706"/>
+            </a:avLst>
+          </a:prstGeom>
+          <a:solidFill>
+            <a:srgbClr val="F8FAFC"/>
+          </a:solidFill>
+          <a:ln w="9525">
+            <a:solidFill>
+              <a:srgbClr val="0F766E"/>
+            </a:solidFill>
+            <a:prstDash val="solid"/>
+          </a:ln>
+        </p:spPr>
+      </p:sp>
+      <p:sp>
+        <p:nvSpPr>
+          <p:cNvPr id="30" name="Text 28"/>
+          <p:cNvSpPr/>
+          <p:nvPr/>
+        </p:nvSpPr>
+        <p:spPr>
+          <a:xfrm>
+            <a:off x="5001768" y="4142232"/>
+            <a:ext cx="1664208" cy="237744"/>
+          </a:xfrm>
+          <a:prstGeom prst="rect">
+            <a:avLst/>
+          </a:prstGeom>
+          <a:noFill/>
+          <a:ln/>
+        </p:spPr>
+        <p:txBody>
+          <a:bodyPr wrap="square" rtlCol="0" anchor="ctr"/>
+          <a:lstStyle/>
+          <a:p>
+            <a:pPr algn="ctr" indent="0" marL="0">
+              <a:buNone/>
+            </a:pPr>
+            <a:r>
+              <a:rPr lang="en-US" sz="820" b="1" dirty="0">
+                <a:solidFill>
+                  <a:srgbClr val="0F766E"/>
+                </a:solidFill>
+                <a:latin typeface="Calibri" pitchFamily="34" charset="0"/>
+                <a:ea typeface="Calibri" pitchFamily="34" charset="-122"/>
+                <a:cs typeface="Calibri" pitchFamily="34" charset="-120"/>
+              </a:rPr>
+              <a:t>Leads engineering &amp; the AI platform</a:t>
+            </a:r>
+            <a:endParaRPr lang="en-US" sz="820" dirty="0"/>
+          </a:p>
+        </p:txBody>
+      </p:sp>
+      <p:sp>
+        <p:nvSpPr>
+          <p:cNvPr id="31" name="Shape 29"/>
+          <p:cNvSpPr/>
+          <p:nvPr/>
+        </p:nvSpPr>
+        <p:spPr>
+          <a:xfrm>
+            <a:off x="6976872" y="1463040"/>
+            <a:ext cx="2011680" cy="3063240"/>
+          </a:xfrm>
+          <a:prstGeom prst="roundRect">
+            <a:avLst>
+              <a:gd name="adj" fmla="val 4545"/>
             </a:avLst>
           </a:prstGeom>
           <a:solidFill>
@@ -13527,170 +14276,112 @@
       </p:sp>
       <p:sp>
         <p:nvSpPr>
-          <p:cNvPr id="15" name="Text 13"/>
-          <p:cNvSpPr/>
-          <p:nvPr/>
-        </p:nvSpPr>
-        <p:spPr>
-          <a:xfrm>
-            <a:off x="822960" y="3858768"/>
-            <a:ext cx="1371600" cy="384048"/>
-          </a:xfrm>
-          <a:prstGeom prst="rect">
-            <a:avLst/>
-          </a:prstGeom>
-          <a:noFill/>
-          <a:ln/>
-        </p:spPr>
-        <p:txBody>
-          <a:bodyPr wrap="square" rtlCol="0" anchor="ctr"/>
-          <a:lstStyle/>
-          <a:p>
-            <a:pPr indent="0" marL="0">
-              <a:buNone/>
-            </a:pPr>
-            <a:r>
-              <a:rPr lang="en-US" sz="2400" b="1" dirty="0">
-                <a:solidFill>
-                  <a:srgbClr val="E8520A"/>
-                </a:solidFill>
-                <a:latin typeface="Calibri" pitchFamily="34" charset="0"/>
-                <a:ea typeface="Calibri" pitchFamily="34" charset="-122"/>
-                <a:cs typeface="Calibri" pitchFamily="34" charset="-120"/>
-              </a:rPr>
-              <a:t>150K+</a:t>
-            </a:r>
-            <a:endParaRPr lang="en-US" sz="2400" dirty="0"/>
-          </a:p>
-        </p:txBody>
-      </p:sp>
-      <p:sp>
-        <p:nvSpPr>
-          <p:cNvPr id="16" name="Text 14"/>
-          <p:cNvSpPr/>
-          <p:nvPr/>
-        </p:nvSpPr>
-        <p:spPr>
-          <a:xfrm>
-            <a:off x="2103120" y="3858768"/>
-            <a:ext cx="1965960" cy="274320"/>
-          </a:xfrm>
-          <a:prstGeom prst="rect">
-            <a:avLst/>
-          </a:prstGeom>
-          <a:noFill/>
-          <a:ln/>
-        </p:spPr>
-        <p:txBody>
-          <a:bodyPr wrap="square" rtlCol="0" anchor="ctr"/>
-          <a:lstStyle/>
-          <a:p>
-            <a:pPr indent="0" marL="0">
-              <a:buNone/>
-            </a:pPr>
-            <a:r>
-              <a:rPr lang="en-US" sz="950" b="1" dirty="0">
-                <a:solidFill>
-                  <a:srgbClr val="10182B"/>
-                </a:solidFill>
-                <a:latin typeface="Calibri" pitchFamily="34" charset="0"/>
-                <a:ea typeface="Calibri" pitchFamily="34" charset="-122"/>
-                <a:cs typeface="Calibri" pitchFamily="34" charset="-120"/>
-              </a:rPr>
-              <a:t>On POS systems today (Petpooja + UrbanPiper)</a:t>
-            </a:r>
-            <a:endParaRPr lang="en-US" sz="950" dirty="0"/>
-          </a:p>
-        </p:txBody>
-      </p:sp>
-      <p:sp>
-        <p:nvSpPr>
-          <p:cNvPr id="17" name="Text 15"/>
-          <p:cNvSpPr/>
-          <p:nvPr/>
-        </p:nvSpPr>
-        <p:spPr>
-          <a:xfrm>
-            <a:off x="2103120" y="4151376"/>
-            <a:ext cx="1965960" cy="274320"/>
-          </a:xfrm>
-          <a:prstGeom prst="rect">
-            <a:avLst/>
-          </a:prstGeom>
-          <a:noFill/>
-          <a:ln/>
-        </p:spPr>
-        <p:txBody>
-          <a:bodyPr wrap="square" rtlCol="0" anchor="ctr"/>
-          <a:lstStyle/>
-          <a:p>
-            <a:pPr indent="0" marL="0">
-              <a:buNone/>
-            </a:pPr>
-            <a:r>
-              <a:rPr lang="en-US" sz="800" dirty="0">
-                <a:solidFill>
-                  <a:srgbClr val="8E99B0"/>
-                </a:solidFill>
-                <a:latin typeface="Calibri" pitchFamily="34" charset="0"/>
-                <a:ea typeface="Calibri" pitchFamily="34" charset="-122"/>
-                <a:cs typeface="Calibri" pitchFamily="34" charset="-120"/>
-              </a:rPr>
-              <a:t>Pre-verified, real-time sales data accessible</a:t>
-            </a:r>
-            <a:endParaRPr lang="en-US" sz="800" dirty="0"/>
-          </a:p>
-        </p:txBody>
-      </p:sp>
-      <p:sp>
-        <p:nvSpPr>
-          <p:cNvPr id="18" name="Text 16"/>
-          <p:cNvSpPr/>
-          <p:nvPr/>
-        </p:nvSpPr>
-        <p:spPr>
-          <a:xfrm>
-            <a:off x="4800600" y="1572768"/>
-            <a:ext cx="3931920" cy="256032"/>
-          </a:xfrm>
-          <a:prstGeom prst="rect">
-            <a:avLst/>
-          </a:prstGeom>
-          <a:noFill/>
-          <a:ln/>
-        </p:spPr>
-        <p:txBody>
-          <a:bodyPr wrap="square" rtlCol="0" anchor="ctr"/>
-          <a:lstStyle/>
-          <a:p>
-            <a:pPr indent="0" marL="0">
-              <a:buNone/>
-            </a:pPr>
-            <a:r>
-              <a:rPr lang="en-US" sz="950" b="1" spc="200" kern="0" dirty="0">
-                <a:solidFill>
-                  <a:srgbClr val="E8520A"/>
-                </a:solidFill>
-                <a:latin typeface="Calibri" pitchFamily="34" charset="0"/>
-                <a:ea typeface="Calibri" pitchFamily="34" charset="-122"/>
-                <a:cs typeface="Calibri" pitchFamily="34" charset="-120"/>
-              </a:rPr>
-              <a:t>THE CHANNEL: POS-LED DISTRIBUTION</a:t>
-            </a:r>
-            <a:endParaRPr lang="en-US" sz="950" dirty="0"/>
-          </a:p>
-        </p:txBody>
-      </p:sp>
-      <p:sp>
-        <p:nvSpPr>
-          <p:cNvPr id="19" name="Text 17"/>
-          <p:cNvSpPr/>
-          <p:nvPr/>
-        </p:nvSpPr>
-        <p:spPr>
-          <a:xfrm>
-            <a:off x="4800600" y="1920240"/>
-            <a:ext cx="3977640" cy="502920"/>
+          <p:cNvPr id="32" name="Shape 30"/>
+          <p:cNvSpPr/>
+          <p:nvPr/>
+        </p:nvSpPr>
+        <p:spPr>
+          <a:xfrm>
+            <a:off x="6976872" y="1463040"/>
+            <a:ext cx="2011680" cy="91440"/>
+          </a:xfrm>
+          <a:prstGeom prst="rect">
+            <a:avLst/>
+          </a:prstGeom>
+          <a:solidFill>
+            <a:srgbClr val="15803D"/>
+          </a:solidFill>
+          <a:ln/>
+        </p:spPr>
+      </p:sp>
+      <p:sp>
+        <p:nvSpPr>
+          <p:cNvPr id="33" name="Text 31"/>
+          <p:cNvSpPr/>
+          <p:nvPr/>
+        </p:nvSpPr>
+        <p:spPr>
+          <a:xfrm>
+            <a:off x="7114032" y="1645920"/>
+            <a:ext cx="1737360" cy="237744"/>
+          </a:xfrm>
+          <a:prstGeom prst="rect">
+            <a:avLst/>
+          </a:prstGeom>
+          <a:noFill/>
+          <a:ln/>
+        </p:spPr>
+        <p:txBody>
+          <a:bodyPr wrap="square" rtlCol="0" anchor="ctr"/>
+          <a:lstStyle/>
+          <a:p>
+            <a:pPr indent="0" marL="0">
+              <a:buNone/>
+            </a:pPr>
+            <a:r>
+              <a:rPr lang="en-US" sz="1000" b="1" spc="100" kern="0" dirty="0">
+                <a:solidFill>
+                  <a:srgbClr val="15803D"/>
+                </a:solidFill>
+                <a:latin typeface="Calibri" pitchFamily="34" charset="0"/>
+                <a:ea typeface="Calibri" pitchFamily="34" charset="-122"/>
+                <a:cs typeface="Calibri" pitchFamily="34" charset="-120"/>
+              </a:rPr>
+              <a:t>Boi</a:t>
+            </a:r>
+            <a:endParaRPr lang="en-US" sz="1000" dirty="0"/>
+          </a:p>
+        </p:txBody>
+      </p:sp>
+      <p:sp>
+        <p:nvSpPr>
+          <p:cNvPr id="34" name="Text 32"/>
+          <p:cNvSpPr/>
+          <p:nvPr/>
+        </p:nvSpPr>
+        <p:spPr>
+          <a:xfrm>
+            <a:off x="7114032" y="1883664"/>
+            <a:ext cx="1783080" cy="310896"/>
+          </a:xfrm>
+          <a:prstGeom prst="rect">
+            <a:avLst/>
+          </a:prstGeom>
+          <a:noFill/>
+          <a:ln/>
+        </p:spPr>
+        <p:txBody>
+          <a:bodyPr wrap="square" rtlCol="0" anchor="ctr"/>
+          <a:lstStyle/>
+          <a:p>
+            <a:pPr indent="0" marL="0">
+              <a:buNone/>
+            </a:pPr>
+            <a:r>
+              <a:rPr lang="en-US" sz="1350" b="1" dirty="0">
+                <a:solidFill>
+                  <a:srgbClr val="0F172A"/>
+                </a:solidFill>
+                <a:latin typeface="Calibri" pitchFamily="34" charset="0"/>
+                <a:ea typeface="Calibri" pitchFamily="34" charset="-122"/>
+                <a:cs typeface="Calibri" pitchFamily="34" charset="-120"/>
+              </a:rPr>
+              <a:t>Co-Founder</a:t>
+            </a:r>
+            <a:endParaRPr lang="en-US" sz="1350" dirty="0"/>
+          </a:p>
+        </p:txBody>
+      </p:sp>
+      <p:sp>
+        <p:nvSpPr>
+          <p:cNvPr id="35" name="Text 33"/>
+          <p:cNvSpPr/>
+          <p:nvPr/>
+        </p:nvSpPr>
+        <p:spPr>
+          <a:xfrm>
+            <a:off x="7114032" y="2286000"/>
+            <a:ext cx="1783080" cy="548640"/>
           </a:xfrm>
           <a:prstGeom prst="rect">
             <a:avLst/>
@@ -13704,613 +14395,268 @@
           <a:p>
             <a:pPr indent="0" marL="0">
               <a:lnSpc>
-                <a:spcPts val="1400"/>
+                <a:spcPts val="1050"/>
               </a:lnSpc>
               <a:buNone/>
             </a:pPr>
             <a:r>
-              <a:rPr lang="en-US" sz="1100" dirty="0">
-                <a:solidFill>
-                  <a:srgbClr val="4A5670"/>
-                </a:solidFill>
-                <a:latin typeface="Calibri" pitchFamily="34" charset="0"/>
-                <a:ea typeface="Calibri" pitchFamily="34" charset="-122"/>
-                <a:cs typeface="Calibri" pitchFamily="34" charset="-120"/>
-              </a:rPr>
-              <a:t>Instead of building a field force of 10,000, we embed inside the software the restaurant already uses every day.</a:t>
-            </a:r>
-            <a:endParaRPr lang="en-US" sz="1100" dirty="0"/>
-          </a:p>
-        </p:txBody>
-      </p:sp>
-      <p:sp>
-        <p:nvSpPr>
-          <p:cNvPr id="20" name="Shape 18"/>
-          <p:cNvSpPr/>
-          <p:nvPr/>
-        </p:nvSpPr>
-        <p:spPr>
-          <a:xfrm>
-            <a:off x="4800600" y="2578608"/>
-            <a:ext cx="3977640" cy="594360"/>
+              <a:rPr lang="en-US" sz="860" b="1" dirty="0">
+                <a:solidFill>
+                  <a:srgbClr val="15803D"/>
+                </a:solidFill>
+                <a:latin typeface="Calibri" pitchFamily="34" charset="0"/>
+                <a:ea typeface="Calibri" pitchFamily="34" charset="-122"/>
+                <a:cs typeface="Calibri" pitchFamily="34" charset="-120"/>
+              </a:rPr>
+              <a:t>·  </a:t>
+            </a:r>
+            <a:pPr indent="0" marL="0">
+              <a:lnSpc>
+                <a:spcPts val="1050"/>
+              </a:lnSpc>
+              <a:buNone/>
+            </a:pPr>
+            <a:r>
+              <a:rPr lang="en-US" sz="860" dirty="0">
+                <a:solidFill>
+                  <a:srgbClr val="475569"/>
+                </a:solidFill>
+                <a:latin typeface="Calibri" pitchFamily="34" charset="0"/>
+                <a:ea typeface="Calibri" pitchFamily="34" charset="-122"/>
+                <a:cs typeface="Calibri" pitchFamily="34" charset="-120"/>
+              </a:rPr>
+              <a:t>Founder of Petoo — 300+ HORECA outlets monthly, NE India</a:t>
+            </a:r>
+            <a:endParaRPr lang="en-US" sz="860" dirty="0"/>
+          </a:p>
+        </p:txBody>
+      </p:sp>
+      <p:sp>
+        <p:nvSpPr>
+          <p:cNvPr id="36" name="Text 34"/>
+          <p:cNvSpPr/>
+          <p:nvPr/>
+        </p:nvSpPr>
+        <p:spPr>
+          <a:xfrm>
+            <a:off x="7114032" y="2852928"/>
+            <a:ext cx="1783080" cy="548640"/>
+          </a:xfrm>
+          <a:prstGeom prst="rect">
+            <a:avLst/>
+          </a:prstGeom>
+          <a:noFill/>
+          <a:ln/>
+        </p:spPr>
+        <p:txBody>
+          <a:bodyPr wrap="square" rtlCol="0" anchor="ctr"/>
+          <a:lstStyle/>
+          <a:p>
+            <a:pPr indent="0" marL="0">
+              <a:lnSpc>
+                <a:spcPts val="1050"/>
+              </a:lnSpc>
+              <a:buNone/>
+            </a:pPr>
+            <a:r>
+              <a:rPr lang="en-US" sz="860" b="1" dirty="0">
+                <a:solidFill>
+                  <a:srgbClr val="15803D"/>
+                </a:solidFill>
+                <a:latin typeface="Calibri" pitchFamily="34" charset="0"/>
+                <a:ea typeface="Calibri" pitchFamily="34" charset="-122"/>
+                <a:cs typeface="Calibri" pitchFamily="34" charset="-120"/>
+              </a:rPr>
+              <a:t>·  </a:t>
+            </a:r>
+            <a:pPr indent="0" marL="0">
+              <a:lnSpc>
+                <a:spcPts val="1050"/>
+              </a:lnSpc>
+              <a:buNone/>
+            </a:pPr>
+            <a:r>
+              <a:rPr lang="en-US" sz="860" dirty="0">
+                <a:solidFill>
+                  <a:srgbClr val="475569"/>
+                </a:solidFill>
+                <a:latin typeface="Calibri" pitchFamily="34" charset="0"/>
+                <a:ea typeface="Calibri" pitchFamily="34" charset="-122"/>
+                <a:cs typeface="Calibri" pitchFamily="34" charset="-120"/>
+              </a:rPr>
+              <a:t>IIM-Bangalore; 18+ yrs banking &amp; telecom (ICICI, Vodafone Idea)</a:t>
+            </a:r>
+            <a:endParaRPr lang="en-US" sz="860" dirty="0"/>
+          </a:p>
+        </p:txBody>
+      </p:sp>
+      <p:sp>
+        <p:nvSpPr>
+          <p:cNvPr id="37" name="Text 35"/>
+          <p:cNvSpPr/>
+          <p:nvPr/>
+        </p:nvSpPr>
+        <p:spPr>
+          <a:xfrm>
+            <a:off x="7114032" y="3419856"/>
+            <a:ext cx="1783080" cy="548640"/>
+          </a:xfrm>
+          <a:prstGeom prst="rect">
+            <a:avLst/>
+          </a:prstGeom>
+          <a:noFill/>
+          <a:ln/>
+        </p:spPr>
+        <p:txBody>
+          <a:bodyPr wrap="square" rtlCol="0" anchor="ctr"/>
+          <a:lstStyle/>
+          <a:p>
+            <a:pPr indent="0" marL="0">
+              <a:lnSpc>
+                <a:spcPts val="1050"/>
+              </a:lnSpc>
+              <a:buNone/>
+            </a:pPr>
+            <a:r>
+              <a:rPr lang="en-US" sz="860" b="1" dirty="0">
+                <a:solidFill>
+                  <a:srgbClr val="15803D"/>
+                </a:solidFill>
+                <a:latin typeface="Calibri" pitchFamily="34" charset="0"/>
+                <a:ea typeface="Calibri" pitchFamily="34" charset="-122"/>
+                <a:cs typeface="Calibri" pitchFamily="34" charset="-120"/>
+              </a:rPr>
+              <a:t>·  </a:t>
+            </a:r>
+            <a:pPr indent="0" marL="0">
+              <a:lnSpc>
+                <a:spcPts val="1050"/>
+              </a:lnSpc>
+              <a:buNone/>
+            </a:pPr>
+            <a:r>
+              <a:rPr lang="en-US" sz="860" dirty="0">
+                <a:solidFill>
+                  <a:srgbClr val="475569"/>
+                </a:solidFill>
+                <a:latin typeface="Calibri" pitchFamily="34" charset="0"/>
+                <a:ea typeface="Calibri" pitchFamily="34" charset="-122"/>
+                <a:cs typeface="Calibri" pitchFamily="34" charset="-120"/>
+              </a:rPr>
+              <a:t>Credit &amp; prepaid products; sells to the outlets we lend to</a:t>
+            </a:r>
+            <a:endParaRPr lang="en-US" sz="860" dirty="0"/>
+          </a:p>
+        </p:txBody>
+      </p:sp>
+      <p:sp>
+        <p:nvSpPr>
+          <p:cNvPr id="38" name="Shape 36"/>
+          <p:cNvSpPr/>
+          <p:nvPr/>
+        </p:nvSpPr>
+        <p:spPr>
+          <a:xfrm>
+            <a:off x="7114032" y="4096512"/>
+            <a:ext cx="1737360" cy="310896"/>
           </a:xfrm>
           <a:prstGeom prst="roundRect">
             <a:avLst>
-              <a:gd name="adj" fmla="val 13846"/>
+              <a:gd name="adj" fmla="val 14706"/>
             </a:avLst>
           </a:prstGeom>
           <a:solidFill>
-            <a:srgbClr val="FFFFFF"/>
+            <a:srgbClr val="F8FAFC"/>
           </a:solidFill>
           <a:ln w="9525">
             <a:solidFill>
-              <a:srgbClr val="ECE6DA"/>
+              <a:srgbClr val="15803D"/>
             </a:solidFill>
             <a:prstDash val="solid"/>
           </a:ln>
-          <a:effectLst>
-            <a:outerShdw sx="100000" sy="100000" kx="0" ky="0" algn="bl" rotWithShape="0" blurRad="76200" dist="25400" dir="5400000">
-              <a:srgbClr val="CBD5E1">
-                <a:alpha val="25000"/>
-              </a:srgbClr>
-            </a:outerShdw>
-          </a:effectLst>
-        </p:spPr>
-      </p:sp>
-      <p:sp>
-        <p:nvSpPr>
-          <p:cNvPr id="21" name="Shape 19"/>
-          <p:cNvSpPr/>
-          <p:nvPr/>
-        </p:nvSpPr>
-        <p:spPr>
-          <a:xfrm>
-            <a:off x="4800600" y="2578608"/>
-            <a:ext cx="109728" cy="594360"/>
-          </a:xfrm>
-          <a:prstGeom prst="roundRect">
-            <a:avLst>
-              <a:gd name="adj" fmla="val 33333"/>
-            </a:avLst>
-          </a:prstGeom>
-          <a:solidFill>
-            <a:srgbClr val="E8520A"/>
-          </a:solidFill>
-          <a:ln/>
-        </p:spPr>
-      </p:sp>
-      <p:sp>
-        <p:nvSpPr>
-          <p:cNvPr id="22" name="Text 20"/>
-          <p:cNvSpPr/>
-          <p:nvPr/>
-        </p:nvSpPr>
-        <p:spPr>
-          <a:xfrm>
-            <a:off x="5029200" y="2651760"/>
-            <a:ext cx="1280160" cy="228600"/>
-          </a:xfrm>
-          <a:prstGeom prst="rect">
-            <a:avLst/>
-          </a:prstGeom>
-          <a:noFill/>
-          <a:ln/>
-        </p:spPr>
-        <p:txBody>
-          <a:bodyPr wrap="square" rtlCol="0" anchor="ctr"/>
-          <a:lstStyle/>
-          <a:p>
-            <a:pPr indent="0" marL="0">
-              <a:buNone/>
-            </a:pPr>
-            <a:r>
-              <a:rPr lang="en-US" sz="1300" b="1" dirty="0">
-                <a:solidFill>
-                  <a:srgbClr val="E8520A"/>
-                </a:solidFill>
-                <a:latin typeface="Calibri" pitchFamily="34" charset="0"/>
-                <a:ea typeface="Calibri" pitchFamily="34" charset="-122"/>
-                <a:cs typeface="Calibri" pitchFamily="34" charset="-120"/>
-              </a:rPr>
-              <a:t>Petpooja</a:t>
-            </a:r>
-            <a:endParaRPr lang="en-US" sz="1300" dirty="0"/>
-          </a:p>
-        </p:txBody>
-      </p:sp>
-      <p:sp>
-        <p:nvSpPr>
-          <p:cNvPr id="23" name="Text 21"/>
-          <p:cNvSpPr/>
-          <p:nvPr/>
-        </p:nvSpPr>
-        <p:spPr>
-          <a:xfrm>
-            <a:off x="6309360" y="2651760"/>
-            <a:ext cx="1143000" cy="228600"/>
-          </a:xfrm>
-          <a:prstGeom prst="rect">
-            <a:avLst/>
-          </a:prstGeom>
-          <a:noFill/>
-          <a:ln/>
-        </p:spPr>
-        <p:txBody>
-          <a:bodyPr wrap="square" rtlCol="0" anchor="ctr"/>
-          <a:lstStyle/>
-          <a:p>
-            <a:pPr indent="0" marL="0">
-              <a:buNone/>
-            </a:pPr>
-            <a:r>
-              <a:rPr lang="en-US" sz="1200" b="1" dirty="0">
-                <a:solidFill>
-                  <a:srgbClr val="10182B"/>
-                </a:solidFill>
-                <a:latin typeface="Calibri" pitchFamily="34" charset="0"/>
-                <a:ea typeface="Calibri" pitchFamily="34" charset="-122"/>
-                <a:cs typeface="Calibri" pitchFamily="34" charset="-120"/>
-              </a:rPr>
-              <a:t>150K+ outlets</a:t>
-            </a:r>
-            <a:endParaRPr lang="en-US" sz="1200" dirty="0"/>
-          </a:p>
-        </p:txBody>
-      </p:sp>
-      <p:sp>
-        <p:nvSpPr>
-          <p:cNvPr id="24" name="Text 22"/>
-          <p:cNvSpPr/>
-          <p:nvPr/>
-        </p:nvSpPr>
-        <p:spPr>
-          <a:xfrm>
-            <a:off x="5029200" y="2907792"/>
-            <a:ext cx="3657600" cy="201168"/>
-          </a:xfrm>
-          <a:prstGeom prst="rect">
-            <a:avLst/>
-          </a:prstGeom>
-          <a:noFill/>
-          <a:ln/>
-        </p:spPr>
-        <p:txBody>
-          <a:bodyPr wrap="square" rtlCol="0" anchor="ctr"/>
-          <a:lstStyle/>
-          <a:p>
-            <a:pPr indent="0" marL="0">
-              <a:buNone/>
-            </a:pPr>
-            <a:r>
-              <a:rPr lang="en-US" sz="880" dirty="0">
-                <a:solidFill>
-                  <a:srgbClr val="4A5670"/>
-                </a:solidFill>
-                <a:latin typeface="Calibri" pitchFamily="34" charset="0"/>
-                <a:ea typeface="Calibri" pitchFamily="34" charset="-122"/>
-                <a:cs typeface="Calibri" pitchFamily="34" charset="-120"/>
-              </a:rPr>
-              <a:t>India's largest restaurant POS · 200+ cities</a:t>
-            </a:r>
-            <a:endParaRPr lang="en-US" sz="880" dirty="0"/>
-          </a:p>
-        </p:txBody>
-      </p:sp>
-      <p:sp>
-        <p:nvSpPr>
-          <p:cNvPr id="25" name="Shape 23"/>
-          <p:cNvSpPr/>
-          <p:nvPr/>
-        </p:nvSpPr>
-        <p:spPr>
-          <a:xfrm>
-            <a:off x="4800600" y="3291840"/>
-            <a:ext cx="3977640" cy="594360"/>
-          </a:xfrm>
-          <a:prstGeom prst="roundRect">
-            <a:avLst>
-              <a:gd name="adj" fmla="val 13846"/>
-            </a:avLst>
-          </a:prstGeom>
-          <a:solidFill>
-            <a:srgbClr val="FFFFFF"/>
-          </a:solidFill>
-          <a:ln w="9525">
-            <a:solidFill>
-              <a:srgbClr val="ECE6DA"/>
-            </a:solidFill>
-            <a:prstDash val="solid"/>
-          </a:ln>
-          <a:effectLst>
-            <a:outerShdw sx="100000" sy="100000" kx="0" ky="0" algn="bl" rotWithShape="0" blurRad="76200" dist="25400" dir="5400000">
-              <a:srgbClr val="CBD5E1">
-                <a:alpha val="25000"/>
-              </a:srgbClr>
-            </a:outerShdw>
-          </a:effectLst>
-        </p:spPr>
-      </p:sp>
-      <p:sp>
-        <p:nvSpPr>
-          <p:cNvPr id="26" name="Shape 24"/>
-          <p:cNvSpPr/>
-          <p:nvPr/>
-        </p:nvSpPr>
-        <p:spPr>
-          <a:xfrm>
-            <a:off x="4800600" y="3291840"/>
-            <a:ext cx="109728" cy="594360"/>
-          </a:xfrm>
-          <a:prstGeom prst="roundRect">
-            <a:avLst>
-              <a:gd name="adj" fmla="val 33333"/>
-            </a:avLst>
-          </a:prstGeom>
-          <a:solidFill>
-            <a:srgbClr val="0E756C"/>
-          </a:solidFill>
-          <a:ln/>
-        </p:spPr>
-      </p:sp>
-      <p:sp>
-        <p:nvSpPr>
-          <p:cNvPr id="27" name="Text 25"/>
-          <p:cNvSpPr/>
-          <p:nvPr/>
-        </p:nvSpPr>
-        <p:spPr>
-          <a:xfrm>
-            <a:off x="5029200" y="3364992"/>
-            <a:ext cx="1280160" cy="228600"/>
-          </a:xfrm>
-          <a:prstGeom prst="rect">
-            <a:avLst/>
-          </a:prstGeom>
-          <a:noFill/>
-          <a:ln/>
-        </p:spPr>
-        <p:txBody>
-          <a:bodyPr wrap="square" rtlCol="0" anchor="ctr"/>
-          <a:lstStyle/>
-          <a:p>
-            <a:pPr indent="0" marL="0">
-              <a:buNone/>
-            </a:pPr>
-            <a:r>
-              <a:rPr lang="en-US" sz="1300" b="1" dirty="0">
-                <a:solidFill>
-                  <a:srgbClr val="0E756C"/>
-                </a:solidFill>
-                <a:latin typeface="Calibri" pitchFamily="34" charset="0"/>
-                <a:ea typeface="Calibri" pitchFamily="34" charset="-122"/>
-                <a:cs typeface="Calibri" pitchFamily="34" charset="-120"/>
-              </a:rPr>
-              <a:t>UrbanPiper</a:t>
-            </a:r>
-            <a:endParaRPr lang="en-US" sz="1300" dirty="0"/>
-          </a:p>
-        </p:txBody>
-      </p:sp>
-      <p:sp>
-        <p:nvSpPr>
-          <p:cNvPr id="28" name="Text 26"/>
-          <p:cNvSpPr/>
-          <p:nvPr/>
-        </p:nvSpPr>
-        <p:spPr>
-          <a:xfrm>
-            <a:off x="6309360" y="3364992"/>
-            <a:ext cx="1143000" cy="228600"/>
-          </a:xfrm>
-          <a:prstGeom prst="rect">
-            <a:avLst/>
-          </a:prstGeom>
-          <a:noFill/>
-          <a:ln/>
-        </p:spPr>
-        <p:txBody>
-          <a:bodyPr wrap="square" rtlCol="0" anchor="ctr"/>
-          <a:lstStyle/>
-          <a:p>
-            <a:pPr indent="0" marL="0">
-              <a:buNone/>
-            </a:pPr>
-            <a:r>
-              <a:rPr lang="en-US" sz="1200" b="1" dirty="0">
-                <a:solidFill>
-                  <a:srgbClr val="10182B"/>
-                </a:solidFill>
-                <a:latin typeface="Calibri" pitchFamily="34" charset="0"/>
-                <a:ea typeface="Calibri" pitchFamily="34" charset="-122"/>
-                <a:cs typeface="Calibri" pitchFamily="34" charset="-120"/>
-              </a:rPr>
-              <a:t>45K+ outlets</a:t>
-            </a:r>
-            <a:endParaRPr lang="en-US" sz="1200" dirty="0"/>
-          </a:p>
-        </p:txBody>
-      </p:sp>
-      <p:sp>
-        <p:nvSpPr>
-          <p:cNvPr id="29" name="Text 27"/>
-          <p:cNvSpPr/>
-          <p:nvPr/>
-        </p:nvSpPr>
-        <p:spPr>
-          <a:xfrm>
-            <a:off x="5029200" y="3621024"/>
-            <a:ext cx="3657600" cy="201168"/>
-          </a:xfrm>
-          <a:prstGeom prst="rect">
-            <a:avLst/>
-          </a:prstGeom>
-          <a:noFill/>
-          <a:ln/>
-        </p:spPr>
-        <p:txBody>
-          <a:bodyPr wrap="square" rtlCol="0" anchor="ctr"/>
-          <a:lstStyle/>
-          <a:p>
-            <a:pPr indent="0" marL="0">
-              <a:buNone/>
-            </a:pPr>
-            <a:r>
-              <a:rPr lang="en-US" sz="880" dirty="0">
-                <a:solidFill>
-                  <a:srgbClr val="4A5670"/>
-                </a:solidFill>
-                <a:latin typeface="Calibri" pitchFamily="34" charset="0"/>
-                <a:ea typeface="Calibri" pitchFamily="34" charset="-122"/>
-                <a:cs typeface="Calibri" pitchFamily="34" charset="-120"/>
-              </a:rPr>
-              <a:t>Swiggy &amp; Zomato backed · 30 countries</a:t>
-            </a:r>
-            <a:endParaRPr lang="en-US" sz="880" dirty="0"/>
-          </a:p>
-        </p:txBody>
-      </p:sp>
-      <p:sp>
-        <p:nvSpPr>
-          <p:cNvPr id="30" name="Shape 28"/>
-          <p:cNvSpPr/>
-          <p:nvPr/>
-        </p:nvSpPr>
-        <p:spPr>
-          <a:xfrm>
-            <a:off x="4800600" y="4005072"/>
-            <a:ext cx="3977640" cy="594360"/>
-          </a:xfrm>
-          <a:prstGeom prst="roundRect">
-            <a:avLst>
-              <a:gd name="adj" fmla="val 13846"/>
-            </a:avLst>
-          </a:prstGeom>
-          <a:solidFill>
-            <a:srgbClr val="FFFFFF"/>
-          </a:solidFill>
-          <a:ln w="9525">
-            <a:solidFill>
-              <a:srgbClr val="ECE6DA"/>
-            </a:solidFill>
-            <a:prstDash val="solid"/>
-          </a:ln>
-          <a:effectLst>
-            <a:outerShdw sx="100000" sy="100000" kx="0" ky="0" algn="bl" rotWithShape="0" blurRad="76200" dist="25400" dir="5400000">
-              <a:srgbClr val="CBD5E1">
-                <a:alpha val="25000"/>
-              </a:srgbClr>
-            </a:outerShdw>
-          </a:effectLst>
-        </p:spPr>
-      </p:sp>
-      <p:sp>
-        <p:nvSpPr>
-          <p:cNvPr id="31" name="Shape 29"/>
-          <p:cNvSpPr/>
-          <p:nvPr/>
-        </p:nvSpPr>
-        <p:spPr>
-          <a:xfrm>
-            <a:off x="4800600" y="4005072"/>
-            <a:ext cx="109728" cy="594360"/>
-          </a:xfrm>
-          <a:prstGeom prst="roundRect">
-            <a:avLst>
-              <a:gd name="adj" fmla="val 33333"/>
-            </a:avLst>
-          </a:prstGeom>
-          <a:solidFill>
-            <a:srgbClr val="8E99B0"/>
-          </a:solidFill>
-          <a:ln/>
-        </p:spPr>
-      </p:sp>
-      <p:sp>
-        <p:nvSpPr>
-          <p:cNvPr id="32" name="Text 30"/>
-          <p:cNvSpPr/>
-          <p:nvPr/>
-        </p:nvSpPr>
-        <p:spPr>
-          <a:xfrm>
-            <a:off x="5029200" y="4078224"/>
-            <a:ext cx="1280160" cy="228600"/>
-          </a:xfrm>
-          <a:prstGeom prst="rect">
-            <a:avLst/>
-          </a:prstGeom>
-          <a:noFill/>
-          <a:ln/>
-        </p:spPr>
-        <p:txBody>
-          <a:bodyPr wrap="square" rtlCol="0" anchor="ctr"/>
-          <a:lstStyle/>
-          <a:p>
-            <a:pPr indent="0" marL="0">
-              <a:buNone/>
-            </a:pPr>
-            <a:r>
-              <a:rPr lang="en-US" sz="1300" b="1" dirty="0">
-                <a:solidFill>
-                  <a:srgbClr val="8E99B0"/>
-                </a:solidFill>
-                <a:latin typeface="Calibri" pitchFamily="34" charset="0"/>
-                <a:ea typeface="Calibri" pitchFamily="34" charset="-122"/>
-                <a:cs typeface="Calibri" pitchFamily="34" charset="-120"/>
-              </a:rPr>
-              <a:t>Others</a:t>
-            </a:r>
-            <a:endParaRPr lang="en-US" sz="1300" dirty="0"/>
-          </a:p>
-        </p:txBody>
-      </p:sp>
-      <p:sp>
-        <p:nvSpPr>
-          <p:cNvPr id="33" name="Text 31"/>
-          <p:cNvSpPr/>
-          <p:nvPr/>
-        </p:nvSpPr>
-        <p:spPr>
-          <a:xfrm>
-            <a:off x="6309360" y="4078224"/>
-            <a:ext cx="1143000" cy="228600"/>
-          </a:xfrm>
-          <a:prstGeom prst="rect">
-            <a:avLst/>
-          </a:prstGeom>
-          <a:noFill/>
-          <a:ln/>
-        </p:spPr>
-        <p:txBody>
-          <a:bodyPr wrap="square" rtlCol="0" anchor="ctr"/>
-          <a:lstStyle/>
-          <a:p>
-            <a:pPr indent="0" marL="0">
-              <a:buNone/>
-            </a:pPr>
-            <a:r>
-              <a:rPr lang="en-US" sz="1200" b="1" dirty="0">
-                <a:solidFill>
-                  <a:srgbClr val="10182B"/>
-                </a:solidFill>
-                <a:latin typeface="Calibri" pitchFamily="34" charset="0"/>
-                <a:ea typeface="Calibri" pitchFamily="34" charset="-122"/>
-                <a:cs typeface="Calibri" pitchFamily="34" charset="-120"/>
-              </a:rPr>
-              <a:t>100K+ outlets</a:t>
-            </a:r>
-            <a:endParaRPr lang="en-US" sz="1200" dirty="0"/>
-          </a:p>
-        </p:txBody>
-      </p:sp>
-      <p:sp>
-        <p:nvSpPr>
-          <p:cNvPr id="34" name="Text 32"/>
-          <p:cNvSpPr/>
-          <p:nvPr/>
-        </p:nvSpPr>
-        <p:spPr>
-          <a:xfrm>
-            <a:off x="5029200" y="4334256"/>
-            <a:ext cx="3657600" cy="201168"/>
-          </a:xfrm>
-          <a:prstGeom prst="rect">
-            <a:avLst/>
-          </a:prstGeom>
-          <a:noFill/>
-          <a:ln/>
-        </p:spPr>
-        <p:txBody>
-          <a:bodyPr wrap="square" rtlCol="0" anchor="ctr"/>
-          <a:lstStyle/>
-          <a:p>
-            <a:pPr indent="0" marL="0">
-              <a:buNone/>
-            </a:pPr>
-            <a:r>
-              <a:rPr lang="en-US" sz="880" dirty="0">
-                <a:solidFill>
-                  <a:srgbClr val="4A5670"/>
-                </a:solidFill>
-                <a:latin typeface="Calibri" pitchFamily="34" charset="0"/>
-                <a:ea typeface="Calibri" pitchFamily="34" charset="-122"/>
-                <a:cs typeface="Calibri" pitchFamily="34" charset="-120"/>
-              </a:rPr>
-              <a:t>GoFrugal, Posist, Torqus, Billberry...</a:t>
-            </a:r>
-            <a:endParaRPr lang="en-US" sz="880" dirty="0"/>
-          </a:p>
-        </p:txBody>
-      </p:sp>
-      <p:sp>
-        <p:nvSpPr>
-          <p:cNvPr id="35" name="Shape 33"/>
-          <p:cNvSpPr/>
-          <p:nvPr/>
-        </p:nvSpPr>
-        <p:spPr>
-          <a:xfrm>
-            <a:off x="4800600" y="4663440"/>
-            <a:ext cx="3977640" cy="329184"/>
-          </a:xfrm>
-          <a:prstGeom prst="roundRect">
-            <a:avLst>
-              <a:gd name="adj" fmla="val 19444"/>
-            </a:avLst>
-          </a:prstGeom>
-          <a:solidFill>
-            <a:srgbClr val="ECFDF5"/>
-          </a:solidFill>
-          <a:ln w="9525">
-            <a:solidFill>
-              <a:srgbClr val="177A3D"/>
-            </a:solidFill>
-            <a:prstDash val="solid"/>
-          </a:ln>
-        </p:spPr>
-      </p:sp>
-      <p:sp>
-        <p:nvSpPr>
-          <p:cNvPr id="36" name="Text 34"/>
-          <p:cNvSpPr/>
-          <p:nvPr/>
-        </p:nvSpPr>
-        <p:spPr>
-          <a:xfrm>
-            <a:off x="4937760" y="4718304"/>
-            <a:ext cx="3749040" cy="237744"/>
-          </a:xfrm>
-          <a:prstGeom prst="rect">
-            <a:avLst/>
-          </a:prstGeom>
-          <a:noFill/>
-          <a:ln/>
-        </p:spPr>
-        <p:txBody>
-          <a:bodyPr wrap="square" rtlCol="0" anchor="ctr"/>
-          <a:lstStyle/>
-          <a:p>
-            <a:pPr indent="0" marL="0">
-              <a:buNone/>
-            </a:pPr>
-            <a:r>
-              <a:rPr lang="en-US" sz="880" b="1" dirty="0">
-                <a:solidFill>
-                  <a:srgbClr val="177A3D"/>
-                </a:solidFill>
-                <a:latin typeface="Calibri" pitchFamily="34" charset="0"/>
-                <a:ea typeface="Calibri" pitchFamily="34" charset="-122"/>
-                <a:cs typeface="Calibri" pitchFamily="34" charset="-120"/>
-              </a:rPr>
-              <a:t>✓  Revenue-sharing model: POS partner gets % of PF — no upfront cost, pure incentive alignment</a:t>
-            </a:r>
-            <a:endParaRPr lang="en-US" sz="880" dirty="0"/>
-          </a:p>
-        </p:txBody>
-      </p:sp>
-      <p:sp>
-        <p:nvSpPr>
-          <p:cNvPr id="37" name="Text 35"/>
+        </p:spPr>
+      </p:sp>
+      <p:sp>
+        <p:nvSpPr>
+          <p:cNvPr id="39" name="Text 37"/>
+          <p:cNvSpPr/>
+          <p:nvPr/>
+        </p:nvSpPr>
+        <p:spPr>
+          <a:xfrm>
+            <a:off x="7159752" y="4142232"/>
+            <a:ext cx="1664208" cy="237744"/>
+          </a:xfrm>
+          <a:prstGeom prst="rect">
+            <a:avLst/>
+          </a:prstGeom>
+          <a:noFill/>
+          <a:ln/>
+        </p:spPr>
+        <p:txBody>
+          <a:bodyPr wrap="square" rtlCol="0" anchor="ctr"/>
+          <a:lstStyle/>
+          <a:p>
+            <a:pPr algn="ctr" indent="0" marL="0">
+              <a:buNone/>
+            </a:pPr>
+            <a:r>
+              <a:rPr lang="en-US" sz="820" b="1" dirty="0">
+                <a:solidFill>
+                  <a:srgbClr val="15803D"/>
+                </a:solidFill>
+                <a:latin typeface="Calibri" pitchFamily="34" charset="0"/>
+                <a:ea typeface="Calibri" pitchFamily="34" charset="-122"/>
+                <a:cs typeface="Calibri" pitchFamily="34" charset="-120"/>
+              </a:rPr>
+              <a:t>Serial entrepreneur</a:t>
+            </a:r>
+            <a:endParaRPr lang="en-US" sz="820" dirty="0"/>
+          </a:p>
+        </p:txBody>
+      </p:sp>
+      <p:sp>
+        <p:nvSpPr>
+          <p:cNvPr id="40" name="Text 38"/>
+          <p:cNvSpPr/>
+          <p:nvPr/>
+        </p:nvSpPr>
+        <p:spPr>
+          <a:xfrm>
+            <a:off x="502920" y="4645152"/>
+            <a:ext cx="8229600" cy="365760"/>
+          </a:xfrm>
+          <a:prstGeom prst="rect">
+            <a:avLst/>
+          </a:prstGeom>
+          <a:noFill/>
+          <a:ln/>
+        </p:spPr>
+        <p:txBody>
+          <a:bodyPr wrap="square" rtlCol="0" anchor="ctr"/>
+          <a:lstStyle/>
+          <a:p>
+            <a:pPr indent="0" marL="0">
+              <a:buNone/>
+            </a:pPr>
+            <a:r>
+              <a:rPr lang="en-US" sz="950" i="1" dirty="0">
+                <a:solidFill>
+                  <a:srgbClr val="475569"/>
+                </a:solidFill>
+                <a:latin typeface="Calibri" pitchFamily="34" charset="0"/>
+                <a:ea typeface="Calibri" pitchFamily="34" charset="-122"/>
+                <a:cs typeface="Calibri" pitchFamily="34" charset="-120"/>
+              </a:rPr>
+              <a:t>Mathew Varkey — Co-Founder · Co-founded Tipplr; Founder of Vanbey Services; 30+ yrs marketing &amp; BD across Asia; serial startup mentor &amp; investor. Leads GTM &amp; distribution. Three of the founders built and exited Tipplr together — Rasoi inherits their live ONDC integration.</a:t>
+            </a:r>
+            <a:endParaRPr lang="en-US" sz="950" dirty="0"/>
+          </a:p>
+        </p:txBody>
+      </p:sp>
+      <p:sp>
+        <p:nvSpPr>
+          <p:cNvPr id="41" name="Text 39"/>
           <p:cNvSpPr/>
           <p:nvPr/>
         </p:nvSpPr>
@@ -14335,13 +14681,13 @@
             <a:r>
               <a:rPr lang="en-US" sz="1000" b="1" dirty="0">
                 <a:solidFill>
-                  <a:srgbClr val="8E99B0"/>
-                </a:solidFill>
-                <a:latin typeface="Calibri" pitchFamily="34" charset="0"/>
-                <a:ea typeface="Calibri" pitchFamily="34" charset="-122"/>
-                <a:cs typeface="Calibri" pitchFamily="34" charset="-120"/>
-              </a:rPr>
-              <a:t>5A</a:t>
+                  <a:srgbClr val="94A3B8"/>
+                </a:solidFill>
+                <a:latin typeface="Calibri" pitchFamily="34" charset="0"/>
+                <a:ea typeface="Calibri" pitchFamily="34" charset="-122"/>
+                <a:cs typeface="Calibri" pitchFamily="34" charset="-120"/>
+              </a:rPr>
+              <a:t>15</a:t>
             </a:r>
             <a:endParaRPr lang="en-US" sz="1000" dirty="0"/>
           </a:p>
@@ -14349,1351 +14695,7 @@
       </p:sp>
       <p:sp>
         <p:nvSpPr>
-          <p:cNvPr id="38" name="Shape 36"/>
-          <p:cNvSpPr/>
-          <p:nvPr/>
-        </p:nvSpPr>
-        <p:spPr>
-          <a:xfrm>
-            <a:off x="0" y="5074920"/>
-            <a:ext cx="9144000" cy="68580"/>
-          </a:xfrm>
-          <a:prstGeom prst="rect">
-            <a:avLst/>
-          </a:prstGeom>
-          <a:solidFill>
-            <a:srgbClr val="E8520A"/>
-          </a:solidFill>
-          <a:ln/>
-        </p:spPr>
-      </p:sp>
-    </p:spTree>
-  </p:cSld>
-  <p:clrMapOvr>
-    <a:masterClrMapping/>
-  </p:clrMapOvr>
-</p:sld>
-</file>
-
-<file path=ppt/slides/slide18.xml><?xml version="1.0" encoding="utf-8"?>
-<p:sld xmlns:a="http://schemas.openxmlformats.org/drawingml/2006/main" xmlns:r="http://schemas.openxmlformats.org/officeDocument/2006/relationships" xmlns:p="http://schemas.openxmlformats.org/presentationml/2006/main">
-  <p:cSld name="Slide 2">
-    <p:bg>
-      <p:bgPr>
-        <a:solidFill>
-          <a:srgbClr val="F2F5F9"/>
-        </a:solidFill>
-      </p:bgPr>
-    </p:bg>
-    <p:spTree>
-      <p:nvGrpSpPr>
-        <p:cNvPr id="1" name=""/>
-        <p:cNvGrpSpPr/>
-        <p:nvPr/>
-      </p:nvGrpSpPr>
-      <p:grpSpPr>
-        <a:xfrm>
-          <a:off x="0" y="0"/>
-          <a:ext cx="0" cy="0"/>
-          <a:chOff x="0" y="0"/>
-          <a:chExt cx="0" cy="0"/>
-        </a:xfrm>
-      </p:grpSpPr>
-      <p:sp>
-        <p:nvSpPr>
-          <p:cNvPr id="2" name="Text 0"/>
-          <p:cNvSpPr/>
-          <p:nvPr/>
-        </p:nvSpPr>
-        <p:spPr>
-          <a:xfrm>
-            <a:off x="502920" y="292608"/>
-            <a:ext cx="8229600" cy="274320"/>
-          </a:xfrm>
-          <a:prstGeom prst="rect">
-            <a:avLst/>
-          </a:prstGeom>
-          <a:noFill/>
-          <a:ln/>
-        </p:spPr>
-        <p:txBody>
-          <a:bodyPr wrap="square" rtlCol="0" anchor="ctr"/>
-          <a:lstStyle/>
-          <a:p>
-            <a:pPr indent="0" marL="0">
-              <a:buNone/>
-            </a:pPr>
-            <a:r>
-              <a:rPr lang="en-US" sz="1100" b="1" spc="300" kern="0" dirty="0">
-                <a:solidFill>
-                  <a:srgbClr val="6B2BD9"/>
-                </a:solidFill>
-                <a:latin typeface="Calibri" pitchFamily="34" charset="0"/>
-                <a:ea typeface="Calibri" pitchFamily="34" charset="-122"/>
-                <a:cs typeface="Calibri" pitchFamily="34" charset="-120"/>
-              </a:rPr>
-              <a:t>WHY WE WIN · MOAT &amp; USP</a:t>
-            </a:r>
-            <a:endParaRPr lang="en-US" sz="1100" dirty="0"/>
-          </a:p>
-        </p:txBody>
-      </p:sp>
-      <p:sp>
-        <p:nvSpPr>
-          <p:cNvPr id="3" name="Text 1"/>
-          <p:cNvSpPr/>
-          <p:nvPr/>
-        </p:nvSpPr>
-        <p:spPr>
-          <a:xfrm>
-            <a:off x="502920" y="566928"/>
-            <a:ext cx="8321040" cy="548640"/>
-          </a:xfrm>
-          <a:prstGeom prst="rect">
-            <a:avLst/>
-          </a:prstGeom>
-          <a:noFill/>
-          <a:ln/>
-        </p:spPr>
-        <p:txBody>
-          <a:bodyPr wrap="square" rtlCol="0" anchor="ctr"/>
-          <a:lstStyle/>
-          <a:p>
-            <a:pPr indent="0" marL="0">
-              <a:buNone/>
-            </a:pPr>
-            <a:r>
-              <a:rPr lang="en-US" sz="2700" b="1" dirty="0">
-                <a:solidFill>
-                  <a:srgbClr val="10182B"/>
-                </a:solidFill>
-                <a:latin typeface="Calibri" pitchFamily="34" charset="0"/>
-                <a:ea typeface="Calibri" pitchFamily="34" charset="-122"/>
-                <a:cs typeface="Calibri" pitchFamily="34" charset="-120"/>
-              </a:rPr>
-              <a:t>Five unfair advantages. None of them copyable.</a:t>
-            </a:r>
-            <a:endParaRPr lang="en-US" sz="2700" dirty="0"/>
-          </a:p>
-        </p:txBody>
-      </p:sp>
-      <p:sp>
-        <p:nvSpPr>
-          <p:cNvPr id="4" name="Shape 2"/>
-          <p:cNvSpPr/>
-          <p:nvPr/>
-        </p:nvSpPr>
-        <p:spPr>
-          <a:xfrm>
-            <a:off x="502920" y="1298448"/>
-            <a:ext cx="3977640" cy="1572768"/>
-          </a:xfrm>
-          <a:prstGeom prst="roundRect">
-            <a:avLst>
-              <a:gd name="adj" fmla="val 5814"/>
-            </a:avLst>
-          </a:prstGeom>
-          <a:solidFill>
-            <a:srgbClr val="FFFFFF"/>
-          </a:solidFill>
-          <a:ln w="9525">
-            <a:solidFill>
-              <a:srgbClr val="ECE6DA"/>
-            </a:solidFill>
-            <a:prstDash val="solid"/>
-          </a:ln>
-          <a:effectLst>
-            <a:outerShdw sx="100000" sy="100000" kx="0" ky="0" algn="bl" rotWithShape="0" blurRad="76200" dist="25400" dir="5400000">
-              <a:srgbClr val="CBD5E1">
-                <a:alpha val="25000"/>
-              </a:srgbClr>
-            </a:outerShdw>
-          </a:effectLst>
-        </p:spPr>
-      </p:sp>
-      <p:sp>
-        <p:nvSpPr>
-          <p:cNvPr id="5" name="Shape 3"/>
-          <p:cNvSpPr/>
-          <p:nvPr/>
-        </p:nvSpPr>
-        <p:spPr>
-          <a:xfrm>
-            <a:off x="502920" y="1298448"/>
-            <a:ext cx="3977640" cy="91440"/>
-          </a:xfrm>
-          <a:prstGeom prst="rect">
-            <a:avLst/>
-          </a:prstGeom>
-          <a:solidFill>
-            <a:srgbClr val="6B2BD9"/>
-          </a:solidFill>
-          <a:ln/>
-        </p:spPr>
-      </p:sp>
-      <p:sp>
-        <p:nvSpPr>
-          <p:cNvPr id="6" name="Text 4"/>
-          <p:cNvSpPr/>
-          <p:nvPr/>
-        </p:nvSpPr>
-        <p:spPr>
-          <a:xfrm>
-            <a:off x="667512" y="1463040"/>
-            <a:ext cx="457200" cy="274320"/>
-          </a:xfrm>
-          <a:prstGeom prst="rect">
-            <a:avLst/>
-          </a:prstGeom>
-          <a:noFill/>
-          <a:ln/>
-        </p:spPr>
-        <p:txBody>
-          <a:bodyPr wrap="square" rtlCol="0" anchor="ctr"/>
-          <a:lstStyle/>
-          <a:p>
-            <a:pPr indent="0" marL="0">
-              <a:buNone/>
-            </a:pPr>
-            <a:r>
-              <a:rPr lang="en-US" sz="1800" b="1" dirty="0">
-                <a:solidFill>
-                  <a:srgbClr val="E5E7EB"/>
-                </a:solidFill>
-                <a:latin typeface="Calibri" pitchFamily="34" charset="0"/>
-                <a:ea typeface="Calibri" pitchFamily="34" charset="-122"/>
-                <a:cs typeface="Calibri" pitchFamily="34" charset="-120"/>
-              </a:rPr>
-              <a:t>01</a:t>
-            </a:r>
-            <a:endParaRPr lang="en-US" sz="1800" dirty="0"/>
-          </a:p>
-        </p:txBody>
-      </p:sp>
-      <p:sp>
-        <p:nvSpPr>
-          <p:cNvPr id="7" name="Text 5"/>
-          <p:cNvSpPr/>
-          <p:nvPr/>
-        </p:nvSpPr>
-        <p:spPr>
-          <a:xfrm>
-            <a:off x="667512" y="1463040"/>
-            <a:ext cx="3566160" cy="347472"/>
-          </a:xfrm>
-          <a:prstGeom prst="rect">
-            <a:avLst/>
-          </a:prstGeom>
-          <a:noFill/>
-          <a:ln/>
-        </p:spPr>
-        <p:txBody>
-          <a:bodyPr wrap="square" rtlCol="0" anchor="ctr"/>
-          <a:lstStyle/>
-          <a:p>
-            <a:pPr indent="0" marL="0">
-              <a:buNone/>
-            </a:pPr>
-            <a:r>
-              <a:rPr lang="en-US" sz="1250" b="1" dirty="0">
-                <a:solidFill>
-                  <a:srgbClr val="10182B"/>
-                </a:solidFill>
-                <a:latin typeface="Calibri" pitchFamily="34" charset="0"/>
-                <a:ea typeface="Calibri" pitchFamily="34" charset="-122"/>
-                <a:cs typeface="Calibri" pitchFamily="34" charset="-120"/>
-              </a:rPr>
-              <a:t>🧠  We score the business, not the paperwork</a:t>
-            </a:r>
-            <a:endParaRPr lang="en-US" sz="1250" dirty="0"/>
-          </a:p>
-        </p:txBody>
-      </p:sp>
-      <p:sp>
-        <p:nvSpPr>
-          <p:cNvPr id="8" name="Text 6"/>
-          <p:cNvSpPr/>
-          <p:nvPr/>
-        </p:nvSpPr>
-        <p:spPr>
-          <a:xfrm>
-            <a:off x="667512" y="1828800"/>
-            <a:ext cx="3611880" cy="640080"/>
-          </a:xfrm>
-          <a:prstGeom prst="rect">
-            <a:avLst/>
-          </a:prstGeom>
-          <a:noFill/>
-          <a:ln/>
-        </p:spPr>
-        <p:txBody>
-          <a:bodyPr wrap="square" rtlCol="0" anchor="ctr"/>
-          <a:lstStyle/>
-          <a:p>
-            <a:pPr indent="0" marL="0">
-              <a:lnSpc>
-                <a:spcPts val="1050"/>
-              </a:lnSpc>
-              <a:buNone/>
-            </a:pPr>
-            <a:r>
-              <a:rPr lang="en-US" sz="850" dirty="0">
-                <a:solidFill>
-                  <a:srgbClr val="4A5670"/>
-                </a:solidFill>
-                <a:latin typeface="Calibri" pitchFamily="34" charset="0"/>
-                <a:ea typeface="Calibri" pitchFamily="34" charset="-122"/>
-                <a:cs typeface="Calibri" pitchFamily="34" charset="-120"/>
-              </a:rPr>
-              <a:t>6-factor HORECA model: outlet margin, Q-Q growth, location, FSA ambience, sales, bureau. CIBIL is our smallest weight. Every competitor builds around it. That single inversion lets us approve outlets banks reject — at lower NPA.</a:t>
-            </a:r>
-            <a:endParaRPr lang="en-US" sz="850" dirty="0"/>
-          </a:p>
-        </p:txBody>
-      </p:sp>
-      <p:sp>
-        <p:nvSpPr>
-          <p:cNvPr id="9" name="Shape 7"/>
-          <p:cNvSpPr/>
-          <p:nvPr/>
-        </p:nvSpPr>
-        <p:spPr>
-          <a:xfrm>
-            <a:off x="667512" y="2487168"/>
-            <a:ext cx="3611880" cy="256032"/>
-          </a:xfrm>
-          <a:prstGeom prst="roundRect">
-            <a:avLst>
-              <a:gd name="adj" fmla="val 17857"/>
-            </a:avLst>
-          </a:prstGeom>
-          <a:solidFill>
-            <a:srgbClr val="F5F3FF"/>
-          </a:solidFill>
-          <a:ln/>
-        </p:spPr>
-      </p:sp>
-      <p:sp>
-        <p:nvSpPr>
-          <p:cNvPr id="10" name="Text 8"/>
-          <p:cNvSpPr/>
-          <p:nvPr/>
-        </p:nvSpPr>
-        <p:spPr>
-          <a:xfrm>
-            <a:off x="722376" y="2523744"/>
-            <a:ext cx="3520440" cy="201168"/>
-          </a:xfrm>
-          <a:prstGeom prst="rect">
-            <a:avLst/>
-          </a:prstGeom>
-          <a:noFill/>
-          <a:ln/>
-        </p:spPr>
-        <p:txBody>
-          <a:bodyPr wrap="square" rtlCol="0" anchor="ctr"/>
-          <a:lstStyle/>
-          <a:p>
-            <a:pPr indent="0" marL="0">
-              <a:buNone/>
-            </a:pPr>
-            <a:r>
-              <a:rPr lang="en-US" sz="780" b="1" dirty="0">
-                <a:solidFill>
-                  <a:srgbClr val="6B2BD9"/>
-                </a:solidFill>
-                <a:latin typeface="Calibri" pitchFamily="34" charset="0"/>
-                <a:ea typeface="Calibri" pitchFamily="34" charset="-122"/>
-                <a:cs typeface="Calibri" pitchFamily="34" charset="-120"/>
-              </a:rPr>
-              <a:t>🔒  Proprietary scoring model calibrated to HORECA — no competitor dataset, 6-month rebuild minimum</a:t>
-            </a:r>
-            <a:endParaRPr lang="en-US" sz="780" dirty="0"/>
-          </a:p>
-        </p:txBody>
-      </p:sp>
-      <p:sp>
-        <p:nvSpPr>
-          <p:cNvPr id="11" name="Shape 9"/>
-          <p:cNvSpPr/>
-          <p:nvPr/>
-        </p:nvSpPr>
-        <p:spPr>
-          <a:xfrm>
-            <a:off x="4818888" y="1298448"/>
-            <a:ext cx="3977640" cy="1572768"/>
-          </a:xfrm>
-          <a:prstGeom prst="roundRect">
-            <a:avLst>
-              <a:gd name="adj" fmla="val 5814"/>
-            </a:avLst>
-          </a:prstGeom>
-          <a:solidFill>
-            <a:srgbClr val="FFFFFF"/>
-          </a:solidFill>
-          <a:ln w="9525">
-            <a:solidFill>
-              <a:srgbClr val="ECE6DA"/>
-            </a:solidFill>
-            <a:prstDash val="solid"/>
-          </a:ln>
-          <a:effectLst>
-            <a:outerShdw sx="100000" sy="100000" kx="0" ky="0" algn="bl" rotWithShape="0" blurRad="76200" dist="25400" dir="5400000">
-              <a:srgbClr val="CBD5E1">
-                <a:alpha val="25000"/>
-              </a:srgbClr>
-            </a:outerShdw>
-          </a:effectLst>
-        </p:spPr>
-      </p:sp>
-      <p:sp>
-        <p:nvSpPr>
-          <p:cNvPr id="12" name="Shape 10"/>
-          <p:cNvSpPr/>
-          <p:nvPr/>
-        </p:nvSpPr>
-        <p:spPr>
-          <a:xfrm>
-            <a:off x="4818888" y="1298448"/>
-            <a:ext cx="3977640" cy="91440"/>
-          </a:xfrm>
-          <a:prstGeom prst="rect">
-            <a:avLst/>
-          </a:prstGeom>
-          <a:solidFill>
-            <a:srgbClr val="E8520A"/>
-          </a:solidFill>
-          <a:ln/>
-        </p:spPr>
-      </p:sp>
-      <p:sp>
-        <p:nvSpPr>
-          <p:cNvPr id="13" name="Text 11"/>
-          <p:cNvSpPr/>
-          <p:nvPr/>
-        </p:nvSpPr>
-        <p:spPr>
-          <a:xfrm>
-            <a:off x="4983480" y="1463040"/>
-            <a:ext cx="457200" cy="274320"/>
-          </a:xfrm>
-          <a:prstGeom prst="rect">
-            <a:avLst/>
-          </a:prstGeom>
-          <a:noFill/>
-          <a:ln/>
-        </p:spPr>
-        <p:txBody>
-          <a:bodyPr wrap="square" rtlCol="0" anchor="ctr"/>
-          <a:lstStyle/>
-          <a:p>
-            <a:pPr indent="0" marL="0">
-              <a:buNone/>
-            </a:pPr>
-            <a:r>
-              <a:rPr lang="en-US" sz="1800" b="1" dirty="0">
-                <a:solidFill>
-                  <a:srgbClr val="E5E7EB"/>
-                </a:solidFill>
-                <a:latin typeface="Calibri" pitchFamily="34" charset="0"/>
-                <a:ea typeface="Calibri" pitchFamily="34" charset="-122"/>
-                <a:cs typeface="Calibri" pitchFamily="34" charset="-120"/>
-              </a:rPr>
-              <a:t>02</a:t>
-            </a:r>
-            <a:endParaRPr lang="en-US" sz="1800" dirty="0"/>
-          </a:p>
-        </p:txBody>
-      </p:sp>
-      <p:sp>
-        <p:nvSpPr>
-          <p:cNvPr id="14" name="Text 12"/>
-          <p:cNvSpPr/>
-          <p:nvPr/>
-        </p:nvSpPr>
-        <p:spPr>
-          <a:xfrm>
-            <a:off x="4983480" y="1463040"/>
-            <a:ext cx="3566160" cy="347472"/>
-          </a:xfrm>
-          <a:prstGeom prst="rect">
-            <a:avLst/>
-          </a:prstGeom>
-          <a:noFill/>
-          <a:ln/>
-        </p:spPr>
-        <p:txBody>
-          <a:bodyPr wrap="square" rtlCol="0" anchor="ctr"/>
-          <a:lstStyle/>
-          <a:p>
-            <a:pPr indent="0" marL="0">
-              <a:buNone/>
-            </a:pPr>
-            <a:r>
-              <a:rPr lang="en-US" sz="1250" b="1" dirty="0">
-                <a:solidFill>
-                  <a:srgbClr val="10182B"/>
-                </a:solidFill>
-                <a:latin typeface="Calibri" pitchFamily="34" charset="0"/>
-                <a:ea typeface="Calibri" pitchFamily="34" charset="-122"/>
-                <a:cs typeface="Calibri" pitchFamily="34" charset="-120"/>
-              </a:rPr>
-              <a:t>⏰  Daily EMI at 9 PM — when the till is full</a:t>
-            </a:r>
-            <a:endParaRPr lang="en-US" sz="1250" dirty="0"/>
-          </a:p>
-        </p:txBody>
-      </p:sp>
-      <p:sp>
-        <p:nvSpPr>
-          <p:cNvPr id="15" name="Text 13"/>
-          <p:cNvSpPr/>
-          <p:nvPr/>
-        </p:nvSpPr>
-        <p:spPr>
-          <a:xfrm>
-            <a:off x="4983480" y="1828800"/>
-            <a:ext cx="3611880" cy="640080"/>
-          </a:xfrm>
-          <a:prstGeom prst="rect">
-            <a:avLst/>
-          </a:prstGeom>
-          <a:noFill/>
-          <a:ln/>
-        </p:spPr>
-        <p:txBody>
-          <a:bodyPr wrap="square" rtlCol="0" anchor="ctr"/>
-          <a:lstStyle/>
-          <a:p>
-            <a:pPr indent="0" marL="0">
-              <a:lnSpc>
-                <a:spcPts val="1050"/>
-              </a:lnSpc>
-              <a:buNone/>
-            </a:pPr>
-            <a:r>
-              <a:rPr lang="en-US" sz="850" dirty="0">
-                <a:solidFill>
-                  <a:srgbClr val="4A5670"/>
-                </a:solidFill>
-                <a:latin typeface="Calibri" pitchFamily="34" charset="0"/>
-                <a:ea typeface="Calibri" pitchFamily="34" charset="-122"/>
-                <a:cs typeface="Calibri" pitchFamily="34" charset="-120"/>
-              </a:rPr>
-              <a:t>HORECA earns daily. We collect daily, at peak. A bad Tuesday costs ₹3,500 — not ₹1,05,000. Monthly NACH competitors manufacture defaults by design. Our multi-bank SI waterfall is structurally impossible to replicate on monthly-EMI architecture.</a:t>
-            </a:r>
-            <a:endParaRPr lang="en-US" sz="850" dirty="0"/>
-          </a:p>
-        </p:txBody>
-      </p:sp>
-      <p:sp>
-        <p:nvSpPr>
-          <p:cNvPr id="16" name="Shape 14"/>
-          <p:cNvSpPr/>
-          <p:nvPr/>
-        </p:nvSpPr>
-        <p:spPr>
-          <a:xfrm>
-            <a:off x="4983480" y="2487168"/>
-            <a:ext cx="3611880" cy="256032"/>
-          </a:xfrm>
-          <a:prstGeom prst="roundRect">
-            <a:avLst>
-              <a:gd name="adj" fmla="val 17857"/>
-            </a:avLst>
-          </a:prstGeom>
-          <a:solidFill>
-            <a:srgbClr val="F5F3FF"/>
-          </a:solidFill>
-          <a:ln/>
-        </p:spPr>
-      </p:sp>
-      <p:sp>
-        <p:nvSpPr>
-          <p:cNvPr id="17" name="Text 15"/>
-          <p:cNvSpPr/>
-          <p:nvPr/>
-        </p:nvSpPr>
-        <p:spPr>
-          <a:xfrm>
-            <a:off x="5038344" y="2523744"/>
-            <a:ext cx="3520440" cy="201168"/>
-          </a:xfrm>
-          <a:prstGeom prst="rect">
-            <a:avLst/>
-          </a:prstGeom>
-          <a:noFill/>
-          <a:ln/>
-        </p:spPr>
-        <p:txBody>
-          <a:bodyPr wrap="square" rtlCol="0" anchor="ctr"/>
-          <a:lstStyle/>
-          <a:p>
-            <a:pPr indent="0" marL="0">
-              <a:buNone/>
-            </a:pPr>
-            <a:r>
-              <a:rPr lang="en-US" sz="780" b="1" dirty="0">
-                <a:solidFill>
-                  <a:srgbClr val="6B2BD9"/>
-                </a:solidFill>
-                <a:latin typeface="Calibri" pitchFamily="34" charset="0"/>
-                <a:ea typeface="Calibri" pitchFamily="34" charset="-122"/>
-                <a:cs typeface="Calibri" pitchFamily="34" charset="-120"/>
-              </a:rPr>
-              <a:t>🔒  Requires SI waterfall + daily bureau-reporting design — not retrofittable onto NACH infrastructure</a:t>
-            </a:r>
-            <a:endParaRPr lang="en-US" sz="780" dirty="0"/>
-          </a:p>
-        </p:txBody>
-      </p:sp>
-      <p:sp>
-        <p:nvSpPr>
-          <p:cNvPr id="18" name="Shape 16"/>
-          <p:cNvSpPr/>
-          <p:nvPr/>
-        </p:nvSpPr>
-        <p:spPr>
-          <a:xfrm>
-            <a:off x="502920" y="3017520"/>
-            <a:ext cx="3977640" cy="1572768"/>
-          </a:xfrm>
-          <a:prstGeom prst="roundRect">
-            <a:avLst>
-              <a:gd name="adj" fmla="val 5814"/>
-            </a:avLst>
-          </a:prstGeom>
-          <a:solidFill>
-            <a:srgbClr val="FFFFFF"/>
-          </a:solidFill>
-          <a:ln w="9525">
-            <a:solidFill>
-              <a:srgbClr val="ECE6DA"/>
-            </a:solidFill>
-            <a:prstDash val="solid"/>
-          </a:ln>
-          <a:effectLst>
-            <a:outerShdw sx="100000" sy="100000" kx="0" ky="0" algn="bl" rotWithShape="0" blurRad="76200" dist="25400" dir="5400000">
-              <a:srgbClr val="CBD5E1">
-                <a:alpha val="25000"/>
-              </a:srgbClr>
-            </a:outerShdw>
-          </a:effectLst>
-        </p:spPr>
-      </p:sp>
-      <p:sp>
-        <p:nvSpPr>
-          <p:cNvPr id="19" name="Shape 17"/>
-          <p:cNvSpPr/>
-          <p:nvPr/>
-        </p:nvSpPr>
-        <p:spPr>
-          <a:xfrm>
-            <a:off x="502920" y="3017520"/>
-            <a:ext cx="3977640" cy="91440"/>
-          </a:xfrm>
-          <a:prstGeom prst="rect">
-            <a:avLst/>
-          </a:prstGeom>
-          <a:solidFill>
-            <a:srgbClr val="0E756C"/>
-          </a:solidFill>
-          <a:ln/>
-        </p:spPr>
-      </p:sp>
-      <p:sp>
-        <p:nvSpPr>
-          <p:cNvPr id="20" name="Text 18"/>
-          <p:cNvSpPr/>
-          <p:nvPr/>
-        </p:nvSpPr>
-        <p:spPr>
-          <a:xfrm>
-            <a:off x="667512" y="3182112"/>
-            <a:ext cx="457200" cy="274320"/>
-          </a:xfrm>
-          <a:prstGeom prst="rect">
-            <a:avLst/>
-          </a:prstGeom>
-          <a:noFill/>
-          <a:ln/>
-        </p:spPr>
-        <p:txBody>
-          <a:bodyPr wrap="square" rtlCol="0" anchor="ctr"/>
-          <a:lstStyle/>
-          <a:p>
-            <a:pPr indent="0" marL="0">
-              <a:buNone/>
-            </a:pPr>
-            <a:r>
-              <a:rPr lang="en-US" sz="1800" b="1" dirty="0">
-                <a:solidFill>
-                  <a:srgbClr val="E5E7EB"/>
-                </a:solidFill>
-                <a:latin typeface="Calibri" pitchFamily="34" charset="0"/>
-                <a:ea typeface="Calibri" pitchFamily="34" charset="-122"/>
-                <a:cs typeface="Calibri" pitchFamily="34" charset="-120"/>
-              </a:rPr>
-              <a:t>03</a:t>
-            </a:r>
-            <a:endParaRPr lang="en-US" sz="1800" dirty="0"/>
-          </a:p>
-        </p:txBody>
-      </p:sp>
-      <p:sp>
-        <p:nvSpPr>
-          <p:cNvPr id="21" name="Text 19"/>
-          <p:cNvSpPr/>
-          <p:nvPr/>
-        </p:nvSpPr>
-        <p:spPr>
-          <a:xfrm>
-            <a:off x="667512" y="3182112"/>
-            <a:ext cx="3566160" cy="347472"/>
-          </a:xfrm>
-          <a:prstGeom prst="rect">
-            <a:avLst/>
-          </a:prstGeom>
-          <a:noFill/>
-          <a:ln/>
-        </p:spPr>
-        <p:txBody>
-          <a:bodyPr wrap="square" rtlCol="0" anchor="ctr"/>
-          <a:lstStyle/>
-          <a:p>
-            <a:pPr indent="0" marL="0">
-              <a:buNone/>
-            </a:pPr>
-            <a:r>
-              <a:rPr lang="en-US" sz="1250" b="1" dirty="0">
-                <a:solidFill>
-                  <a:srgbClr val="10182B"/>
-                </a:solidFill>
-                <a:latin typeface="Calibri" pitchFamily="34" charset="0"/>
-                <a:ea typeface="Calibri" pitchFamily="34" charset="-122"/>
-                <a:cs typeface="Calibri" pitchFamily="34" charset="-120"/>
-              </a:rPr>
-              <a:t>📡  POS distribution — 150K+ outlets, near-zero CAC</a:t>
-            </a:r>
-            <a:endParaRPr lang="en-US" sz="1250" dirty="0"/>
-          </a:p>
-        </p:txBody>
-      </p:sp>
-      <p:sp>
-        <p:nvSpPr>
-          <p:cNvPr id="22" name="Text 20"/>
-          <p:cNvSpPr/>
-          <p:nvPr/>
-        </p:nvSpPr>
-        <p:spPr>
-          <a:xfrm>
-            <a:off x="667512" y="3547872"/>
-            <a:ext cx="3611880" cy="640080"/>
-          </a:xfrm>
-          <a:prstGeom prst="rect">
-            <a:avLst/>
-          </a:prstGeom>
-          <a:noFill/>
-          <a:ln/>
-        </p:spPr>
-        <p:txBody>
-          <a:bodyPr wrap="square" rtlCol="0" anchor="ctr"/>
-          <a:lstStyle/>
-          <a:p>
-            <a:pPr indent="0" marL="0">
-              <a:lnSpc>
-                <a:spcPts val="1050"/>
-              </a:lnSpc>
-              <a:buNone/>
-            </a:pPr>
-            <a:r>
-              <a:rPr lang="en-US" sz="850" dirty="0">
-                <a:solidFill>
-                  <a:srgbClr val="4A5670"/>
-                </a:solidFill>
-                <a:latin typeface="Calibri" pitchFamily="34" charset="0"/>
-                <a:ea typeface="Calibri" pitchFamily="34" charset="-122"/>
-                <a:cs typeface="Calibri" pitchFamily="34" charset="-120"/>
-              </a:rPr>
-              <a:t>Petpooja (150K outlets, 200 cities) + UrbanPiper (45K outlets, Zomato/Swiggy-backed) are our channel. Revenue-sharing model: no fixed cost, pure incentive alignment. Competitor field-sales CAC: ₹8,000–15,000/loan. Ours: near zero on repeat.</a:t>
-            </a:r>
-            <a:endParaRPr lang="en-US" sz="850" dirty="0"/>
-          </a:p>
-        </p:txBody>
-      </p:sp>
-      <p:sp>
-        <p:nvSpPr>
-          <p:cNvPr id="23" name="Shape 21"/>
-          <p:cNvSpPr/>
-          <p:nvPr/>
-        </p:nvSpPr>
-        <p:spPr>
-          <a:xfrm>
-            <a:off x="667512" y="4206240"/>
-            <a:ext cx="3611880" cy="256032"/>
-          </a:xfrm>
-          <a:prstGeom prst="roundRect">
-            <a:avLst>
-              <a:gd name="adj" fmla="val 17857"/>
-            </a:avLst>
-          </a:prstGeom>
-          <a:solidFill>
-            <a:srgbClr val="F5F3FF"/>
-          </a:solidFill>
-          <a:ln/>
-        </p:spPr>
-      </p:sp>
-      <p:sp>
-        <p:nvSpPr>
-          <p:cNvPr id="24" name="Text 22"/>
-          <p:cNvSpPr/>
-          <p:nvPr/>
-        </p:nvSpPr>
-        <p:spPr>
-          <a:xfrm>
-            <a:off x="722376" y="4242816"/>
-            <a:ext cx="3520440" cy="201168"/>
-          </a:xfrm>
-          <a:prstGeom prst="rect">
-            <a:avLst/>
-          </a:prstGeom>
-          <a:noFill/>
-          <a:ln/>
-        </p:spPr>
-        <p:txBody>
-          <a:bodyPr wrap="square" rtlCol="0" anchor="ctr"/>
-          <a:lstStyle/>
-          <a:p>
-            <a:pPr indent="0" marL="0">
-              <a:buNone/>
-            </a:pPr>
-            <a:r>
-              <a:rPr lang="en-US" sz="780" b="1" dirty="0">
-                <a:solidFill>
-                  <a:srgbClr val="6B2BD9"/>
-                </a:solidFill>
-                <a:latin typeface="Calibri" pitchFamily="34" charset="0"/>
-                <a:ea typeface="Calibri" pitchFamily="34" charset="-122"/>
-                <a:cs typeface="Calibri" pitchFamily="34" charset="-120"/>
-              </a:rPr>
-              <a:t>🔒  Exclusive channel relationships + real-time POS data for underwriting — competitors need ground ops</a:t>
-            </a:r>
-            <a:endParaRPr lang="en-US" sz="780" dirty="0"/>
-          </a:p>
-        </p:txBody>
-      </p:sp>
-      <p:sp>
-        <p:nvSpPr>
-          <p:cNvPr id="25" name="Shape 23"/>
-          <p:cNvSpPr/>
-          <p:nvPr/>
-        </p:nvSpPr>
-        <p:spPr>
-          <a:xfrm>
-            <a:off x="4818888" y="3017520"/>
-            <a:ext cx="3977640" cy="1572768"/>
-          </a:xfrm>
-          <a:prstGeom prst="roundRect">
-            <a:avLst>
-              <a:gd name="adj" fmla="val 5814"/>
-            </a:avLst>
-          </a:prstGeom>
-          <a:solidFill>
-            <a:srgbClr val="FFFFFF"/>
-          </a:solidFill>
-          <a:ln w="9525">
-            <a:solidFill>
-              <a:srgbClr val="ECE6DA"/>
-            </a:solidFill>
-            <a:prstDash val="solid"/>
-          </a:ln>
-          <a:effectLst>
-            <a:outerShdw sx="100000" sy="100000" kx="0" ky="0" algn="bl" rotWithShape="0" blurRad="76200" dist="25400" dir="5400000">
-              <a:srgbClr val="CBD5E1">
-                <a:alpha val="25000"/>
-              </a:srgbClr>
-            </a:outerShdw>
-          </a:effectLst>
-        </p:spPr>
-      </p:sp>
-      <p:sp>
-        <p:nvSpPr>
-          <p:cNvPr id="26" name="Shape 24"/>
-          <p:cNvSpPr/>
-          <p:nvPr/>
-        </p:nvSpPr>
-        <p:spPr>
-          <a:xfrm>
-            <a:off x="4818888" y="3017520"/>
-            <a:ext cx="3977640" cy="91440"/>
-          </a:xfrm>
-          <a:prstGeom prst="rect">
-            <a:avLst/>
-          </a:prstGeom>
-          <a:solidFill>
-            <a:srgbClr val="B45309"/>
-          </a:solidFill>
-          <a:ln/>
-        </p:spPr>
-      </p:sp>
-      <p:sp>
-        <p:nvSpPr>
-          <p:cNvPr id="27" name="Text 25"/>
-          <p:cNvSpPr/>
-          <p:nvPr/>
-        </p:nvSpPr>
-        <p:spPr>
-          <a:xfrm>
-            <a:off x="4983480" y="3182112"/>
-            <a:ext cx="457200" cy="274320"/>
-          </a:xfrm>
-          <a:prstGeom prst="rect">
-            <a:avLst/>
-          </a:prstGeom>
-          <a:noFill/>
-          <a:ln/>
-        </p:spPr>
-        <p:txBody>
-          <a:bodyPr wrap="square" rtlCol="0" anchor="ctr"/>
-          <a:lstStyle/>
-          <a:p>
-            <a:pPr indent="0" marL="0">
-              <a:buNone/>
-            </a:pPr>
-            <a:r>
-              <a:rPr lang="en-US" sz="1800" b="1" dirty="0">
-                <a:solidFill>
-                  <a:srgbClr val="E5E7EB"/>
-                </a:solidFill>
-                <a:latin typeface="Calibri" pitchFamily="34" charset="0"/>
-                <a:ea typeface="Calibri" pitchFamily="34" charset="-122"/>
-                <a:cs typeface="Calibri" pitchFamily="34" charset="-120"/>
-              </a:rPr>
-              <a:t>04</a:t>
-            </a:r>
-            <a:endParaRPr lang="en-US" sz="1800" dirty="0"/>
-          </a:p>
-        </p:txBody>
-      </p:sp>
-      <p:sp>
-        <p:nvSpPr>
-          <p:cNvPr id="28" name="Text 26"/>
-          <p:cNvSpPr/>
-          <p:nvPr/>
-        </p:nvSpPr>
-        <p:spPr>
-          <a:xfrm>
-            <a:off x="4983480" y="3182112"/>
-            <a:ext cx="3566160" cy="347472"/>
-          </a:xfrm>
-          <a:prstGeom prst="rect">
-            <a:avLst/>
-          </a:prstGeom>
-          <a:noFill/>
-          <a:ln/>
-        </p:spPr>
-        <p:txBody>
-          <a:bodyPr wrap="square" rtlCol="0" anchor="ctr"/>
-          <a:lstStyle/>
-          <a:p>
-            <a:pPr indent="0" marL="0">
-              <a:buNone/>
-            </a:pPr>
-            <a:r>
-              <a:rPr lang="en-US" sz="1250" b="1" dirty="0">
-                <a:solidFill>
-                  <a:srgbClr val="10182B"/>
-                </a:solidFill>
-                <a:latin typeface="Calibri" pitchFamily="34" charset="0"/>
-                <a:ea typeface="Calibri" pitchFamily="34" charset="-122"/>
-                <a:cs typeface="Calibri" pitchFamily="34" charset="-120"/>
-              </a:rPr>
-              <a:t>📊  30× repayment data — the RL model no one else can build</a:t>
-            </a:r>
-            <a:endParaRPr lang="en-US" sz="1250" dirty="0"/>
-          </a:p>
-        </p:txBody>
-      </p:sp>
-      <p:sp>
-        <p:nvSpPr>
-          <p:cNvPr id="29" name="Text 27"/>
-          <p:cNvSpPr/>
-          <p:nvPr/>
-        </p:nvSpPr>
-        <p:spPr>
-          <a:xfrm>
-            <a:off x="4983480" y="3547872"/>
-            <a:ext cx="3611880" cy="640080"/>
-          </a:xfrm>
-          <a:prstGeom prst="rect">
-            <a:avLst/>
-          </a:prstGeom>
-          <a:noFill/>
-          <a:ln/>
-        </p:spPr>
-        <p:txBody>
-          <a:bodyPr wrap="square" rtlCol="0" anchor="ctr"/>
-          <a:lstStyle/>
-          <a:p>
-            <a:pPr indent="0" marL="0">
-              <a:lnSpc>
-                <a:spcPts val="1050"/>
-              </a:lnSpc>
-              <a:buNone/>
-            </a:pPr>
-            <a:r>
-              <a:rPr lang="en-US" sz="850" dirty="0">
-                <a:solidFill>
-                  <a:srgbClr val="4A5670"/>
-                </a:solidFill>
-                <a:latin typeface="Calibri" pitchFamily="34" charset="0"/>
-                <a:ea typeface="Calibri" pitchFamily="34" charset="-122"/>
-                <a:cs typeface="Calibri" pitchFamily="34" charset="-120"/>
-              </a:rPr>
-              <a:t>Daily EMI = 365 signals per loan per year. Monthly lenders get 12. We are training a Reinforcement Learning model on labelled HORECA repayment data — a dataset that doesn't exist anywhere on Earth today. By month 18, no competitor can buy this moat.</a:t>
-            </a:r>
-            <a:endParaRPr lang="en-US" sz="850" dirty="0"/>
-          </a:p>
-        </p:txBody>
-      </p:sp>
-      <p:sp>
-        <p:nvSpPr>
-          <p:cNvPr id="30" name="Shape 28"/>
-          <p:cNvSpPr/>
-          <p:nvPr/>
-        </p:nvSpPr>
-        <p:spPr>
-          <a:xfrm>
-            <a:off x="4983480" y="4206240"/>
-            <a:ext cx="3611880" cy="256032"/>
-          </a:xfrm>
-          <a:prstGeom prst="roundRect">
-            <a:avLst>
-              <a:gd name="adj" fmla="val 17857"/>
-            </a:avLst>
-          </a:prstGeom>
-          <a:solidFill>
-            <a:srgbClr val="F5F3FF"/>
-          </a:solidFill>
-          <a:ln/>
-        </p:spPr>
-      </p:sp>
-      <p:sp>
-        <p:nvSpPr>
-          <p:cNvPr id="31" name="Text 29"/>
-          <p:cNvSpPr/>
-          <p:nvPr/>
-        </p:nvSpPr>
-        <p:spPr>
-          <a:xfrm>
-            <a:off x="5038344" y="4242816"/>
-            <a:ext cx="3520440" cy="201168"/>
-          </a:xfrm>
-          <a:prstGeom prst="rect">
-            <a:avLst/>
-          </a:prstGeom>
-          <a:noFill/>
-          <a:ln/>
-        </p:spPr>
-        <p:txBody>
-          <a:bodyPr wrap="square" rtlCol="0" anchor="ctr"/>
-          <a:lstStyle/>
-          <a:p>
-            <a:pPr indent="0" marL="0">
-              <a:buNone/>
-            </a:pPr>
-            <a:r>
-              <a:rPr lang="en-US" sz="780" b="1" dirty="0">
-                <a:solidFill>
-                  <a:srgbClr val="6B2BD9"/>
-                </a:solidFill>
-                <a:latin typeface="Calibri" pitchFamily="34" charset="0"/>
-                <a:ea typeface="Calibri" pitchFamily="34" charset="-122"/>
-                <a:cs typeface="Calibri" pitchFamily="34" charset="-120"/>
-              </a:rPr>
-              <a:t>🔒  Proprietary labelled HORECA default/repayment data — 18-month head start, cannot be acquired</a:t>
-            </a:r>
-            <a:endParaRPr lang="en-US" sz="780" dirty="0"/>
-          </a:p>
-        </p:txBody>
-      </p:sp>
-      <p:sp>
-        <p:nvSpPr>
-          <p:cNvPr id="32" name="Shape 30"/>
-          <p:cNvSpPr/>
-          <p:nvPr/>
-        </p:nvSpPr>
-        <p:spPr>
-          <a:xfrm>
-            <a:off x="4315968" y="4736592"/>
-            <a:ext cx="3977640" cy="1572768"/>
-          </a:xfrm>
-          <a:prstGeom prst="roundRect">
-            <a:avLst>
-              <a:gd name="adj" fmla="val 5814"/>
-            </a:avLst>
-          </a:prstGeom>
-          <a:solidFill>
-            <a:srgbClr val="FFFFFF"/>
-          </a:solidFill>
-          <a:ln w="9525">
-            <a:solidFill>
-              <a:srgbClr val="ECE6DA"/>
-            </a:solidFill>
-            <a:prstDash val="solid"/>
-          </a:ln>
-          <a:effectLst>
-            <a:outerShdw sx="100000" sy="100000" kx="0" ky="0" algn="bl" rotWithShape="0" blurRad="76200" dist="25400" dir="5400000">
-              <a:srgbClr val="CBD5E1">
-                <a:alpha val="25000"/>
-              </a:srgbClr>
-            </a:outerShdw>
-          </a:effectLst>
-        </p:spPr>
-      </p:sp>
-      <p:sp>
-        <p:nvSpPr>
-          <p:cNvPr id="33" name="Shape 31"/>
-          <p:cNvSpPr/>
-          <p:nvPr/>
-        </p:nvSpPr>
-        <p:spPr>
-          <a:xfrm>
-            <a:off x="4315968" y="4736592"/>
-            <a:ext cx="3977640" cy="91440"/>
-          </a:xfrm>
-          <a:prstGeom prst="rect">
-            <a:avLst/>
-          </a:prstGeom>
-          <a:solidFill>
-            <a:srgbClr val="177A3D"/>
-          </a:solidFill>
-          <a:ln/>
-        </p:spPr>
-      </p:sp>
-      <p:sp>
-        <p:nvSpPr>
-          <p:cNvPr id="34" name="Text 32"/>
-          <p:cNvSpPr/>
-          <p:nvPr/>
-        </p:nvSpPr>
-        <p:spPr>
-          <a:xfrm>
-            <a:off x="4480560" y="4901184"/>
-            <a:ext cx="457200" cy="274320"/>
-          </a:xfrm>
-          <a:prstGeom prst="rect">
-            <a:avLst/>
-          </a:prstGeom>
-          <a:noFill/>
-          <a:ln/>
-        </p:spPr>
-        <p:txBody>
-          <a:bodyPr wrap="square" rtlCol="0" anchor="ctr"/>
-          <a:lstStyle/>
-          <a:p>
-            <a:pPr indent="0" marL="0">
-              <a:buNone/>
-            </a:pPr>
-            <a:r>
-              <a:rPr lang="en-US" sz="1800" b="1" dirty="0">
-                <a:solidFill>
-                  <a:srgbClr val="E5E7EB"/>
-                </a:solidFill>
-                <a:latin typeface="Calibri" pitchFamily="34" charset="0"/>
-                <a:ea typeface="Calibri" pitchFamily="34" charset="-122"/>
-                <a:cs typeface="Calibri" pitchFamily="34" charset="-120"/>
-              </a:rPr>
-              <a:t>05</a:t>
-            </a:r>
-            <a:endParaRPr lang="en-US" sz="1800" dirty="0"/>
-          </a:p>
-        </p:txBody>
-      </p:sp>
-      <p:sp>
-        <p:nvSpPr>
-          <p:cNvPr id="35" name="Text 33"/>
-          <p:cNvSpPr/>
-          <p:nvPr/>
-        </p:nvSpPr>
-        <p:spPr>
-          <a:xfrm>
-            <a:off x="4480560" y="4901184"/>
-            <a:ext cx="3566160" cy="347472"/>
-          </a:xfrm>
-          <a:prstGeom prst="rect">
-            <a:avLst/>
-          </a:prstGeom>
-          <a:noFill/>
-          <a:ln/>
-        </p:spPr>
-        <p:txBody>
-          <a:bodyPr wrap="square" rtlCol="0" anchor="ctr"/>
-          <a:lstStyle/>
-          <a:p>
-            <a:pPr indent="0" marL="0">
-              <a:buNone/>
-            </a:pPr>
-            <a:r>
-              <a:rPr lang="en-US" sz="1250" b="1" dirty="0">
-                <a:solidFill>
-                  <a:srgbClr val="10182B"/>
-                </a:solidFill>
-                <a:latin typeface="Calibri" pitchFamily="34" charset="0"/>
-                <a:ea typeface="Calibri" pitchFamily="34" charset="-122"/>
-                <a:cs typeface="Calibri" pitchFamily="34" charset="-120"/>
-              </a:rPr>
-              <a:t>🛡️  RBI-ready policy stack — live, board-reviewed</a:t>
-            </a:r>
-            <a:endParaRPr lang="en-US" sz="1250" dirty="0"/>
-          </a:p>
-        </p:txBody>
-      </p:sp>
-      <p:sp>
-        <p:nvSpPr>
-          <p:cNvPr id="36" name="Text 34"/>
-          <p:cNvSpPr/>
-          <p:nvPr/>
-        </p:nvSpPr>
-        <p:spPr>
-          <a:xfrm>
-            <a:off x="4480560" y="5266944"/>
-            <a:ext cx="3611880" cy="640080"/>
-          </a:xfrm>
-          <a:prstGeom prst="rect">
-            <a:avLst/>
-          </a:prstGeom>
-          <a:noFill/>
-          <a:ln/>
-        </p:spPr>
-        <p:txBody>
-          <a:bodyPr wrap="square" rtlCol="0" anchor="ctr"/>
-          <a:lstStyle/>
-          <a:p>
-            <a:pPr indent="0" marL="0">
-              <a:lnSpc>
-                <a:spcPts val="1050"/>
-              </a:lnSpc>
-              <a:buNone/>
-            </a:pPr>
-            <a:r>
-              <a:rPr lang="en-US" sz="850" dirty="0">
-                <a:solidFill>
-                  <a:srgbClr val="4A5670"/>
-                </a:solidFill>
-                <a:latin typeface="Calibri" pitchFamily="34" charset="0"/>
-                <a:ea typeface="Calibri" pitchFamily="34" charset="-122"/>
-                <a:cs typeface="Calibri" pitchFamily="34" charset="-120"/>
-              </a:rPr>
-              <a:t>Credit policy, Collection &amp; Recovery Policy (Fair Practices Code), bureau framework — all written, reviewed, and board-ready. Most fintech NBFC applicants spend 6–9 months on this. We walk in with it done.</a:t>
-            </a:r>
-            <a:endParaRPr lang="en-US" sz="850" dirty="0"/>
-          </a:p>
-        </p:txBody>
-      </p:sp>
-      <p:sp>
-        <p:nvSpPr>
-          <p:cNvPr id="37" name="Shape 35"/>
-          <p:cNvSpPr/>
-          <p:nvPr/>
-        </p:nvSpPr>
-        <p:spPr>
-          <a:xfrm>
-            <a:off x="4480560" y="5925312"/>
-            <a:ext cx="3611880" cy="256032"/>
-          </a:xfrm>
-          <a:prstGeom prst="roundRect">
-            <a:avLst>
-              <a:gd name="adj" fmla="val 17857"/>
-            </a:avLst>
-          </a:prstGeom>
-          <a:solidFill>
-            <a:srgbClr val="F5F3FF"/>
-          </a:solidFill>
-          <a:ln/>
-        </p:spPr>
-      </p:sp>
-      <p:sp>
-        <p:nvSpPr>
-          <p:cNvPr id="38" name="Text 36"/>
-          <p:cNvSpPr/>
-          <p:nvPr/>
-        </p:nvSpPr>
-        <p:spPr>
-          <a:xfrm>
-            <a:off x="4535424" y="5961888"/>
-            <a:ext cx="3520440" cy="201168"/>
-          </a:xfrm>
-          <a:prstGeom prst="rect">
-            <a:avLst/>
-          </a:prstGeom>
-          <a:noFill/>
-          <a:ln/>
-        </p:spPr>
-        <p:txBody>
-          <a:bodyPr wrap="square" rtlCol="0" anchor="ctr"/>
-          <a:lstStyle/>
-          <a:p>
-            <a:pPr indent="0" marL="0">
-              <a:buNone/>
-            </a:pPr>
-            <a:r>
-              <a:rPr lang="en-US" sz="780" b="1" dirty="0">
-                <a:solidFill>
-                  <a:srgbClr val="6B2BD9"/>
-                </a:solidFill>
-                <a:latin typeface="Calibri" pitchFamily="34" charset="0"/>
-                <a:ea typeface="Calibri" pitchFamily="34" charset="-122"/>
-                <a:cs typeface="Calibri" pitchFamily="34" charset="-120"/>
-              </a:rPr>
-              <a:t>🔒  Policy stack complete before licence — 6-9 month structural advantage over any new entrant</a:t>
-            </a:r>
-            <a:endParaRPr lang="en-US" sz="780" dirty="0"/>
-          </a:p>
-        </p:txBody>
-      </p:sp>
-      <p:sp>
-        <p:nvSpPr>
-          <p:cNvPr id="39" name="Text 37"/>
-          <p:cNvSpPr/>
-          <p:nvPr/>
-        </p:nvSpPr>
-        <p:spPr>
-          <a:xfrm>
-            <a:off x="8549640" y="4864608"/>
-            <a:ext cx="411480" cy="256032"/>
-          </a:xfrm>
-          <a:prstGeom prst="rect">
-            <a:avLst/>
-          </a:prstGeom>
-          <a:noFill/>
-          <a:ln/>
-        </p:spPr>
-        <p:txBody>
-          <a:bodyPr wrap="square" rtlCol="0" anchor="ctr"/>
-          <a:lstStyle/>
-          <a:p>
-            <a:pPr algn="r" indent="0" marL="0">
-              <a:buNone/>
-            </a:pPr>
-            <a:r>
-              <a:rPr lang="en-US" sz="1000" b="1" dirty="0">
-                <a:solidFill>
-                  <a:srgbClr val="8E99B0"/>
-                </a:solidFill>
-                <a:latin typeface="Calibri" pitchFamily="34" charset="0"/>
-                <a:ea typeface="Calibri" pitchFamily="34" charset="-122"/>
-                <a:cs typeface="Calibri" pitchFamily="34" charset="-120"/>
-              </a:rPr>
-              <a:t>5B</a:t>
-            </a:r>
-            <a:endParaRPr lang="en-US" sz="1000" dirty="0"/>
-          </a:p>
-        </p:txBody>
-      </p:sp>
-      <p:sp>
-        <p:nvSpPr>
-          <p:cNvPr id="40" name="Shape 38"/>
+          <p:cNvPr id="42" name="Shape 40"/>
           <p:cNvSpPr/>
           <p:nvPr/>
         </p:nvSpPr>
@@ -16235,7 +15237,7 @@
                 <a:ea typeface="Calibri" pitchFamily="34" charset="-122"/>
                 <a:cs typeface="Calibri" pitchFamily="34" charset="-120"/>
               </a:rPr>
-              <a:t>Applications, loan book, daily-EMI collections engine, DPD buckets, portfolio analytics. 17-table production database.</a:t>
+              <a:t>Applications, loan book, virtual-account collections engine, DPD buckets, portfolio analytics. 17-table production database.</a:t>
             </a:r>
             <a:endParaRPr lang="en-US" sz="1050" dirty="0"/>
           </a:p>
@@ -18818,7 +17820,7 @@
                 <a:ea typeface="Calibri" pitchFamily="34" charset="-122"/>
                 <a:cs typeface="Calibri" pitchFamily="34" charset="-120"/>
               </a:rPr>
-              <a:t>EMI that follows the cash</a:t>
+              <a:t>Collection at the source</a:t>
             </a:r>
             <a:endParaRPr lang="en-US" sz="1550" dirty="0"/>
           </a:p>
@@ -18877,7 +17879,7 @@
                 <a:ea typeface="Calibri" pitchFamily="34" charset="-122"/>
                 <a:cs typeface="Calibri" pitchFamily="34" charset="-120"/>
               </a:rPr>
-              <a:t>DAILY EMI auto-debited 9–11 PM — right after the dinner-rush peak</a:t>
+              <a:t>Virtual account (Castler) intercepts Swiggy/Zomato settlements at source</a:t>
             </a:r>
             <a:endParaRPr lang="en-US" sz="950" dirty="0"/>
           </a:p>
@@ -18936,7 +17938,7 @@
                 <a:ea typeface="Calibri" pitchFamily="34" charset="-122"/>
                 <a:cs typeface="Calibri" pitchFamily="34" charset="-120"/>
               </a:rPr>
-              <a:t>Multi-bank waterfall: primary → secondary → tertiary standing instructions</a:t>
+              <a:t>EMI auto-deducted before the borrower is paid; remainder swept to the outlet</a:t>
             </a:r>
             <a:endParaRPr lang="en-US" sz="950" dirty="0"/>
           </a:p>
@@ -19240,7 +18242,7 @@
                 <a:ea typeface="Calibri" pitchFamily="34" charset="-122"/>
                 <a:cs typeface="Calibri" pitchFamily="34" charset="-120"/>
               </a:rPr>
-              <a:t>Clean payers earn weekly/monthly EMI upgrades + cross-sell after 6 months</a:t>
+              <a:t>Weekly collection; clean payers earn better terms + cross-sell after 6 months</a:t>
             </a:r>
             <a:endParaRPr lang="en-US" sz="950" dirty="0"/>
           </a:p>
@@ -19507,7 +18509,7 @@
                 <a:ea typeface="Calibri" pitchFamily="34" charset="-122"/>
                 <a:cs typeface="Calibri" pitchFamily="34" charset="-120"/>
               </a:rPr>
-              <a:t>Generic lenders run ITR + CIBIL. We run the restaurant.</a:t>
+              <a:t>We reconcile bank + aggregator data and score the agreement — not the claim.</a:t>
             </a:r>
             <a:endParaRPr lang="en-US" sz="1300" dirty="0"/>
           </a:p>
@@ -22172,7 +21174,7 @@
                 <a:ea typeface="Calibri" pitchFamily="34" charset="-122"/>
                 <a:cs typeface="Calibri" pitchFamily="34" charset="-120"/>
               </a:rPr>
-              <a:t>We collect at 9 PM — when the till is full.</a:t>
+              <a:t>We collect at the source — before the borrower is paid.</a:t>
             </a:r>
             <a:endParaRPr lang="en-US" sz="2700" dirty="0"/>
           </a:p>
@@ -22211,7 +21213,7 @@
                 <a:ea typeface="Calibri" pitchFamily="34" charset="-122"/>
                 <a:cs typeface="Calibri" pitchFamily="34" charset="-120"/>
               </a:rPr>
-              <a:t>The single biggest design unlock in HORECA lending. No competitor does this.</a:t>
+              <a:t>A virtual account (via Castler) intercepts aggregator settlements. Repayment becomes structural, not behavioural.</a:t>
             </a:r>
             <a:endParaRPr lang="en-US" sz="1300" dirty="0"/>
           </a:p>
@@ -22293,7 +21295,7 @@
                 <a:ea typeface="Calibri" pitchFamily="34" charset="-122"/>
                 <a:cs typeface="Calibri" pitchFamily="34" charset="-120"/>
               </a:rPr>
-              <a:t>EMI window</a:t>
+              <a:t>Deducted at source</a:t>
             </a:r>
             <a:endParaRPr lang="en-US" sz="750" dirty="0"/>
           </a:p>
@@ -22310,7 +21312,7 @@
                 <a:ea typeface="Calibri" pitchFamily="34" charset="-122"/>
                 <a:cs typeface="Calibri" pitchFamily="34" charset="-120"/>
               </a:rPr>
-              <a:t>9–11 PM</a:t>
+              <a:t>Before payout</a:t>
             </a:r>
             <a:endParaRPr lang="en-US" sz="750" dirty="0"/>
           </a:p>
@@ -22349,7 +21351,7 @@
                 <a:ea typeface="Calibri" pitchFamily="34" charset="-122"/>
                 <a:cs typeface="Calibri" pitchFamily="34" charset="-120"/>
               </a:rPr>
-              <a:t>Sales peak 8–10 PM → standing instruction fires 9–11 PM, by outlet type &amp; city</a:t>
+              <a:t>Swiggy/Zomato settlements route through the Castler virtual account; EMI comes out first, remainder sweeps to the outlet</a:t>
             </a:r>
             <a:endParaRPr lang="en-US" sz="900" dirty="0"/>
           </a:p>
@@ -22447,7 +21449,7 @@
                 <a:ea typeface="Calibri" pitchFamily="34" charset="-122"/>
                 <a:cs typeface="Calibri" pitchFamily="34" charset="-120"/>
               </a:rPr>
-              <a:t>Daily EMI ≈ ₹3,500, not monthly ₹1,05,000</a:t>
+              <a:t>Collected before the borrower can spend it</a:t>
             </a:r>
             <a:endParaRPr lang="en-US" sz="1150" dirty="0"/>
           </a:p>
@@ -22489,7 +21491,7 @@
                 <a:ea typeface="Calibri" pitchFamily="34" charset="-122"/>
                 <a:cs typeface="Calibri" pitchFamily="34" charset="-120"/>
               </a:rPr>
-              <a:t>A bad Tuesday costs one day's EMI — not the month. Borrower stress and default probability collapse together.</a:t>
+              <a:t>The borrower can't forget, go overdrawn, or deprioritise us — the money is taken at the source of funds.</a:t>
             </a:r>
             <a:endParaRPr lang="en-US" sz="900" dirty="0"/>
           </a:p>
@@ -22587,7 +21589,7 @@
                 <a:ea typeface="Calibri" pitchFamily="34" charset="-122"/>
                 <a:cs typeface="Calibri" pitchFamily="34" charset="-120"/>
               </a:rPr>
-              <a:t>Multi-bank waterfall</a:t>
+              <a:t>Castler escrow rails</a:t>
             </a:r>
             <a:endParaRPr lang="en-US" sz="1150" dirty="0"/>
           </a:p>
@@ -22629,7 +21631,7 @@
                 <a:ea typeface="Calibri" pitchFamily="34" charset="-122"/>
                 <a:cs typeface="Calibri" pitchFamily="34" charset="-120"/>
               </a:rPr>
-              <a:t>Primary → secondary → tertiary accounts tried in sequence. HORECA's multi-account reality becomes our collection asset.</a:t>
+              <a:t>The same regulated escrow rails Mahindra Finance, IIFL and Oxyzo run on — RBI/SEBI-aligned, ISO 27001, banking partners incl. IDFC, SBI, Kotak.</a:t>
             </a:r>
             <a:endParaRPr lang="en-US" sz="900" dirty="0"/>
           </a:p>
@@ -22727,7 +21729,7 @@
                 <a:ea typeface="Calibri" pitchFamily="34" charset="-122"/>
                 <a:cs typeface="Calibri" pitchFamily="34" charset="-120"/>
               </a:rPr>
-              <a:t>Recoup window all month</a:t>
+              <a:t>Collection cost collapses</a:t>
             </a:r>
             <a:endParaRPr lang="en-US" sz="1150" dirty="0"/>
           </a:p>
@@ -22769,7 +21771,7 @@
                 <a:ea typeface="Calibri" pitchFamily="34" charset="-122"/>
                 <a:cs typeface="Calibri" pitchFamily="34" charset="-120"/>
               </a:rPr>
-              <a:t>Missed days can be made up any day before month-end. Bureau reporting is monthly-cumulative — daily slips never scar the borrower's CIBIL.</a:t>
+              <a:t>No field collection, no bounce cycles for the performing book. The rails do the work — opex per performing loan approaches a bank transfer.</a:t>
             </a:r>
             <a:endParaRPr lang="en-US" sz="900" dirty="0"/>
           </a:p>
@@ -22867,7 +21869,7 @@
                 <a:ea typeface="Calibri" pitchFamily="34" charset="-122"/>
                 <a:cs typeface="Calibri" pitchFamily="34" charset="-120"/>
               </a:rPr>
-              <a:t>Good behaviour graduates</a:t>
+              <a:t>Lower loss → cheaper loans</a:t>
             </a:r>
             <a:endParaRPr lang="en-US" sz="1150" dirty="0"/>
           </a:p>
@@ -22909,7 +21911,7 @@
                 <a:ea typeface="Calibri" pitchFamily="34" charset="-122"/>
                 <a:cs typeface="Calibri" pitchFamily="34" charset="-120"/>
               </a:rPr>
-              <a:t>6 clean months → option of weekly/monthly EMI + larger Cycle-2 limits. Collections doubles as a retention engine.</a:t>
+              <a:t>At-source collection cuts expected loss on settled revenue — so we approve outlets a bank rejects, below informal-lender rates.</a:t>
             </a:r>
             <a:endParaRPr lang="en-US" sz="900" dirty="0"/>
           </a:p>

--- a/public/RasoiCapital_PitchDeck.pptx
+++ b/public/RasoiCapital_PitchDeck.pptx
@@ -3048,7 +3048,7 @@
                 <a:ea typeface="Calibri" pitchFamily="34" charset="-122"/>
                 <a:cs typeface="Calibri" pitchFamily="34" charset="-120"/>
               </a:rPr>
-              <a:t>₹50 Cr</a:t>
+              <a:t>₹60 Cr</a:t>
             </a:r>
             <a:endParaRPr lang="en-US" sz="1500" dirty="0"/>
           </a:p>
@@ -3390,7 +3390,7 @@
                 <a:ea typeface="Calibri" pitchFamily="34" charset="-122"/>
                 <a:cs typeface="Calibri" pitchFamily="34" charset="-120"/>
               </a:rPr>
-              <a:t>Nexus AI  ·  Bengaluru  ·  Investor Presentation  ·  June 2026</a:t>
+              <a:t>Nexus AI  ·  Bengaluru  ·  Investor Presentation  ·  July 2026</a:t>
             </a:r>
             <a:endParaRPr lang="en-US" sz="1000" dirty="0"/>
           </a:p>
@@ -7892,7 +7892,7 @@
                 <a:ea typeface="Calibri" pitchFamily="34" charset="-122"/>
                 <a:cs typeface="Calibri" pitchFamily="34" charset="-120"/>
               </a:rPr>
-              <a:t>repeat borrower · known daily-payment history</a:t>
+              <a:t>repeat borrower · known weekly-payment history</a:t>
             </a:r>
             <a:endParaRPr lang="en-US" sz="880" dirty="0"/>
           </a:p>
@@ -9446,7 +9446,7 @@
                 <a:ea typeface="Calibri" pitchFamily="34" charset="-122"/>
                 <a:cs typeface="Calibri" pitchFamily="34" charset="-120"/>
               </a:rPr>
-              <a:t>₹50 Cr — regulation-anchored, loan-deployed.</a:t>
+              <a:t>₹60 Cr — regulation-anchored, loan-deployed.</a:t>
             </a:r>
             <a:endParaRPr lang="en-US" sz="2700" dirty="0"/>
           </a:p>
@@ -9610,7 +9610,7 @@
                 <a:ea typeface="Calibri" pitchFamily="34" charset="-122"/>
                 <a:cs typeface="Calibri" pitchFamily="34" charset="-120"/>
               </a:rPr>
-              <a:t>52%</a:t>
+              <a:t>60%</a:t>
             </a:r>
             <a:endParaRPr lang="en-US" sz="1000" dirty="0"/>
           </a:p>
@@ -9649,7 +9649,7 @@
                 <a:ea typeface="Calibri" pitchFamily="34" charset="-122"/>
                 <a:cs typeface="Calibri" pitchFamily="34" charset="-120"/>
               </a:rPr>
-              <a:t>₹14 Cr–₹28 Cr</a:t>
+              <a:t>₹22 Cr–₹36 Cr</a:t>
             </a:r>
             <a:endParaRPr lang="en-US" sz="850" dirty="0"/>
           </a:p>
@@ -9813,7 +9813,7 @@
                 <a:ea typeface="Calibri" pitchFamily="34" charset="-122"/>
                 <a:cs typeface="Calibri" pitchFamily="34" charset="-120"/>
               </a:rPr>
-              <a:t>27%</a:t>
+              <a:t>20%</a:t>
             </a:r>
             <a:endParaRPr lang="en-US" sz="1000" dirty="0"/>
           </a:p>
@@ -10055,7 +10055,7 @@
                 <a:ea typeface="Calibri" pitchFamily="34" charset="-122"/>
                 <a:cs typeface="Calibri" pitchFamily="34" charset="-120"/>
               </a:rPr>
-              <a:t>₹2.5 Cr–₹4 Cr</a:t>
+              <a:t>₹3 Cr–₹5 Cr</a:t>
             </a:r>
             <a:endParaRPr lang="en-US" sz="850" dirty="0"/>
           </a:p>
@@ -10258,7 +10258,7 @@
                 <a:ea typeface="Calibri" pitchFamily="34" charset="-122"/>
                 <a:cs typeface="Calibri" pitchFamily="34" charset="-120"/>
               </a:rPr>
-              <a:t>₹2 Cr–₹3.5 Cr</a:t>
+              <a:t>₹2.5 Cr–₹4 Cr</a:t>
             </a:r>
             <a:endParaRPr lang="en-US" sz="850" dirty="0"/>
           </a:p>
@@ -10422,7 +10422,7 @@
                 <a:ea typeface="Calibri" pitchFamily="34" charset="-122"/>
                 <a:cs typeface="Calibri" pitchFamily="34" charset="-120"/>
               </a:rPr>
-              <a:t>6%</a:t>
+              <a:t>5%</a:t>
             </a:r>
             <a:endParaRPr lang="en-US" sz="1000" dirty="0"/>
           </a:p>
@@ -10461,7 +10461,7 @@
                 <a:ea typeface="Calibri" pitchFamily="34" charset="-122"/>
                 <a:cs typeface="Calibri" pitchFamily="34" charset="-120"/>
               </a:rPr>
-              <a:t>₹1.5 Cr–₹2.5 Cr</a:t>
+              <a:t>₹2 Cr–₹3 Cr</a:t>
             </a:r>
             <a:endParaRPr lang="en-US" sz="850" dirty="0"/>
           </a:p>
@@ -20849,7 +20849,7 @@
                 <a:ea typeface="Calibri" pitchFamily="34" charset="-122"/>
                 <a:cs typeface="Calibri" pitchFamily="34" charset="-120"/>
               </a:rPr>
-              <a:t>Daily EMI</a:t>
+              <a:t>Weekly EMI</a:t>
             </a:r>
             <a:endParaRPr lang="en-US" sz="1000" dirty="0"/>
           </a:p>
@@ -20888,7 +20888,7 @@
                 <a:ea typeface="Calibri" pitchFamily="34" charset="-122"/>
                 <a:cs typeface="Calibri" pitchFamily="34" charset="-120"/>
               </a:rPr>
-              <a:t>≈ ₹3,500/day at 9 PM</a:t>
+              <a:t>≈ ₹24,500/week at source</a:t>
             </a:r>
             <a:endParaRPr lang="en-US" sz="1000" dirty="0"/>
           </a:p>
@@ -22287,7 +22287,7 @@
                 <a:ea typeface="Calibri" pitchFamily="34" charset="-122"/>
                 <a:cs typeface="Calibri" pitchFamily="34" charset="-120"/>
               </a:rPr>
-              <a:t>Zero daily misses</a:t>
+              <a:t>Zero weekly misses</a:t>
             </a:r>
             <a:endParaRPr lang="en-US" sz="1000" dirty="0"/>
           </a:p>
@@ -22497,7 +22497,7 @@
                 <a:ea typeface="Calibri" pitchFamily="34" charset="-122"/>
                 <a:cs typeface="Calibri" pitchFamily="34" charset="-120"/>
               </a:rPr>
-              <a:t>Daily misses, monthly clean</a:t>
+              <a:t>Weekly misses, monthly clean</a:t>
             </a:r>
             <a:endParaRPr lang="en-US" sz="1000" dirty="0"/>
           </a:p>

--- a/public/RasoiCapital_PitchDeck.pptx
+++ b/public/RasoiCapital_PitchDeck.pptx
@@ -4939,7 +4939,7 @@
                 <a:ea typeface="Calibri" pitchFamily="34" charset="-122"/>
                 <a:cs typeface="Calibri" pitchFamily="34" charset="-120"/>
               </a:rPr>
-              <a:t>✓ Claude</a:t>
+              <a:t>✓ Rasoi IQ</a:t>
             </a:r>
             <a:endParaRPr lang="en-US" sz="900" dirty="0"/>
           </a:p>
@@ -6959,7 +6959,7 @@
                 <a:ea typeface="Calibri" pitchFamily="34" charset="-122"/>
                 <a:cs typeface="Calibri" pitchFamily="34" charset="-120"/>
               </a:rPr>
-              <a:t>Cycle-1 illustrative · Bucket C · ₹7L · 6 months · 19% p.a. + 2.5% PF</a:t>
+              <a:t>Cycle-1 illustrative · Bucket C · ₹7L · 24 months · 19% p.a. + 2.5% PF</a:t>
             </a:r>
             <a:endParaRPr lang="en-US" sz="1300" dirty="0"/>
           </a:p>
@@ -7020,7 +7020,7 @@
                 <a:ea typeface="Calibri" pitchFamily="34" charset="-122"/>
                 <a:cs typeface="Calibri" pitchFamily="34" charset="-120"/>
               </a:rPr>
-              <a:t>Interest income (6 mo)</a:t>
+              <a:t>Interest income (24 mo)</a:t>
             </a:r>
             <a:endParaRPr lang="en-US" sz="1050" dirty="0"/>
           </a:p>
@@ -7059,7 +7059,7 @@
                 <a:ea typeface="Calibri" pitchFamily="34" charset="-122"/>
                 <a:cs typeface="Calibri" pitchFamily="34" charset="-120"/>
               </a:rPr>
-              <a:t>+ ₹66,500</a:t>
+              <a:t>+ ₹1,46,900</a:t>
             </a:r>
             <a:endParaRPr lang="en-US" sz="1100" dirty="0"/>
           </a:p>
@@ -7220,7 +7220,7 @@
                 <a:ea typeface="Calibri" pitchFamily="34" charset="-122"/>
                 <a:cs typeface="Calibri" pitchFamily="34" charset="-120"/>
               </a:rPr>
-              <a:t>Cost of debt capital (~10%)</a:t>
+              <a:t>Cost of debt capital (~9.5%)</a:t>
             </a:r>
             <a:endParaRPr lang="en-US" sz="1050" dirty="0"/>
           </a:p>
@@ -7259,7 +7259,7 @@
                 <a:ea typeface="Calibri" pitchFamily="34" charset="-122"/>
                 <a:cs typeface="Calibri" pitchFamily="34" charset="-120"/>
               </a:rPr>
-              <a:t>− ₹35,000</a:t>
+              <a:t>− ₹73,400</a:t>
             </a:r>
             <a:endParaRPr lang="en-US" sz="1100" dirty="0"/>
           </a:p>
@@ -7320,7 +7320,7 @@
                 <a:ea typeface="Calibri" pitchFamily="34" charset="-122"/>
                 <a:cs typeface="Calibri" pitchFamily="34" charset="-120"/>
               </a:rPr>
-              <a:t>Opex + FSA + collections</a:t>
+              <a:t>Collection + opex + FSA</a:t>
             </a:r>
             <a:endParaRPr lang="en-US" sz="1050" dirty="0"/>
           </a:p>
@@ -7359,7 +7359,7 @@
                 <a:ea typeface="Calibri" pitchFamily="34" charset="-122"/>
                 <a:cs typeface="Calibri" pitchFamily="34" charset="-120"/>
               </a:rPr>
-              <a:t>− ₹4,200</a:t>
+              <a:t>− ₹35,000</a:t>
             </a:r>
             <a:endParaRPr lang="en-US" sz="1100" dirty="0"/>
           </a:p>
@@ -7420,7 +7420,7 @@
                 <a:ea typeface="Calibri" pitchFamily="34" charset="-122"/>
                 <a:cs typeface="Calibri" pitchFamily="34" charset="-120"/>
               </a:rPr>
-              <a:t>Expected credit loss (provision)</a:t>
+              <a:t>Expected credit loss (4%)</a:t>
             </a:r>
             <a:endParaRPr lang="en-US" sz="1050" dirty="0"/>
           </a:p>
@@ -7459,7 +7459,7 @@
                 <a:ea typeface="Calibri" pitchFamily="34" charset="-122"/>
                 <a:cs typeface="Calibri" pitchFamily="34" charset="-120"/>
               </a:rPr>
-              <a:t>− ₹3,500</a:t>
+              <a:t>− ₹28,000</a:t>
             </a:r>
             <a:endParaRPr lang="en-US" sz="1100" dirty="0"/>
           </a:p>
@@ -7559,7 +7559,7 @@
                 <a:ea typeface="Calibri" pitchFamily="34" charset="-122"/>
                 <a:cs typeface="Calibri" pitchFamily="34" charset="-120"/>
               </a:rPr>
-              <a:t>≈ ₹41,300</a:t>
+              <a:t>≈ ₹28,000</a:t>
             </a:r>
             <a:endParaRPr lang="en-US" sz="1500" dirty="0"/>
           </a:p>
@@ -7745,7 +7745,7 @@
                 <a:ea typeface="Calibri" pitchFamily="34" charset="-122"/>
                 <a:cs typeface="Calibri" pitchFamily="34" charset="-120"/>
               </a:rPr>
-              <a:t>6 months · prove-out · collateral by bucket</a:t>
+              <a:t>24 months · prove-out · collateral by bucket</a:t>
             </a:r>
             <a:endParaRPr lang="en-US" sz="880" dirty="0"/>
           </a:p>
@@ -9527,7 +9527,7 @@
                 <a:ea typeface="Calibri" pitchFamily="34" charset="-122"/>
                 <a:cs typeface="Calibri" pitchFamily="34" charset="-120"/>
               </a:rPr>
-              <a:t>First ~5,000 loans · Bengaluru → 4 cities · proves the book for debt lines &amp; co-lending</a:t>
+              <a:t>First ~3,000 loans (₹150 Cr Y1) · Bengaluru → 4 cities · proves the book for debt lines &amp; co-lending</a:t>
             </a:r>
             <a:endParaRPr lang="en-US" sz="850" dirty="0"/>
           </a:p>
@@ -10696,7 +10696,7 @@
                 <a:ea typeface="Calibri" pitchFamily="34" charset="-122"/>
                 <a:cs typeface="Calibri" pitchFamily="34" charset="-120"/>
               </a:rPr>
-              <a:t>From licence to ₹150 Cr AUM in 24 months.</a:t>
+              <a:t>From licence to ₹560 Cr AUM in 24 months.</a:t>
             </a:r>
             <a:endParaRPr lang="en-US" sz="2700" dirty="0"/>
           </a:p>
@@ -10941,7 +10941,7 @@
                 <a:ea typeface="Calibri" pitchFamily="34" charset="-122"/>
                 <a:cs typeface="Calibri" pitchFamily="34" charset="-120"/>
               </a:rPr>
-              <a:t>Bengaluru pilot: 200 loans, ₹6 Cr</a:t>
+              <a:t>Bengaluru pilot: 1,000 loans, ₹50 Cr</a:t>
             </a:r>
             <a:endParaRPr lang="en-US" sz="860" dirty="0"/>
           </a:p>
@@ -11311,7 +11311,7 @@
                 <a:ea typeface="Calibri" pitchFamily="34" charset="-122"/>
                 <a:cs typeface="Calibri" pitchFamily="34" charset="-120"/>
               </a:rPr>
-              <a:t>2,500 loans · ₹35 Cr AUM</a:t>
+              <a:t>3,000 loans · ₹150 Cr AUM (end Y1)</a:t>
             </a:r>
             <a:endParaRPr lang="en-US" sz="860" dirty="0"/>
           </a:p>
@@ -11740,7 +11740,7 @@
                 <a:ea typeface="Calibri" pitchFamily="34" charset="-122"/>
                 <a:cs typeface="Calibri" pitchFamily="34" charset="-120"/>
               </a:rPr>
-              <a:t>₹80 Cr AUM on 2× leverage</a:t>
+              <a:t>₹300 Cr AUM on 2× leverage</a:t>
             </a:r>
             <a:endParaRPr lang="en-US" sz="860" dirty="0"/>
           </a:p>
@@ -11992,7 +11992,7 @@
                 <a:ea typeface="Calibri" pitchFamily="34" charset="-122"/>
                 <a:cs typeface="Calibri" pitchFamily="34" charset="-120"/>
               </a:rPr>
-              <a:t>₹150 Cr AUM · 12,000+ active loans</a:t>
+              <a:t>₹560 Cr AUM · 10,500+ active loans</a:t>
             </a:r>
             <a:endParaRPr lang="en-US" sz="860" dirty="0"/>
           </a:p>
@@ -12966,7 +12966,7 @@
                 <a:ea typeface="Calibri" pitchFamily="34" charset="-122"/>
                 <a:cs typeface="Calibri" pitchFamily="34" charset="-120"/>
               </a:rPr>
-              <a:t>🎯  Try it before you decide:  </a:t>
+              <a:t>Try it before you decide:</a:t>
             </a:r>
             <a:pPr indent="0" marL="0">
               <a:buNone/>
@@ -15552,7 +15552,7 @@
                 <a:ea typeface="Calibri" pitchFamily="34" charset="-122"/>
                 <a:cs typeface="Calibri" pitchFamily="34" charset="-120"/>
               </a:rPr>
-              <a:t>🎯  DEMO MOMENT №1 — </a:t>
+              <a:t>DEMO MOMENT №1 —</a:t>
             </a:r>
             <a:pPr indent="0" marL="0">
               <a:buNone/>
@@ -17139,7 +17139,7 @@
                 <a:ea typeface="Calibri" pitchFamily="34" charset="-122"/>
                 <a:cs typeface="Calibri" pitchFamily="34" charset="-120"/>
               </a:rPr>
-              <a:t>SOM — 5-year target</a:t>
+              <a:t>SOM — 3-year target</a:t>
             </a:r>
             <a:endParaRPr lang="en-US" sz="950" dirty="0"/>
           </a:p>
@@ -17178,7 +17178,7 @@
                 <a:ea typeface="Calibri" pitchFamily="34" charset="-122"/>
                 <a:cs typeface="Calibri" pitchFamily="34" charset="-120"/>
               </a:rPr>
-              <a:t>₹1,500 Cr AUM</a:t>
+              <a:t>₹1,700 Cr AUM</a:t>
             </a:r>
             <a:endParaRPr lang="en-US" sz="1900" dirty="0"/>
           </a:p>
@@ -17220,7 +17220,7 @@
                 <a:ea typeface="Calibri" pitchFamily="34" charset="-122"/>
                 <a:cs typeface="Calibri" pitchFamily="34" charset="-120"/>
               </a:rPr>
-              <a:t>~30,000 active loans at ₹5L average — 0.2% of outlets. Oxyzo built ₹11,822Cr AUM in broad SME; we need a sliver</a:t>
+              <a:t>~26,000 active loans (₹5–10L avg) — 0.2% of outlets. Oxyzo built ₹11,822Cr AUM in broad SME; we need a sliver</a:t>
             </a:r>
             <a:endParaRPr lang="en-US" sz="800" dirty="0"/>
           </a:p>
@@ -17474,7 +17474,7 @@
                   <a:srgbClr val="000000"/>
                 </a:solidFill>
               </a:rPr>
-              <a:t>🧠</a:t>
+              <a:t/>
             </a:r>
             <a:endParaRPr lang="en-US" sz="2600" dirty="0"/>
           </a:p>
@@ -17634,7 +17634,7 @@
                 <a:ea typeface="Calibri" pitchFamily="34" charset="-122"/>
                 <a:cs typeface="Calibri" pitchFamily="34" charset="-120"/>
               </a:rPr>
-              <a:t>Claude AI writes a full credit memo for every decision — transparent, auditable</a:t>
+              <a:t>Rasoi IQ writes a full credit memo for every decision — transparent, auditable</a:t>
             </a:r>
             <a:endParaRPr lang="en-US" sz="950" dirty="0"/>
           </a:p>
@@ -17778,7 +17778,7 @@
                   <a:srgbClr val="000000"/>
                 </a:solidFill>
               </a:rPr>
-              <a:t>⏰</a:t>
+              <a:t/>
             </a:r>
             <a:endParaRPr lang="en-US" sz="2600" dirty="0"/>
           </a:p>
@@ -17879,7 +17879,7 @@
                 <a:ea typeface="Calibri" pitchFamily="34" charset="-122"/>
                 <a:cs typeface="Calibri" pitchFamily="34" charset="-120"/>
               </a:rPr>
-              <a:t>Virtual account (Castler) intercepts Swiggy/Zomato settlements at source</a:t>
+              <a:t>A regulated virtual account intercepts Swiggy/Zomato settlements at source</a:t>
             </a:r>
             <a:endParaRPr lang="en-US" sz="950" dirty="0"/>
           </a:p>
@@ -18082,7 +18082,7 @@
                   <a:srgbClr val="000000"/>
                 </a:solidFill>
               </a:rPr>
-              <a:t>🛡️</a:t>
+              <a:t/>
             </a:r>
             <a:endParaRPr lang="en-US" sz="2600" dirty="0"/>
           </a:p>
@@ -18242,7 +18242,7 @@
                 <a:ea typeface="Calibri" pitchFamily="34" charset="-122"/>
                 <a:cs typeface="Calibri" pitchFamily="34" charset="-120"/>
               </a:rPr>
-              <a:t>Weekly collection; clean payers earn better terms + cross-sell after 6 months</a:t>
+              <a:t>Weekly collection every Friday; clean payers earn better terms + cross-sell</a:t>
             </a:r>
             <a:endParaRPr lang="en-US" sz="950" dirty="0"/>
           </a:p>
@@ -19625,7 +19625,7 @@
                 <a:ea typeface="Calibri" pitchFamily="34" charset="-122"/>
                 <a:cs typeface="Calibri" pitchFamily="34" charset="-120"/>
               </a:rPr>
-              <a:t>   +  Claude AI credit memo on every run</a:t>
+              <a:t>   +  Rasoi IQ credit memo on every run</a:t>
             </a:r>
             <a:endParaRPr lang="en-US" sz="1150" dirty="0"/>
           </a:p>
@@ -19777,7 +19777,7 @@
                 <a:ea typeface="Calibri" pitchFamily="34" charset="-122"/>
                 <a:cs typeface="Calibri" pitchFamily="34" charset="-120"/>
               </a:rPr>
-              <a:t>🎯  LIVE DEMO — 90 SECONDS</a:t>
+              <a:t>LIVE DEMO — 90 SECONDS</a:t>
             </a:r>
             <a:endParaRPr lang="en-US" sz="1200" dirty="0"/>
           </a:p>
@@ -20001,7 +20001,7 @@
                 <a:ea typeface="Calibri" pitchFamily="34" charset="-122"/>
                 <a:cs typeface="Calibri" pitchFamily="34" charset="-120"/>
               </a:rPr>
-              <a:t>Spice Garden Cafe, Bengaluru</a:t>
+              <a:t>Green Leaf Cafe, Bengaluru</a:t>
             </a:r>
             <a:endParaRPr lang="en-US" sz="1000" dirty="0"/>
           </a:p>
@@ -20391,7 +20391,7 @@
                 <a:ea typeface="Calibri" pitchFamily="34" charset="-122"/>
                 <a:cs typeface="Calibri" pitchFamily="34" charset="-120"/>
               </a:rPr>
-              <a:t>2 positive · 1 average</a:t>
+              <a:t>3 positive · 0 flags</a:t>
             </a:r>
             <a:endParaRPr lang="en-US" sz="1000" dirty="0"/>
           </a:p>
@@ -20576,7 +20576,7 @@
                 <a:ea typeface="Calibri" pitchFamily="34" charset="-122"/>
                 <a:cs typeface="Calibri" pitchFamily="34" charset="-120"/>
               </a:rPr>
-              <a:t>3.70 / 5.00</a:t>
+              <a:t>4.05 / 5.00</a:t>
             </a:r>
             <a:endParaRPr lang="en-US" sz="1000" dirty="0"/>
           </a:p>
@@ -20654,7 +20654,7 @@
                 <a:ea typeface="Calibri" pitchFamily="34" charset="-122"/>
                 <a:cs typeface="Calibri" pitchFamily="34" charset="-120"/>
               </a:rPr>
-              <a:t>C — Approve w/ conditions</a:t>
+              <a:t>G — Auto-approve</a:t>
             </a:r>
             <a:endParaRPr lang="en-US" sz="1000" dirty="0"/>
           </a:p>
@@ -20927,7 +20927,7 @@
                 <a:ea typeface="Calibri" pitchFamily="34" charset="-122"/>
                 <a:cs typeface="Calibri" pitchFamily="34" charset="-120"/>
               </a:rPr>
-              <a:t>+ Claude credit memo</a:t>
+              <a:t>+ Rasoi IQ credit memo</a:t>
             </a:r>
             <a:endParaRPr lang="en-US" sz="1000" dirty="0"/>
           </a:p>
@@ -20966,7 +20966,7 @@
                 <a:ea typeface="Calibri" pitchFamily="34" charset="-122"/>
                 <a:cs typeface="Calibri" pitchFamily="34" charset="-120"/>
               </a:rPr>
-              <a:t>weak factors · path to G</a:t>
+              <a:t>clean file · TRUSTED (DIS 91)</a:t>
             </a:r>
             <a:endParaRPr lang="en-US" sz="1000" dirty="0"/>
           </a:p>
@@ -21213,7 +21213,7 @@
                 <a:ea typeface="Calibri" pitchFamily="34" charset="-122"/>
                 <a:cs typeface="Calibri" pitchFamily="34" charset="-120"/>
               </a:rPr>
-              <a:t>A virtual account (via Castler) intercepts aggregator settlements. Repayment becomes structural, not behavioural.</a:t>
+              <a:t>A regulated virtual account intercepts aggregator settlements. Repayment becomes structural, not behavioural.</a:t>
             </a:r>
             <a:endParaRPr lang="en-US" sz="1300" dirty="0"/>
           </a:p>
@@ -21351,7 +21351,7 @@
                 <a:ea typeface="Calibri" pitchFamily="34" charset="-122"/>
                 <a:cs typeface="Calibri" pitchFamily="34" charset="-120"/>
               </a:rPr>
-              <a:t>Swiggy/Zomato settlements route through the Castler virtual account; EMI comes out first, remainder sweeps to the outlet</a:t>
+              <a:t>Swiggy/Zomato settlements route through our virtual account every Friday; EMI comes out first, remainder sweeps to the outlet</a:t>
             </a:r>
             <a:endParaRPr lang="en-US" sz="900" dirty="0"/>
           </a:p>
@@ -21589,7 +21589,7 @@
                 <a:ea typeface="Calibri" pitchFamily="34" charset="-122"/>
                 <a:cs typeface="Calibri" pitchFamily="34" charset="-120"/>
               </a:rPr>
-              <a:t>Castler escrow rails</a:t>
+              <a:t>Regulated escrow rails</a:t>
             </a:r>
             <a:endParaRPr lang="en-US" sz="1150" dirty="0"/>
           </a:p>
